--- a/血液与肿瘤/PBL作业/Case1-第二幕/总PPT构建/output/第二幕总汇报-支持页.pptx
+++ b/血液与肿瘤/PBL作业/Case1-第二幕/总PPT构建/output/第二幕总汇报-支持页.pptx
@@ -2218,69 +2218,35 @@
         </p:nvSpPr>
         <p:spPr>
           <a:xfrm>
-            <a:off x="0" y="0"/>
-            <a:ext cx="12191695" cy="1097280"/>
-          </a:xfrm>
-          <a:prstGeom prst="rect">
-            <a:avLst/>
-          </a:prstGeom>
-          <a:solidFill>
-            <a:srgbClr val="274B87"/>
-          </a:solidFill>
-          <a:ln w="12700">
-            <a:solidFill>
-              <a:srgbClr val="274B87">
-                <a:alpha val="0"/>
-              </a:srgbClr>
-            </a:solidFill>
-            <a:prstDash val="solid"/>
-          </a:ln>
-        </p:spPr>
-      </p:sp>
-      <p:sp>
-        <p:nvSpPr>
-          <p:cNvPr id="3" name="Shape 1"/>
-          <p:cNvSpPr/>
-          <p:nvPr/>
-        </p:nvSpPr>
-        <p:spPr>
-          <a:xfrm>
-            <a:off x="658368" y="1600200"/>
-            <a:ext cx="10881360" cy="3154680"/>
+            <a:off x="804672" y="960120"/>
+            <a:ext cx="10588752" cy="5074920"/>
           </a:xfrm>
           <a:prstGeom prst="roundRect">
             <a:avLst>
-              <a:gd name="adj" fmla="val 2319"/>
+              <a:gd name="adj" fmla="val 1081"/>
             </a:avLst>
           </a:prstGeom>
           <a:solidFill>
             <a:srgbClr val="FFFFFF"/>
           </a:solidFill>
-          <a:ln w="12700">
+          <a:ln w="13970">
             <a:solidFill>
               <a:srgbClr val="DCE6F2"/>
             </a:solidFill>
             <a:prstDash val="solid"/>
           </a:ln>
-          <a:effectLst>
-            <a:outerShdw sx="100000" sy="100000" kx="0" ky="0" algn="bl" rotWithShape="0" blurRad="12700" dist="50800" dir="2700000">
-              <a:srgbClr val="000000">
-                <a:alpha val="8000"/>
-              </a:srgbClr>
-            </a:outerShdw>
-          </a:effectLst>
-        </p:spPr>
-      </p:sp>
-      <p:sp>
-        <p:nvSpPr>
-          <p:cNvPr id="4" name="Text 2"/>
-          <p:cNvSpPr/>
-          <p:nvPr/>
-        </p:nvSpPr>
-        <p:spPr>
-          <a:xfrm>
-            <a:off x="841248" y="1965960"/>
-            <a:ext cx="7132320" cy="640080"/>
+        </p:spPr>
+      </p:sp>
+      <p:sp>
+        <p:nvSpPr>
+          <p:cNvPr id="3" name="Text 1"/>
+          <p:cNvSpPr/>
+          <p:nvPr/>
+        </p:nvSpPr>
+        <p:spPr>
+          <a:xfrm>
+            <a:off x="1234440" y="1572768"/>
+            <a:ext cx="9692640" cy="731520"/>
           </a:xfrm>
           <a:prstGeom prst="rect">
             <a:avLst/>
@@ -2292,11 +2258,11 @@
           <a:bodyPr wrap="square" lIns="0" tIns="0" rIns="0" bIns="0" rtlCol="0" anchor="ctr"/>
           <a:lstStyle/>
           <a:p>
-            <a:pPr indent="0" marL="0">
-              <a:buNone/>
-            </a:pPr>
-            <a:r>
-              <a:rPr lang="en-US" sz="2600" b="1" dirty="0">
+            <a:pPr algn="ctr" indent="0" marL="0">
+              <a:buNone/>
+            </a:pPr>
+            <a:r>
+              <a:rPr lang="en-US" sz="2800" b="1" dirty="0">
                 <a:solidFill>
                   <a:srgbClr val="1E3C72"/>
                 </a:solidFill>
@@ -2306,108 +2272,26 @@
               </a:rPr>
               <a:t>PBL Case 1 第二幕</a:t>
             </a:r>
-            <a:endParaRPr lang="en-US" sz="2600" dirty="0"/>
-          </a:p>
-        </p:txBody>
-      </p:sp>
-      <p:sp>
-        <p:nvSpPr>
-          <p:cNvPr id="5" name="Text 3"/>
-          <p:cNvSpPr/>
-          <p:nvPr/>
-        </p:nvSpPr>
-        <p:spPr>
-          <a:xfrm>
-            <a:off x="841248" y="2697480"/>
-            <a:ext cx="7132320" cy="411480"/>
-          </a:xfrm>
-          <a:prstGeom prst="rect">
+            <a:endParaRPr lang="en-US" sz="2800" dirty="0"/>
+          </a:p>
+        </p:txBody>
+      </p:sp>
+      <p:sp>
+        <p:nvSpPr>
+          <p:cNvPr id="4" name="Shape 2"/>
+          <p:cNvSpPr/>
+          <p:nvPr/>
+        </p:nvSpPr>
+        <p:spPr>
+          <a:xfrm>
+            <a:off x="2788920" y="2468880"/>
+            <a:ext cx="6583680" cy="0"/>
+          </a:xfrm>
+          <a:prstGeom prst="line">
             <a:avLst/>
           </a:prstGeom>
           <a:noFill/>
-          <a:ln/>
-        </p:spPr>
-        <p:txBody>
-          <a:bodyPr wrap="square" lIns="0" tIns="0" rIns="0" bIns="0" rtlCol="0" anchor="ctr"/>
-          <a:lstStyle/>
-          <a:p>
-            <a:pPr indent="0" marL="0">
-              <a:buNone/>
-            </a:pPr>
-            <a:r>
-              <a:rPr lang="en-US" sz="1800" dirty="0">
-                <a:solidFill>
-                  <a:srgbClr val="475569"/>
-                </a:solidFill>
-                <a:latin typeface="Microsoft YaHei" pitchFamily="34" charset="0"/>
-                <a:ea typeface="Microsoft YaHei" pitchFamily="34" charset="-122"/>
-                <a:cs typeface="Microsoft YaHei" pitchFamily="34" charset="-120"/>
-              </a:rPr>
-              <a:t>血液与肿瘤课程汇报总整合版</a:t>
-            </a:r>
-            <a:endParaRPr lang="en-US" sz="1800" dirty="0"/>
-          </a:p>
-        </p:txBody>
-      </p:sp>
-      <p:sp>
-        <p:nvSpPr>
-          <p:cNvPr id="6" name="Text 4"/>
-          <p:cNvSpPr/>
-          <p:nvPr/>
-        </p:nvSpPr>
-        <p:spPr>
-          <a:xfrm>
-            <a:off x="841248" y="3246120"/>
-            <a:ext cx="4754880" cy="347472"/>
-          </a:xfrm>
-          <a:prstGeom prst="rect">
-            <a:avLst/>
-          </a:prstGeom>
-          <a:noFill/>
-          <a:ln/>
-        </p:spPr>
-        <p:txBody>
-          <a:bodyPr wrap="square" lIns="0" tIns="0" rIns="0" bIns="0" rtlCol="0" anchor="ctr"/>
-          <a:lstStyle/>
-          <a:p>
-            <a:pPr indent="0" marL="0">
-              <a:buNone/>
-            </a:pPr>
-            <a:r>
-              <a:rPr lang="en-US" sz="1300" b="1" dirty="0">
-                <a:solidFill>
-                  <a:srgbClr val="0F766E"/>
-                </a:solidFill>
-                <a:latin typeface="Microsoft YaHei" pitchFamily="34" charset="0"/>
-                <a:ea typeface="Microsoft YaHei" pitchFamily="34" charset="-122"/>
-                <a:cs typeface="Microsoft YaHei" pitchFamily="34" charset="-120"/>
-              </a:rPr>
-              <a:t>主持串讲稿 · 问题1到问题6完整顺序</a:t>
-            </a:r>
-            <a:endParaRPr lang="en-US" sz="1300" dirty="0"/>
-          </a:p>
-        </p:txBody>
-      </p:sp>
-      <p:sp>
-        <p:nvSpPr>
-          <p:cNvPr id="7" name="Shape 5"/>
-          <p:cNvSpPr/>
-          <p:nvPr/>
-        </p:nvSpPr>
-        <p:spPr>
-          <a:xfrm>
-            <a:off x="8183880" y="1828800"/>
-            <a:ext cx="2697480" cy="1508760"/>
-          </a:xfrm>
-          <a:prstGeom prst="roundRect">
-            <a:avLst>
-              <a:gd name="adj" fmla="val 3636"/>
-            </a:avLst>
-          </a:prstGeom>
-          <a:solidFill>
-            <a:srgbClr val="EFF6FF"/>
-          </a:solidFill>
-          <a:ln w="15240">
+          <a:ln w="16510">
             <a:solidFill>
               <a:srgbClr val="BFDBFE"/>
             </a:solidFill>
@@ -2417,14 +2301,14 @@
       </p:sp>
       <p:sp>
         <p:nvSpPr>
-          <p:cNvPr id="8" name="Text 6"/>
-          <p:cNvSpPr/>
-          <p:nvPr/>
-        </p:nvSpPr>
-        <p:spPr>
-          <a:xfrm>
-            <a:off x="8412480" y="2057400"/>
-            <a:ext cx="2240280" cy="256032"/>
+          <p:cNvPr id="5" name="Text 3"/>
+          <p:cNvSpPr/>
+          <p:nvPr/>
+        </p:nvSpPr>
+        <p:spPr>
+          <a:xfrm>
+            <a:off x="1234440" y="2788920"/>
+            <a:ext cx="9692640" cy="310896"/>
           </a:xfrm>
           <a:prstGeom prst="rect">
             <a:avLst/>
@@ -2440,30 +2324,30 @@
               <a:buNone/>
             </a:pPr>
             <a:r>
-              <a:rPr lang="en-US" sz="1200" b="1" dirty="0">
-                <a:solidFill>
-                  <a:srgbClr val="2563EB"/>
-                </a:solidFill>
-                <a:latin typeface="Microsoft YaHei" pitchFamily="34" charset="0"/>
-                <a:ea typeface="Microsoft YaHei" pitchFamily="34" charset="-122"/>
-                <a:cs typeface="Microsoft YaHei" pitchFamily="34" charset="-120"/>
-              </a:rPr>
-              <a:t>第二幕问题主线</a:t>
-            </a:r>
-            <a:endParaRPr lang="en-US" sz="1200" dirty="0"/>
-          </a:p>
-        </p:txBody>
-      </p:sp>
-      <p:sp>
-        <p:nvSpPr>
-          <p:cNvPr id="9" name="Text 7"/>
-          <p:cNvSpPr/>
-          <p:nvPr/>
-        </p:nvSpPr>
-        <p:spPr>
-          <a:xfrm>
-            <a:off x="8412480" y="2487168"/>
-            <a:ext cx="2240280" cy="420624"/>
+              <a:rPr lang="en-US" sz="1500" b="1" dirty="0">
+                <a:solidFill>
+                  <a:srgbClr val="475569"/>
+                </a:solidFill>
+                <a:latin typeface="Microsoft YaHei" pitchFamily="34" charset="0"/>
+                <a:ea typeface="Microsoft YaHei" pitchFamily="34" charset="-122"/>
+                <a:cs typeface="Microsoft YaHei" pitchFamily="34" charset="-120"/>
+              </a:rPr>
+              <a:t>汇报成员</a:t>
+            </a:r>
+            <a:endParaRPr lang="en-US" sz="1500" dirty="0"/>
+          </a:p>
+        </p:txBody>
+      </p:sp>
+      <p:sp>
+        <p:nvSpPr>
+          <p:cNvPr id="6" name="Text 4"/>
+          <p:cNvSpPr/>
+          <p:nvPr/>
+        </p:nvSpPr>
+        <p:spPr>
+          <a:xfrm>
+            <a:off x="1078992" y="3273552"/>
+            <a:ext cx="10058400" cy="1005840"/>
           </a:xfrm>
           <a:prstGeom prst="rect">
             <a:avLst/>
@@ -2479,30 +2363,30 @@
               <a:buNone/>
             </a:pPr>
             <a:r>
-              <a:rPr lang="en-US" sz="1600" b="1" dirty="0">
-                <a:solidFill>
-                  <a:srgbClr val="1E3A8A"/>
-                </a:solidFill>
-                <a:latin typeface="Microsoft YaHei" pitchFamily="34" charset="0"/>
-                <a:ea typeface="Microsoft YaHei" pitchFamily="34" charset="-122"/>
-                <a:cs typeface="Microsoft YaHei" pitchFamily="34" charset="-120"/>
-              </a:rPr>
-              <a:t>Q1 → Q2 → Q3 → Q4 → Q5 → Q6</a:t>
-            </a:r>
-            <a:endParaRPr lang="en-US" sz="1600" dirty="0"/>
-          </a:p>
-        </p:txBody>
-      </p:sp>
-      <p:sp>
-        <p:nvSpPr>
-          <p:cNvPr id="10" name="Text 8"/>
-          <p:cNvSpPr/>
-          <p:nvPr/>
-        </p:nvSpPr>
-        <p:spPr>
-          <a:xfrm>
-            <a:off x="8211312" y="2971800"/>
-            <a:ext cx="2651760" cy="219456"/>
+              <a:rPr lang="en-US" sz="1800" dirty="0">
+                <a:solidFill>
+                  <a:srgbClr val="475569"/>
+                </a:solidFill>
+                <a:latin typeface="Microsoft YaHei" pitchFamily="34" charset="0"/>
+                <a:ea typeface="Microsoft YaHei" pitchFamily="34" charset="-122"/>
+                <a:cs typeface="Microsoft YaHei" pitchFamily="34" charset="-120"/>
+              </a:rPr>
+              <a:t>张家赫  ·  戴思如  ·  樊滨瑞  ·  李宗垚  ·  乔智  ·  善玥  ·  王语萱  ·  叶潇潇  ·  钟琬毓  ·  仇维健</a:t>
+            </a:r>
+            <a:endParaRPr lang="en-US" sz="1800" dirty="0"/>
+          </a:p>
+        </p:txBody>
+      </p:sp>
+      <p:sp>
+        <p:nvSpPr>
+          <p:cNvPr id="7" name="Text 5"/>
+          <p:cNvSpPr/>
+          <p:nvPr/>
+        </p:nvSpPr>
+        <p:spPr>
+          <a:xfrm>
+            <a:off x="1234440" y="4773168"/>
+            <a:ext cx="9692640" cy="274320"/>
           </a:xfrm>
           <a:prstGeom prst="rect">
             <a:avLst/>
@@ -2518,7 +2402,7 @@
               <a:buNone/>
             </a:pPr>
             <a:r>
-              <a:rPr lang="en-US" sz="1000" dirty="0">
+              <a:rPr lang="en-US" sz="1300" dirty="0">
                 <a:solidFill>
                   <a:srgbClr val="64748B"/>
                 </a:solidFill>
@@ -2526,87 +2410,9 @@
                 <a:ea typeface="Microsoft YaHei" pitchFamily="34" charset="-122"/>
                 <a:cs typeface="Microsoft YaHei" pitchFamily="34" charset="-120"/>
               </a:rPr>
-              <a:t>主持人负责串讲顺序与起承转合</a:t>
-            </a:r>
-            <a:endParaRPr lang="en-US" sz="1000" dirty="0"/>
-          </a:p>
-        </p:txBody>
-      </p:sp>
-      <p:sp>
-        <p:nvSpPr>
-          <p:cNvPr id="11" name="Text 9"/>
-          <p:cNvSpPr/>
-          <p:nvPr/>
-        </p:nvSpPr>
-        <p:spPr>
-          <a:xfrm>
-            <a:off x="502920" y="6419088"/>
-            <a:ext cx="6217920" cy="201168"/>
-          </a:xfrm>
-          <a:prstGeom prst="rect">
-            <a:avLst/>
-          </a:prstGeom>
-          <a:noFill/>
-          <a:ln/>
-        </p:spPr>
-        <p:txBody>
-          <a:bodyPr wrap="square" lIns="0" tIns="0" rIns="0" bIns="0" rtlCol="0" anchor="ctr"/>
-          <a:lstStyle/>
-          <a:p>
-            <a:pPr indent="0" marL="0">
-              <a:buNone/>
-            </a:pPr>
-            <a:r>
-              <a:rPr lang="en-US" sz="900" i="1" dirty="0">
-                <a:solidFill>
-                  <a:srgbClr val="94A3B8"/>
-                </a:solidFill>
-                <a:latin typeface="Microsoft YaHei" pitchFamily="34" charset="0"/>
-                <a:ea typeface="Microsoft YaHei" pitchFamily="34" charset="-122"/>
-                <a:cs typeface="Microsoft YaHei" pitchFamily="34" charset="-120"/>
-              </a:rPr>
-              <a:t>第二幕总汇报封面</a:t>
-            </a:r>
-            <a:endParaRPr lang="en-US" sz="900" dirty="0"/>
-          </a:p>
-        </p:txBody>
-      </p:sp>
-      <p:sp>
-        <p:nvSpPr>
-          <p:cNvPr id="12" name="Text 10"/>
-          <p:cNvSpPr/>
-          <p:nvPr/>
-        </p:nvSpPr>
-        <p:spPr>
-          <a:xfrm>
-            <a:off x="7909560" y="6400800"/>
-            <a:ext cx="3749040" cy="228600"/>
-          </a:xfrm>
-          <a:prstGeom prst="rect">
-            <a:avLst/>
-          </a:prstGeom>
-          <a:noFill/>
-          <a:ln/>
-        </p:spPr>
-        <p:txBody>
-          <a:bodyPr wrap="square" lIns="0" tIns="0" rIns="0" bIns="0" rtlCol="0" anchor="ctr"/>
-          <a:lstStyle/>
-          <a:p>
-            <a:pPr algn="r" indent="0" marL="0">
-              <a:buNone/>
-            </a:pPr>
-            <a:r>
-              <a:rPr lang="en-US" sz="900" dirty="0">
-                <a:solidFill>
-                  <a:srgbClr val="64748B"/>
-                </a:solidFill>
-                <a:latin typeface="Microsoft YaHei" pitchFamily="34" charset="0"/>
-                <a:ea typeface="Microsoft YaHei" pitchFamily="34" charset="-122"/>
-                <a:cs typeface="Microsoft YaHei" pitchFamily="34" charset="-120"/>
-              </a:rPr>
-              <a:t>张家赫｜儿科班｜PBL Case 1 第二幕</a:t>
-            </a:r>
-            <a:endParaRPr lang="en-US" sz="900" dirty="0"/>
+              <a:t>血液与肿瘤课程 PBL 汇报</a:t>
+            </a:r>
+            <a:endParaRPr lang="en-US" sz="1300" dirty="0"/>
           </a:p>
         </p:txBody>
       </p:sp>
@@ -2624,7 +2430,7 @@
     <p:bg>
       <p:bgPr>
         <a:solidFill>
-          <a:srgbClr val="111827"/>
+          <a:srgbClr val="FFFFFF"/>
         </a:solidFill>
       </p:bgPr>
     </p:bg>
@@ -2658,14 +2464,121 @@
         </p:blipFill>
         <p:spPr>
           <a:xfrm>
-            <a:off x="0" y="86"/>
-            <a:ext cx="12191695" cy="6857829"/>
+            <a:off x="0" y="0"/>
+            <a:ext cx="12191695" cy="6858000"/>
           </a:xfrm>
           <a:prstGeom prst="rect">
             <a:avLst/>
           </a:prstGeom>
         </p:spPr>
       </p:pic>
+      <p:sp>
+        <p:nvSpPr>
+          <p:cNvPr id="3" name="Shape 0"/>
+          <p:cNvSpPr/>
+          <p:nvPr/>
+        </p:nvSpPr>
+        <p:spPr>
+          <a:xfrm>
+            <a:off x="0" y="6414516"/>
+            <a:ext cx="12191695" cy="443484"/>
+          </a:xfrm>
+          <a:prstGeom prst="rect">
+            <a:avLst/>
+          </a:prstGeom>
+          <a:solidFill>
+            <a:srgbClr val="F8FAFC"/>
+          </a:solidFill>
+          <a:ln w="10160">
+            <a:solidFill>
+              <a:srgbClr val="E2E8F0"/>
+            </a:solidFill>
+            <a:prstDash val="solid"/>
+          </a:ln>
+        </p:spPr>
+      </p:sp>
+      <p:sp>
+        <p:nvSpPr>
+          <p:cNvPr id="4" name="Text 1"/>
+          <p:cNvSpPr/>
+          <p:nvPr/>
+        </p:nvSpPr>
+        <p:spPr>
+          <a:xfrm>
+            <a:off x="384048" y="6510528"/>
+            <a:ext cx="6995160" cy="164592"/>
+          </a:xfrm>
+          <a:prstGeom prst="rect">
+            <a:avLst/>
+          </a:prstGeom>
+          <a:noFill/>
+          <a:ln/>
+        </p:spPr>
+        <p:txBody>
+          <a:bodyPr wrap="square" lIns="0" tIns="0" rIns="0" bIns="0" rtlCol="0" anchor="ctr">
+            <a:normAutofit/>
+          </a:bodyPr>
+          <a:lstStyle/>
+          <a:p>
+            <a:pPr indent="0" marL="0">
+              <a:buNone/>
+            </a:pPr>
+            <a:r>
+              <a:rPr lang="en-US" sz="820" i="1" dirty="0">
+                <a:solidFill>
+                  <a:srgbClr val="94A3B8"/>
+                </a:solidFill>
+                <a:latin typeface="Microsoft YaHei" pitchFamily="34" charset="0"/>
+                <a:ea typeface="Microsoft YaHei" pitchFamily="34" charset="-122"/>
+                <a:cs typeface="Microsoft YaHei" pitchFamily="34" charset="-120"/>
+              </a:rPr>
+              <a:t>引证：Hayashi Y, et al. Leukemia. 2013；Srutova K, et al. Haematologica. 2018.</a:t>
+            </a:r>
+            <a:endParaRPr lang="en-US" sz="820" dirty="0"/>
+          </a:p>
+        </p:txBody>
+      </p:sp>
+      <p:sp>
+        <p:nvSpPr>
+          <p:cNvPr id="5" name="Text 2"/>
+          <p:cNvSpPr/>
+          <p:nvPr/>
+        </p:nvSpPr>
+        <p:spPr>
+          <a:xfrm>
+            <a:off x="7498080" y="6501384"/>
+            <a:ext cx="4315968" cy="182880"/>
+          </a:xfrm>
+          <a:prstGeom prst="rect">
+            <a:avLst/>
+          </a:prstGeom>
+          <a:noFill/>
+          <a:ln/>
+        </p:spPr>
+        <p:txBody>
+          <a:bodyPr wrap="square" lIns="0" tIns="0" rIns="0" bIns="0" rtlCol="0" anchor="ctr">
+            <a:normAutofit/>
+          </a:bodyPr>
+          <a:lstStyle/>
+          <a:p>
+            <a:pPr algn="r" indent="0" marL="0">
+              <a:buNone/>
+            </a:pPr>
+            <a:r>
+              <a:rPr lang="en-US" sz="840" dirty="0">
+                <a:solidFill>
+                  <a:srgbClr val="64748B"/>
+                </a:solidFill>
+                <a:latin typeface="Microsoft YaHei" pitchFamily="34" charset="0"/>
+                <a:ea typeface="Microsoft YaHei" pitchFamily="34" charset="-122"/>
+                <a:cs typeface="Microsoft YaHei" pitchFamily="34" charset="-120"/>
+              </a:rPr>
+              <a:t>张家赫｜学号：2024193112｜儿科班｜PBL Case 1</a:t>
+            </a:r>
+            <a:endParaRPr lang="en-US" sz="840" dirty="0"/>
+          </a:p>
+        </p:txBody>
+      </p:sp>
     </p:spTree>
   </p:cSld>
   <p:clrMapOvr>
@@ -2680,7 +2593,7 @@
     <p:bg>
       <p:bgPr>
         <a:solidFill>
-          <a:srgbClr val="111827"/>
+          <a:srgbClr val="FFFFFF"/>
         </a:solidFill>
       </p:bgPr>
     </p:bg>
@@ -2714,14 +2627,121 @@
         </p:blipFill>
         <p:spPr>
           <a:xfrm>
-            <a:off x="0" y="86"/>
-            <a:ext cx="12191695" cy="6857829"/>
+            <a:off x="0" y="0"/>
+            <a:ext cx="12191695" cy="6858000"/>
           </a:xfrm>
           <a:prstGeom prst="rect">
             <a:avLst/>
           </a:prstGeom>
         </p:spPr>
       </p:pic>
+      <p:sp>
+        <p:nvSpPr>
+          <p:cNvPr id="3" name="Shape 0"/>
+          <p:cNvSpPr/>
+          <p:nvPr/>
+        </p:nvSpPr>
+        <p:spPr>
+          <a:xfrm>
+            <a:off x="0" y="6414516"/>
+            <a:ext cx="12191695" cy="443484"/>
+          </a:xfrm>
+          <a:prstGeom prst="rect">
+            <a:avLst/>
+          </a:prstGeom>
+          <a:solidFill>
+            <a:srgbClr val="F8FAFC"/>
+          </a:solidFill>
+          <a:ln w="10160">
+            <a:solidFill>
+              <a:srgbClr val="E2E8F0"/>
+            </a:solidFill>
+            <a:prstDash val="solid"/>
+          </a:ln>
+        </p:spPr>
+      </p:sp>
+      <p:sp>
+        <p:nvSpPr>
+          <p:cNvPr id="4" name="Text 1"/>
+          <p:cNvSpPr/>
+          <p:nvPr/>
+        </p:nvSpPr>
+        <p:spPr>
+          <a:xfrm>
+            <a:off x="384048" y="6510528"/>
+            <a:ext cx="6995160" cy="164592"/>
+          </a:xfrm>
+          <a:prstGeom prst="rect">
+            <a:avLst/>
+          </a:prstGeom>
+          <a:noFill/>
+          <a:ln/>
+        </p:spPr>
+        <p:txBody>
+          <a:bodyPr wrap="square" lIns="0" tIns="0" rIns="0" bIns="0" rtlCol="0" anchor="ctr">
+            <a:normAutofit/>
+          </a:bodyPr>
+          <a:lstStyle/>
+          <a:p>
+            <a:pPr indent="0" marL="0">
+              <a:buNone/>
+            </a:pPr>
+            <a:r>
+              <a:rPr lang="en-US" sz="820" i="1" dirty="0">
+                <a:solidFill>
+                  <a:srgbClr val="94A3B8"/>
+                </a:solidFill>
+                <a:latin typeface="Microsoft YaHei" pitchFamily="34" charset="0"/>
+                <a:ea typeface="Microsoft YaHei" pitchFamily="34" charset="-122"/>
+                <a:cs typeface="Microsoft YaHei" pitchFamily="34" charset="-120"/>
+              </a:rPr>
+              <a:t>引证：Peled A, Stem Cells 2002；Zhang B, Cancer Cell 2012；Krishnan V, Blood 2023；Warfvinge R, eLife 2024；Purhonen M, Leukemia 2025.</a:t>
+            </a:r>
+            <a:endParaRPr lang="en-US" sz="820" dirty="0"/>
+          </a:p>
+        </p:txBody>
+      </p:sp>
+      <p:sp>
+        <p:nvSpPr>
+          <p:cNvPr id="5" name="Text 2"/>
+          <p:cNvSpPr/>
+          <p:nvPr/>
+        </p:nvSpPr>
+        <p:spPr>
+          <a:xfrm>
+            <a:off x="7498080" y="6501384"/>
+            <a:ext cx="4315968" cy="182880"/>
+          </a:xfrm>
+          <a:prstGeom prst="rect">
+            <a:avLst/>
+          </a:prstGeom>
+          <a:noFill/>
+          <a:ln/>
+        </p:spPr>
+        <p:txBody>
+          <a:bodyPr wrap="square" lIns="0" tIns="0" rIns="0" bIns="0" rtlCol="0" anchor="ctr">
+            <a:normAutofit/>
+          </a:bodyPr>
+          <a:lstStyle/>
+          <a:p>
+            <a:pPr algn="r" indent="0" marL="0">
+              <a:buNone/>
+            </a:pPr>
+            <a:r>
+              <a:rPr lang="en-US" sz="840" dirty="0">
+                <a:solidFill>
+                  <a:srgbClr val="64748B"/>
+                </a:solidFill>
+                <a:latin typeface="Microsoft YaHei" pitchFamily="34" charset="0"/>
+                <a:ea typeface="Microsoft YaHei" pitchFamily="34" charset="-122"/>
+                <a:cs typeface="Microsoft YaHei" pitchFamily="34" charset="-120"/>
+              </a:rPr>
+              <a:t>张家赫｜学号：2024193112｜儿科班｜PBL Case 1</a:t>
+            </a:r>
+            <a:endParaRPr lang="en-US" sz="840" dirty="0"/>
+          </a:p>
+        </p:txBody>
+      </p:sp>
     </p:spTree>
   </p:cSld>
   <p:clrMapOvr>
@@ -2814,7 +2834,7 @@
                 <a:ea typeface="Microsoft YaHei" pitchFamily="34" charset="-122"/>
                 <a:cs typeface="Microsoft YaHei" pitchFamily="34" charset="-120"/>
               </a:rPr>
-              <a:t>Q4-补充｜问题过渡</a:t>
+              <a:t>问题 5</a:t>
             </a:r>
             <a:endParaRPr lang="en-US" sz="2200" dirty="0"/>
           </a:p>
@@ -2851,12 +2871,12 @@
         </p:nvSpPr>
         <p:spPr>
           <a:xfrm>
-            <a:off x="822960" y="1600200"/>
-            <a:ext cx="10561320" cy="2834640"/>
+            <a:off x="822960" y="1417320"/>
+            <a:ext cx="10561320" cy="3794760"/>
           </a:xfrm>
           <a:prstGeom prst="roundRect">
             <a:avLst>
-              <a:gd name="adj" fmla="val 2581"/>
+              <a:gd name="adj" fmla="val 1928"/>
             </a:avLst>
           </a:prstGeom>
           <a:solidFill>
@@ -2878,12 +2898,12 @@
         </p:nvSpPr>
         <p:spPr>
           <a:xfrm>
-            <a:off x="1051560" y="1965960"/>
-            <a:ext cx="1143000" cy="713232"/>
+            <a:off x="1051560" y="1828800"/>
+            <a:ext cx="1417320" cy="822960"/>
           </a:xfrm>
           <a:prstGeom prst="roundRect">
             <a:avLst>
-              <a:gd name="adj" fmla="val 7692"/>
+              <a:gd name="adj" fmla="val 6667"/>
             </a:avLst>
           </a:prstGeom>
           <a:solidFill>
@@ -2905,8 +2925,8 @@
         </p:nvSpPr>
         <p:spPr>
           <a:xfrm>
-            <a:off x="1051560" y="2130552"/>
-            <a:ext cx="1143000" cy="237744"/>
+            <a:off x="1051560" y="2029968"/>
+            <a:ext cx="1417320" cy="274320"/>
           </a:xfrm>
           <a:prstGeom prst="rect">
             <a:avLst/>
@@ -2922,7 +2942,7 @@
               <a:buNone/>
             </a:pPr>
             <a:r>
-              <a:rPr lang="en-US" sz="1800" b="1" dirty="0">
+              <a:rPr lang="en-US" sz="1900" b="1" dirty="0">
                 <a:solidFill>
                   <a:srgbClr val="166534"/>
                 </a:solidFill>
@@ -2930,9 +2950,9 @@
                 <a:ea typeface="Microsoft YaHei" pitchFamily="34" charset="-122"/>
                 <a:cs typeface="Microsoft YaHei" pitchFamily="34" charset="-120"/>
               </a:rPr>
-              <a:t>Q4-补充</a:t>
-            </a:r>
-            <a:endParaRPr lang="en-US" sz="1800" dirty="0"/>
+              <a:t>问题 5</a:t>
+            </a:r>
+            <a:endParaRPr lang="en-US" sz="1900" dirty="0"/>
           </a:p>
         </p:txBody>
       </p:sp>
@@ -2944,8 +2964,8 @@
         </p:nvSpPr>
         <p:spPr>
           <a:xfrm>
-            <a:off x="2468880" y="1847088"/>
-            <a:ext cx="7680960" cy="475488"/>
+            <a:off x="2788920" y="1810512"/>
+            <a:ext cx="7726680" cy="2057400"/>
           </a:xfrm>
           <a:prstGeom prst="rect">
             <a:avLst/>
@@ -2961,7 +2981,7 @@
               <a:buNone/>
             </a:pPr>
             <a:r>
-              <a:rPr lang="en-US" sz="2400" b="1" dirty="0">
+              <a:rPr lang="en-US" sz="2300" b="1" dirty="0">
                 <a:solidFill>
                   <a:srgbClr val="1E3C72"/>
                 </a:solidFill>
@@ -2969,9 +2989,9 @@
                 <a:ea typeface="Microsoft YaHei" pitchFamily="34" charset="-122"/>
                 <a:cs typeface="Microsoft YaHei" pitchFamily="34" charset="-120"/>
               </a:rPr>
-              <a:t>同学补充文献：从驱动机制到急变、微环境与演化</a:t>
-            </a:r>
-            <a:endParaRPr lang="en-US" sz="2400" dirty="0"/>
+              <a:t>CML 的外周血涂片和骨髓象有哪些典型形态学特征？赵阿姨的检查结果是否匹配？</a:t>
+            </a:r>
+            <a:endParaRPr lang="en-US" sz="2300" dirty="0"/>
           </a:p>
         </p:txBody>
       </p:sp>
@@ -2983,8 +3003,8 @@
         </p:nvSpPr>
         <p:spPr>
           <a:xfrm>
-            <a:off x="2487168" y="2633472"/>
-            <a:ext cx="7818120" cy="640080"/>
+            <a:off x="502920" y="6419088"/>
+            <a:ext cx="6217920" cy="201168"/>
           </a:xfrm>
           <a:prstGeom prst="rect">
             <a:avLst/>
@@ -3000,17 +3020,17 @@
               <a:buNone/>
             </a:pPr>
             <a:r>
-              <a:rPr lang="en-US" sz="1500" dirty="0">
-                <a:solidFill>
-                  <a:srgbClr val="475569"/>
-                </a:solidFill>
-                <a:latin typeface="Microsoft YaHei" pitchFamily="34" charset="0"/>
-                <a:ea typeface="Microsoft YaHei" pitchFamily="34" charset="-122"/>
-                <a:cs typeface="Microsoft YaHei" pitchFamily="34" charset="-120"/>
-              </a:rPr>
-              <a:t>排序原则：基础驱动在前，分化与急变居中，微环境与演化收尾。</a:t>
-            </a:r>
-            <a:endParaRPr lang="en-US" sz="1500" dirty="0"/>
+              <a:rPr lang="en-US" sz="900" i="1" dirty="0">
+                <a:solidFill>
+                  <a:srgbClr val="94A3B8"/>
+                </a:solidFill>
+                <a:latin typeface="Microsoft YaHei" pitchFamily="34" charset="0"/>
+                <a:ea typeface="Microsoft YaHei" pitchFamily="34" charset="-122"/>
+                <a:cs typeface="Microsoft YaHei" pitchFamily="34" charset="-120"/>
+              </a:rPr>
+              <a:t>问题 5 标题页</a:t>
+            </a:r>
+            <a:endParaRPr lang="en-US" sz="900" dirty="0"/>
           </a:p>
         </p:txBody>
       </p:sp>
@@ -3022,8 +3042,8 @@
         </p:nvSpPr>
         <p:spPr>
           <a:xfrm>
-            <a:off x="502920" y="6419088"/>
-            <a:ext cx="6217920" cy="201168"/>
+            <a:off x="7909560" y="6400800"/>
+            <a:ext cx="3749040" cy="228600"/>
           </a:xfrm>
           <a:prstGeom prst="rect">
             <a:avLst/>
@@ -3035,45 +3055,6 @@
           <a:bodyPr wrap="square" lIns="0" tIns="0" rIns="0" bIns="0" rtlCol="0" anchor="ctr"/>
           <a:lstStyle/>
           <a:p>
-            <a:pPr indent="0" marL="0">
-              <a:buNone/>
-            </a:pPr>
-            <a:r>
-              <a:rPr lang="en-US" sz="900" i="1" dirty="0">
-                <a:solidFill>
-                  <a:srgbClr val="94A3B8"/>
-                </a:solidFill>
-                <a:latin typeface="Microsoft YaHei" pitchFamily="34" charset="0"/>
-                <a:ea typeface="Microsoft YaHei" pitchFamily="34" charset="-122"/>
-                <a:cs typeface="Microsoft YaHei" pitchFamily="34" charset="-120"/>
-              </a:rPr>
-              <a:t>Q4-补充 过渡页</a:t>
-            </a:r>
-            <a:endParaRPr lang="en-US" sz="900" dirty="0"/>
-          </a:p>
-        </p:txBody>
-      </p:sp>
-      <p:sp>
-        <p:nvSpPr>
-          <p:cNvPr id="11" name="Text 9"/>
-          <p:cNvSpPr/>
-          <p:nvPr/>
-        </p:nvSpPr>
-        <p:spPr>
-          <a:xfrm>
-            <a:off x="7909560" y="6400800"/>
-            <a:ext cx="3749040" cy="228600"/>
-          </a:xfrm>
-          <a:prstGeom prst="rect">
-            <a:avLst/>
-          </a:prstGeom>
-          <a:noFill/>
-          <a:ln/>
-        </p:spPr>
-        <p:txBody>
-          <a:bodyPr wrap="square" lIns="0" tIns="0" rIns="0" bIns="0" rtlCol="0" anchor="ctr"/>
-          <a:lstStyle/>
-          <a:p>
             <a:pPr algn="r" indent="0" marL="0">
               <a:buNone/>
             </a:pPr>
@@ -3086,7 +3067,7 @@
                 <a:ea typeface="Microsoft YaHei" pitchFamily="34" charset="-122"/>
                 <a:cs typeface="Microsoft YaHei" pitchFamily="34" charset="-120"/>
               </a:rPr>
-              <a:t>张家赫｜儿科班｜PBL Case 1 第二幕</a:t>
+              <a:t>血液与肿瘤｜PBL Case 1 第二幕</a:t>
             </a:r>
             <a:endParaRPr lang="en-US" sz="900" dirty="0"/>
           </a:p>
@@ -3106,377 +3087,7 @@
     <p:bg>
       <p:bgPr>
         <a:solidFill>
-          <a:srgbClr val="F8FAFC"/>
-        </a:solidFill>
-      </p:bgPr>
-    </p:bg>
-    <p:spTree>
-      <p:nvGrpSpPr>
-        <p:cNvPr id="1" name=""/>
-        <p:cNvGrpSpPr/>
-        <p:nvPr/>
-      </p:nvGrpSpPr>
-      <p:grpSpPr>
-        <a:xfrm>
-          <a:off x="0" y="0"/>
-          <a:ext cx="0" cy="0"/>
-          <a:chOff x="0" y="0"/>
-          <a:chExt cx="0" cy="0"/>
-        </a:xfrm>
-      </p:grpSpPr>
-      <p:sp>
-        <p:nvSpPr>
-          <p:cNvPr id="2" name="Shape 0"/>
-          <p:cNvSpPr/>
-          <p:nvPr/>
-        </p:nvSpPr>
-        <p:spPr>
-          <a:xfrm>
-            <a:off x="0" y="0"/>
-            <a:ext cx="12191695" cy="868680"/>
-          </a:xfrm>
-          <a:prstGeom prst="rect">
-            <a:avLst/>
-          </a:prstGeom>
-          <a:solidFill>
-            <a:srgbClr val="2F5597"/>
-          </a:solidFill>
-          <a:ln w="12700">
-            <a:solidFill>
-              <a:srgbClr val="2F5597">
-                <a:alpha val="0"/>
-              </a:srgbClr>
-            </a:solidFill>
-            <a:prstDash val="solid"/>
-          </a:ln>
-        </p:spPr>
-      </p:sp>
-      <p:sp>
-        <p:nvSpPr>
-          <p:cNvPr id="3" name="Text 1"/>
-          <p:cNvSpPr/>
-          <p:nvPr/>
-        </p:nvSpPr>
-        <p:spPr>
-          <a:xfrm>
-            <a:off x="457200" y="164592"/>
-            <a:ext cx="8961120" cy="384048"/>
-          </a:xfrm>
-          <a:prstGeom prst="rect">
-            <a:avLst/>
-          </a:prstGeom>
-          <a:noFill/>
-          <a:ln/>
-        </p:spPr>
-        <p:txBody>
-          <a:bodyPr wrap="square" lIns="0" tIns="0" rIns="0" bIns="0" rtlCol="0" anchor="ctr"/>
-          <a:lstStyle/>
-          <a:p>
-            <a:pPr indent="0" marL="0">
-              <a:buNone/>
-            </a:pPr>
-            <a:r>
-              <a:rPr lang="en-US" sz="2200" b="1" dirty="0">
-                <a:solidFill>
-                  <a:srgbClr val="FFFFFF"/>
-                </a:solidFill>
-                <a:latin typeface="Microsoft YaHei" pitchFamily="34" charset="0"/>
-                <a:ea typeface="Microsoft YaHei" pitchFamily="34" charset="-122"/>
-                <a:cs typeface="Microsoft YaHei" pitchFamily="34" charset="-120"/>
-              </a:rPr>
-              <a:t>Q5｜问题过渡</a:t>
-            </a:r>
-            <a:endParaRPr lang="en-US" sz="2200" dirty="0"/>
-          </a:p>
-        </p:txBody>
-      </p:sp>
-      <p:sp>
-        <p:nvSpPr>
-          <p:cNvPr id="4" name="Shape 2"/>
-          <p:cNvSpPr/>
-          <p:nvPr/>
-        </p:nvSpPr>
-        <p:spPr>
-          <a:xfrm>
-            <a:off x="0" y="868680"/>
-            <a:ext cx="12191695" cy="0"/>
-          </a:xfrm>
-          <a:prstGeom prst="line">
-            <a:avLst/>
-          </a:prstGeom>
-          <a:noFill/>
-          <a:ln w="15240">
-            <a:solidFill>
-              <a:srgbClr val="DCE6F2"/>
-            </a:solidFill>
-            <a:prstDash val="solid"/>
-          </a:ln>
-        </p:spPr>
-      </p:sp>
-      <p:sp>
-        <p:nvSpPr>
-          <p:cNvPr id="5" name="Shape 3"/>
-          <p:cNvSpPr/>
-          <p:nvPr/>
-        </p:nvSpPr>
-        <p:spPr>
-          <a:xfrm>
-            <a:off x="822960" y="1600200"/>
-            <a:ext cx="10561320" cy="2834640"/>
-          </a:xfrm>
-          <a:prstGeom prst="roundRect">
-            <a:avLst>
-              <a:gd name="adj" fmla="val 2581"/>
-            </a:avLst>
-          </a:prstGeom>
-          <a:solidFill>
-            <a:srgbClr val="FFFFFF"/>
-          </a:solidFill>
-          <a:ln w="12700">
-            <a:solidFill>
-              <a:srgbClr val="DCE6F2"/>
-            </a:solidFill>
-            <a:prstDash val="solid"/>
-          </a:ln>
-        </p:spPr>
-      </p:sp>
-      <p:sp>
-        <p:nvSpPr>
-          <p:cNvPr id="6" name="Shape 4"/>
-          <p:cNvSpPr/>
-          <p:nvPr/>
-        </p:nvSpPr>
-        <p:spPr>
-          <a:xfrm>
-            <a:off x="1051560" y="1965960"/>
-            <a:ext cx="1143000" cy="713232"/>
-          </a:xfrm>
-          <a:prstGeom prst="roundRect">
-            <a:avLst>
-              <a:gd name="adj" fmla="val 7692"/>
-            </a:avLst>
-          </a:prstGeom>
-          <a:solidFill>
-            <a:srgbClr val="F0FDF4"/>
-          </a:solidFill>
-          <a:ln w="12700">
-            <a:solidFill>
-              <a:srgbClr val="BBF7D0"/>
-            </a:solidFill>
-            <a:prstDash val="solid"/>
-          </a:ln>
-        </p:spPr>
-      </p:sp>
-      <p:sp>
-        <p:nvSpPr>
-          <p:cNvPr id="7" name="Text 5"/>
-          <p:cNvSpPr/>
-          <p:nvPr/>
-        </p:nvSpPr>
-        <p:spPr>
-          <a:xfrm>
-            <a:off x="1051560" y="2130552"/>
-            <a:ext cx="1143000" cy="237744"/>
-          </a:xfrm>
-          <a:prstGeom prst="rect">
-            <a:avLst/>
-          </a:prstGeom>
-          <a:noFill/>
-          <a:ln/>
-        </p:spPr>
-        <p:txBody>
-          <a:bodyPr wrap="square" lIns="0" tIns="0" rIns="0" bIns="0" rtlCol="0" anchor="ctr"/>
-          <a:lstStyle/>
-          <a:p>
-            <a:pPr algn="ctr" indent="0" marL="0">
-              <a:buNone/>
-            </a:pPr>
-            <a:r>
-              <a:rPr lang="en-US" sz="1800" b="1" dirty="0">
-                <a:solidFill>
-                  <a:srgbClr val="166534"/>
-                </a:solidFill>
-                <a:latin typeface="Microsoft YaHei" pitchFamily="34" charset="0"/>
-                <a:ea typeface="Microsoft YaHei" pitchFamily="34" charset="-122"/>
-                <a:cs typeface="Microsoft YaHei" pitchFamily="34" charset="-120"/>
-              </a:rPr>
-              <a:t>Q5</a:t>
-            </a:r>
-            <a:endParaRPr lang="en-US" sz="1800" dirty="0"/>
-          </a:p>
-        </p:txBody>
-      </p:sp>
-      <p:sp>
-        <p:nvSpPr>
-          <p:cNvPr id="8" name="Text 6"/>
-          <p:cNvSpPr/>
-          <p:nvPr/>
-        </p:nvSpPr>
-        <p:spPr>
-          <a:xfrm>
-            <a:off x="2468880" y="1847088"/>
-            <a:ext cx="7680960" cy="475488"/>
-          </a:xfrm>
-          <a:prstGeom prst="rect">
-            <a:avLst/>
-          </a:prstGeom>
-          <a:noFill/>
-          <a:ln/>
-        </p:spPr>
-        <p:txBody>
-          <a:bodyPr wrap="square" lIns="0" tIns="0" rIns="0" bIns="0" rtlCol="0" anchor="ctr"/>
-          <a:lstStyle/>
-          <a:p>
-            <a:pPr indent="0" marL="0">
-              <a:buNone/>
-            </a:pPr>
-            <a:r>
-              <a:rPr lang="en-US" sz="2400" b="1" dirty="0">
-                <a:solidFill>
-                  <a:srgbClr val="1E3C72"/>
-                </a:solidFill>
-                <a:latin typeface="Microsoft YaHei" pitchFamily="34" charset="0"/>
-                <a:ea typeface="Microsoft YaHei" pitchFamily="34" charset="-122"/>
-                <a:cs typeface="Microsoft YaHei" pitchFamily="34" charset="-120"/>
-              </a:rPr>
-              <a:t>外周血涂片与骨髓象的典型形态学特征</a:t>
-            </a:r>
-            <a:endParaRPr lang="en-US" sz="2400" dirty="0"/>
-          </a:p>
-        </p:txBody>
-      </p:sp>
-      <p:sp>
-        <p:nvSpPr>
-          <p:cNvPr id="9" name="Text 7"/>
-          <p:cNvSpPr/>
-          <p:nvPr/>
-        </p:nvSpPr>
-        <p:spPr>
-          <a:xfrm>
-            <a:off x="2487168" y="2633472"/>
-            <a:ext cx="7818120" cy="640080"/>
-          </a:xfrm>
-          <a:prstGeom prst="rect">
-            <a:avLst/>
-          </a:prstGeom>
-          <a:noFill/>
-          <a:ln/>
-        </p:spPr>
-        <p:txBody>
-          <a:bodyPr wrap="square" lIns="0" tIns="0" rIns="0" bIns="0" rtlCol="0" anchor="ctr"/>
-          <a:lstStyle/>
-          <a:p>
-            <a:pPr indent="0" marL="0">
-              <a:buNone/>
-            </a:pPr>
-            <a:r>
-              <a:rPr lang="en-US" sz="1500" dirty="0">
-                <a:solidFill>
-                  <a:srgbClr val="475569"/>
-                </a:solidFill>
-                <a:latin typeface="Microsoft YaHei" pitchFamily="34" charset="0"/>
-                <a:ea typeface="Microsoft YaHei" pitchFamily="34" charset="-122"/>
-                <a:cs typeface="Microsoft YaHei" pitchFamily="34" charset="-120"/>
-              </a:rPr>
-              <a:t>先看我们的总表，再看同学补充的骨髓相与镜下形态图片。</a:t>
-            </a:r>
-            <a:endParaRPr lang="en-US" sz="1500" dirty="0"/>
-          </a:p>
-        </p:txBody>
-      </p:sp>
-      <p:sp>
-        <p:nvSpPr>
-          <p:cNvPr id="10" name="Text 8"/>
-          <p:cNvSpPr/>
-          <p:nvPr/>
-        </p:nvSpPr>
-        <p:spPr>
-          <a:xfrm>
-            <a:off x="502920" y="6419088"/>
-            <a:ext cx="6217920" cy="201168"/>
-          </a:xfrm>
-          <a:prstGeom prst="rect">
-            <a:avLst/>
-          </a:prstGeom>
-          <a:noFill/>
-          <a:ln/>
-        </p:spPr>
-        <p:txBody>
-          <a:bodyPr wrap="square" lIns="0" tIns="0" rIns="0" bIns="0" rtlCol="0" anchor="ctr"/>
-          <a:lstStyle/>
-          <a:p>
-            <a:pPr indent="0" marL="0">
-              <a:buNone/>
-            </a:pPr>
-            <a:r>
-              <a:rPr lang="en-US" sz="900" i="1" dirty="0">
-                <a:solidFill>
-                  <a:srgbClr val="94A3B8"/>
-                </a:solidFill>
-                <a:latin typeface="Microsoft YaHei" pitchFamily="34" charset="0"/>
-                <a:ea typeface="Microsoft YaHei" pitchFamily="34" charset="-122"/>
-                <a:cs typeface="Microsoft YaHei" pitchFamily="34" charset="-120"/>
-              </a:rPr>
-              <a:t>Q5 过渡页</a:t>
-            </a:r>
-            <a:endParaRPr lang="en-US" sz="900" dirty="0"/>
-          </a:p>
-        </p:txBody>
-      </p:sp>
-      <p:sp>
-        <p:nvSpPr>
-          <p:cNvPr id="11" name="Text 9"/>
-          <p:cNvSpPr/>
-          <p:nvPr/>
-        </p:nvSpPr>
-        <p:spPr>
-          <a:xfrm>
-            <a:off x="7909560" y="6400800"/>
-            <a:ext cx="3749040" cy="228600"/>
-          </a:xfrm>
-          <a:prstGeom prst="rect">
-            <a:avLst/>
-          </a:prstGeom>
-          <a:noFill/>
-          <a:ln/>
-        </p:spPr>
-        <p:txBody>
-          <a:bodyPr wrap="square" lIns="0" tIns="0" rIns="0" bIns="0" rtlCol="0" anchor="ctr"/>
-          <a:lstStyle/>
-          <a:p>
-            <a:pPr algn="r" indent="0" marL="0">
-              <a:buNone/>
-            </a:pPr>
-            <a:r>
-              <a:rPr lang="en-US" sz="900" dirty="0">
-                <a:solidFill>
-                  <a:srgbClr val="64748B"/>
-                </a:solidFill>
-                <a:latin typeface="Microsoft YaHei" pitchFamily="34" charset="0"/>
-                <a:ea typeface="Microsoft YaHei" pitchFamily="34" charset="-122"/>
-                <a:cs typeface="Microsoft YaHei" pitchFamily="34" charset="-120"/>
-              </a:rPr>
-              <a:t>张家赫｜儿科班｜PBL Case 1 第二幕</a:t>
-            </a:r>
-            <a:endParaRPr lang="en-US" sz="900" dirty="0"/>
-          </a:p>
-        </p:txBody>
-      </p:sp>
-    </p:spTree>
-  </p:cSld>
-  <p:clrMapOvr>
-    <a:masterClrMapping/>
-  </p:clrMapOvr>
-</p:sld>
-</file>
-
-<file path=ppt/slides/slide14.xml><?xml version="1.0" encoding="utf-8"?>
-<p:sld xmlns:a="http://schemas.openxmlformats.org/drawingml/2006/main" xmlns:r="http://schemas.openxmlformats.org/officeDocument/2006/relationships" xmlns:p="http://schemas.openxmlformats.org/presentationml/2006/main">
-  <p:cSld name="Slide 14">
-    <p:bg>
-      <p:bgPr>
-        <a:solidFill>
-          <a:srgbClr val="111827"/>
+          <a:srgbClr val="FFFFFF"/>
         </a:solidFill>
       </p:bgPr>
     </p:bg>
@@ -3510,14 +3121,452 @@
         </p:blipFill>
         <p:spPr>
           <a:xfrm>
-            <a:off x="0" y="86"/>
-            <a:ext cx="12191695" cy="6857829"/>
+            <a:off x="0" y="0"/>
+            <a:ext cx="12191695" cy="6858000"/>
           </a:xfrm>
           <a:prstGeom prst="rect">
             <a:avLst/>
           </a:prstGeom>
         </p:spPr>
       </p:pic>
+      <p:sp>
+        <p:nvSpPr>
+          <p:cNvPr id="3" name="Shape 0"/>
+          <p:cNvSpPr/>
+          <p:nvPr/>
+        </p:nvSpPr>
+        <p:spPr>
+          <a:xfrm>
+            <a:off x="0" y="6414516"/>
+            <a:ext cx="12191695" cy="443484"/>
+          </a:xfrm>
+          <a:prstGeom prst="rect">
+            <a:avLst/>
+          </a:prstGeom>
+          <a:solidFill>
+            <a:srgbClr val="F8FAFC"/>
+          </a:solidFill>
+          <a:ln w="10160">
+            <a:solidFill>
+              <a:srgbClr val="E2E8F0"/>
+            </a:solidFill>
+            <a:prstDash val="solid"/>
+          </a:ln>
+        </p:spPr>
+      </p:sp>
+      <p:sp>
+        <p:nvSpPr>
+          <p:cNvPr id="4" name="Text 1"/>
+          <p:cNvSpPr/>
+          <p:nvPr/>
+        </p:nvSpPr>
+        <p:spPr>
+          <a:xfrm>
+            <a:off x="384048" y="6510528"/>
+            <a:ext cx="6995160" cy="164592"/>
+          </a:xfrm>
+          <a:prstGeom prst="rect">
+            <a:avLst/>
+          </a:prstGeom>
+          <a:noFill/>
+          <a:ln/>
+        </p:spPr>
+        <p:txBody>
+          <a:bodyPr wrap="square" lIns="0" tIns="0" rIns="0" bIns="0" rtlCol="0" anchor="ctr">
+            <a:normAutofit/>
+          </a:bodyPr>
+          <a:lstStyle/>
+          <a:p>
+            <a:pPr indent="0" marL="0">
+              <a:buNone/>
+            </a:pPr>
+            <a:r>
+              <a:rPr lang="en-US" sz="820" i="1" dirty="0">
+                <a:solidFill>
+                  <a:srgbClr val="94A3B8"/>
+                </a:solidFill>
+                <a:latin typeface="Microsoft YaHei" pitchFamily="34" charset="0"/>
+                <a:ea typeface="Microsoft YaHei" pitchFamily="34" charset="-122"/>
+                <a:cs typeface="Microsoft YaHei" pitchFamily="34" charset="-120"/>
+              </a:rPr>
+              <a:t>来源：《内科学》第10版 p.585；Gianelli U, et al. Virchows Arch, 2023；Case1-第二幕报告正文。</a:t>
+            </a:r>
+            <a:endParaRPr lang="en-US" sz="820" dirty="0"/>
+          </a:p>
+        </p:txBody>
+      </p:sp>
+      <p:sp>
+        <p:nvSpPr>
+          <p:cNvPr id="5" name="Text 2"/>
+          <p:cNvSpPr/>
+          <p:nvPr/>
+        </p:nvSpPr>
+        <p:spPr>
+          <a:xfrm>
+            <a:off x="7498080" y="6501384"/>
+            <a:ext cx="4315968" cy="182880"/>
+          </a:xfrm>
+          <a:prstGeom prst="rect">
+            <a:avLst/>
+          </a:prstGeom>
+          <a:noFill/>
+          <a:ln/>
+        </p:spPr>
+        <p:txBody>
+          <a:bodyPr wrap="square" lIns="0" tIns="0" rIns="0" bIns="0" rtlCol="0" anchor="ctr">
+            <a:normAutofit/>
+          </a:bodyPr>
+          <a:lstStyle/>
+          <a:p>
+            <a:pPr algn="r" indent="0" marL="0">
+              <a:buNone/>
+            </a:pPr>
+            <a:r>
+              <a:rPr lang="en-US" sz="840" dirty="0">
+                <a:solidFill>
+                  <a:srgbClr val="64748B"/>
+                </a:solidFill>
+                <a:latin typeface="Microsoft YaHei" pitchFamily="34" charset="0"/>
+                <a:ea typeface="Microsoft YaHei" pitchFamily="34" charset="-122"/>
+                <a:cs typeface="Microsoft YaHei" pitchFamily="34" charset="-120"/>
+              </a:rPr>
+              <a:t>张家赫｜学号：2024193112｜儿科班｜PBL Case 1</a:t>
+            </a:r>
+            <a:endParaRPr lang="en-US" sz="840" dirty="0"/>
+          </a:p>
+        </p:txBody>
+      </p:sp>
+    </p:spTree>
+  </p:cSld>
+  <p:clrMapOvr>
+    <a:masterClrMapping/>
+  </p:clrMapOvr>
+</p:sld>
+</file>
+
+<file path=ppt/slides/slide14.xml><?xml version="1.0" encoding="utf-8"?>
+<p:sld xmlns:a="http://schemas.openxmlformats.org/drawingml/2006/main" xmlns:r="http://schemas.openxmlformats.org/officeDocument/2006/relationships" xmlns:p="http://schemas.openxmlformats.org/presentationml/2006/main">
+  <p:cSld name="Slide 14">
+    <p:bg>
+      <p:bgPr>
+        <a:solidFill>
+          <a:srgbClr val="F8FAFC"/>
+        </a:solidFill>
+      </p:bgPr>
+    </p:bg>
+    <p:spTree>
+      <p:nvGrpSpPr>
+        <p:cNvPr id="1" name=""/>
+        <p:cNvGrpSpPr/>
+        <p:nvPr/>
+      </p:nvGrpSpPr>
+      <p:grpSpPr>
+        <a:xfrm>
+          <a:off x="0" y="0"/>
+          <a:ext cx="0" cy="0"/>
+          <a:chOff x="0" y="0"/>
+          <a:chExt cx="0" cy="0"/>
+        </a:xfrm>
+      </p:grpSpPr>
+      <p:sp>
+        <p:nvSpPr>
+          <p:cNvPr id="2" name="Shape 0"/>
+          <p:cNvSpPr/>
+          <p:nvPr/>
+        </p:nvSpPr>
+        <p:spPr>
+          <a:xfrm>
+            <a:off x="0" y="0"/>
+            <a:ext cx="12191695" cy="868680"/>
+          </a:xfrm>
+          <a:prstGeom prst="rect">
+            <a:avLst/>
+          </a:prstGeom>
+          <a:solidFill>
+            <a:srgbClr val="2F5597"/>
+          </a:solidFill>
+          <a:ln w="12700">
+            <a:solidFill>
+              <a:srgbClr val="2F5597">
+                <a:alpha val="0"/>
+              </a:srgbClr>
+            </a:solidFill>
+            <a:prstDash val="solid"/>
+          </a:ln>
+        </p:spPr>
+      </p:sp>
+      <p:sp>
+        <p:nvSpPr>
+          <p:cNvPr id="3" name="Text 1"/>
+          <p:cNvSpPr/>
+          <p:nvPr/>
+        </p:nvSpPr>
+        <p:spPr>
+          <a:xfrm>
+            <a:off x="457200" y="164592"/>
+            <a:ext cx="8961120" cy="384048"/>
+          </a:xfrm>
+          <a:prstGeom prst="rect">
+            <a:avLst/>
+          </a:prstGeom>
+          <a:noFill/>
+          <a:ln/>
+        </p:spPr>
+        <p:txBody>
+          <a:bodyPr wrap="square" lIns="0" tIns="0" rIns="0" bIns="0" rtlCol="0" anchor="ctr"/>
+          <a:lstStyle/>
+          <a:p>
+            <a:pPr indent="0" marL="0">
+              <a:buNone/>
+            </a:pPr>
+            <a:r>
+              <a:rPr lang="en-US" sz="2200" b="1" dirty="0">
+                <a:solidFill>
+                  <a:srgbClr val="FFFFFF"/>
+                </a:solidFill>
+                <a:latin typeface="Microsoft YaHei" pitchFamily="34" charset="0"/>
+                <a:ea typeface="Microsoft YaHei" pitchFamily="34" charset="-122"/>
+                <a:cs typeface="Microsoft YaHei" pitchFamily="34" charset="-120"/>
+              </a:rPr>
+              <a:t>问题 6</a:t>
+            </a:r>
+            <a:endParaRPr lang="en-US" sz="2200" dirty="0"/>
+          </a:p>
+        </p:txBody>
+      </p:sp>
+      <p:sp>
+        <p:nvSpPr>
+          <p:cNvPr id="4" name="Shape 2"/>
+          <p:cNvSpPr/>
+          <p:nvPr/>
+        </p:nvSpPr>
+        <p:spPr>
+          <a:xfrm>
+            <a:off x="0" y="868680"/>
+            <a:ext cx="12191695" cy="0"/>
+          </a:xfrm>
+          <a:prstGeom prst="line">
+            <a:avLst/>
+          </a:prstGeom>
+          <a:noFill/>
+          <a:ln w="15240">
+            <a:solidFill>
+              <a:srgbClr val="DCE6F2"/>
+            </a:solidFill>
+            <a:prstDash val="solid"/>
+          </a:ln>
+        </p:spPr>
+      </p:sp>
+      <p:sp>
+        <p:nvSpPr>
+          <p:cNvPr id="5" name="Shape 3"/>
+          <p:cNvSpPr/>
+          <p:nvPr/>
+        </p:nvSpPr>
+        <p:spPr>
+          <a:xfrm>
+            <a:off x="822960" y="1417320"/>
+            <a:ext cx="10561320" cy="3794760"/>
+          </a:xfrm>
+          <a:prstGeom prst="roundRect">
+            <a:avLst>
+              <a:gd name="adj" fmla="val 1928"/>
+            </a:avLst>
+          </a:prstGeom>
+          <a:solidFill>
+            <a:srgbClr val="FFFFFF"/>
+          </a:solidFill>
+          <a:ln w="12700">
+            <a:solidFill>
+              <a:srgbClr val="DCE6F2"/>
+            </a:solidFill>
+            <a:prstDash val="solid"/>
+          </a:ln>
+        </p:spPr>
+      </p:sp>
+      <p:sp>
+        <p:nvSpPr>
+          <p:cNvPr id="6" name="Shape 4"/>
+          <p:cNvSpPr/>
+          <p:nvPr/>
+        </p:nvSpPr>
+        <p:spPr>
+          <a:xfrm>
+            <a:off x="1051560" y="1828800"/>
+            <a:ext cx="1417320" cy="822960"/>
+          </a:xfrm>
+          <a:prstGeom prst="roundRect">
+            <a:avLst>
+              <a:gd name="adj" fmla="val 6667"/>
+            </a:avLst>
+          </a:prstGeom>
+          <a:solidFill>
+            <a:srgbClr val="F0FDF4"/>
+          </a:solidFill>
+          <a:ln w="12700">
+            <a:solidFill>
+              <a:srgbClr val="BBF7D0"/>
+            </a:solidFill>
+            <a:prstDash val="solid"/>
+          </a:ln>
+        </p:spPr>
+      </p:sp>
+      <p:sp>
+        <p:nvSpPr>
+          <p:cNvPr id="7" name="Text 5"/>
+          <p:cNvSpPr/>
+          <p:nvPr/>
+        </p:nvSpPr>
+        <p:spPr>
+          <a:xfrm>
+            <a:off x="1051560" y="2029968"/>
+            <a:ext cx="1417320" cy="274320"/>
+          </a:xfrm>
+          <a:prstGeom prst="rect">
+            <a:avLst/>
+          </a:prstGeom>
+          <a:noFill/>
+          <a:ln/>
+        </p:spPr>
+        <p:txBody>
+          <a:bodyPr wrap="square" lIns="0" tIns="0" rIns="0" bIns="0" rtlCol="0" anchor="ctr"/>
+          <a:lstStyle/>
+          <a:p>
+            <a:pPr algn="ctr" indent="0" marL="0">
+              <a:buNone/>
+            </a:pPr>
+            <a:r>
+              <a:rPr lang="en-US" sz="1900" b="1" dirty="0">
+                <a:solidFill>
+                  <a:srgbClr val="166534"/>
+                </a:solidFill>
+                <a:latin typeface="Microsoft YaHei" pitchFamily="34" charset="0"/>
+                <a:ea typeface="Microsoft YaHei" pitchFamily="34" charset="-122"/>
+                <a:cs typeface="Microsoft YaHei" pitchFamily="34" charset="-120"/>
+              </a:rPr>
+              <a:t>问题 6</a:t>
+            </a:r>
+            <a:endParaRPr lang="en-US" sz="1900" dirty="0"/>
+          </a:p>
+        </p:txBody>
+      </p:sp>
+      <p:sp>
+        <p:nvSpPr>
+          <p:cNvPr id="8" name="Text 6"/>
+          <p:cNvSpPr/>
+          <p:nvPr/>
+        </p:nvSpPr>
+        <p:spPr>
+          <a:xfrm>
+            <a:off x="2788920" y="1810512"/>
+            <a:ext cx="7726680" cy="2057400"/>
+          </a:xfrm>
+          <a:prstGeom prst="rect">
+            <a:avLst/>
+          </a:prstGeom>
+          <a:noFill/>
+          <a:ln/>
+        </p:spPr>
+        <p:txBody>
+          <a:bodyPr wrap="square" lIns="0" tIns="0" rIns="0" bIns="0" rtlCol="0" anchor="ctr"/>
+          <a:lstStyle/>
+          <a:p>
+            <a:pPr indent="0" marL="0">
+              <a:buNone/>
+            </a:pPr>
+            <a:r>
+              <a:rPr lang="en-US" sz="2300" b="1" dirty="0">
+                <a:solidFill>
+                  <a:srgbClr val="1E3C72"/>
+                </a:solidFill>
+                <a:latin typeface="Microsoft YaHei" pitchFamily="34" charset="0"/>
+                <a:ea typeface="Microsoft YaHei" pitchFamily="34" charset="-122"/>
+                <a:cs typeface="Microsoft YaHei" pitchFamily="34" charset="-120"/>
+              </a:rPr>
+              <a:t>CML 的病因、诱因和高危因素有哪些？本病例哪些暴露史值得追问，并如何落实一级、二级预防？</a:t>
+            </a:r>
+            <a:endParaRPr lang="en-US" sz="2300" dirty="0"/>
+          </a:p>
+        </p:txBody>
+      </p:sp>
+      <p:sp>
+        <p:nvSpPr>
+          <p:cNvPr id="9" name="Text 7"/>
+          <p:cNvSpPr/>
+          <p:nvPr/>
+        </p:nvSpPr>
+        <p:spPr>
+          <a:xfrm>
+            <a:off x="502920" y="6419088"/>
+            <a:ext cx="6217920" cy="201168"/>
+          </a:xfrm>
+          <a:prstGeom prst="rect">
+            <a:avLst/>
+          </a:prstGeom>
+          <a:noFill/>
+          <a:ln/>
+        </p:spPr>
+        <p:txBody>
+          <a:bodyPr wrap="square" lIns="0" tIns="0" rIns="0" bIns="0" rtlCol="0" anchor="ctr"/>
+          <a:lstStyle/>
+          <a:p>
+            <a:pPr indent="0" marL="0">
+              <a:buNone/>
+            </a:pPr>
+            <a:r>
+              <a:rPr lang="en-US" sz="900" i="1" dirty="0">
+                <a:solidFill>
+                  <a:srgbClr val="94A3B8"/>
+                </a:solidFill>
+                <a:latin typeface="Microsoft YaHei" pitchFamily="34" charset="0"/>
+                <a:ea typeface="Microsoft YaHei" pitchFamily="34" charset="-122"/>
+                <a:cs typeface="Microsoft YaHei" pitchFamily="34" charset="-120"/>
+              </a:rPr>
+              <a:t>问题 6 标题页</a:t>
+            </a:r>
+            <a:endParaRPr lang="en-US" sz="900" dirty="0"/>
+          </a:p>
+        </p:txBody>
+      </p:sp>
+      <p:sp>
+        <p:nvSpPr>
+          <p:cNvPr id="10" name="Text 8"/>
+          <p:cNvSpPr/>
+          <p:nvPr/>
+        </p:nvSpPr>
+        <p:spPr>
+          <a:xfrm>
+            <a:off x="7909560" y="6400800"/>
+            <a:ext cx="3749040" cy="228600"/>
+          </a:xfrm>
+          <a:prstGeom prst="rect">
+            <a:avLst/>
+          </a:prstGeom>
+          <a:noFill/>
+          <a:ln/>
+        </p:spPr>
+        <p:txBody>
+          <a:bodyPr wrap="square" lIns="0" tIns="0" rIns="0" bIns="0" rtlCol="0" anchor="ctr"/>
+          <a:lstStyle/>
+          <a:p>
+            <a:pPr algn="r" indent="0" marL="0">
+              <a:buNone/>
+            </a:pPr>
+            <a:r>
+              <a:rPr lang="en-US" sz="900" dirty="0">
+                <a:solidFill>
+                  <a:srgbClr val="64748B"/>
+                </a:solidFill>
+                <a:latin typeface="Microsoft YaHei" pitchFamily="34" charset="0"/>
+                <a:ea typeface="Microsoft YaHei" pitchFamily="34" charset="-122"/>
+                <a:cs typeface="Microsoft YaHei" pitchFamily="34" charset="-120"/>
+              </a:rPr>
+              <a:t>血液与肿瘤｜PBL Case 1 第二幕</a:t>
+            </a:r>
+            <a:endParaRPr lang="en-US" sz="900" dirty="0"/>
+          </a:p>
+        </p:txBody>
+      </p:sp>
     </p:spTree>
   </p:cSld>
   <p:clrMapOvr>
@@ -3610,7 +3659,7 @@
                 <a:ea typeface="Microsoft YaHei" pitchFamily="34" charset="-122"/>
                 <a:cs typeface="Microsoft YaHei" pitchFamily="34" charset="-120"/>
               </a:rPr>
-              <a:t>Q6｜问题过渡</a:t>
+              <a:t>问题 6｜补充讨论</a:t>
             </a:r>
             <a:endParaRPr lang="en-US" sz="2200" dirty="0"/>
           </a:p>
@@ -3641,26 +3690,65 @@
       </p:sp>
       <p:sp>
         <p:nvSpPr>
-          <p:cNvPr id="5" name="Shape 3"/>
-          <p:cNvSpPr/>
-          <p:nvPr/>
-        </p:nvSpPr>
-        <p:spPr>
-          <a:xfrm>
-            <a:off x="822960" y="1600200"/>
-            <a:ext cx="10561320" cy="2834640"/>
+          <p:cNvPr id="5" name="Text 3"/>
+          <p:cNvSpPr/>
+          <p:nvPr/>
+        </p:nvSpPr>
+        <p:spPr>
+          <a:xfrm>
+            <a:off x="713232" y="1078992"/>
+            <a:ext cx="7040880" cy="502920"/>
+          </a:xfrm>
+          <a:prstGeom prst="rect">
+            <a:avLst/>
+          </a:prstGeom>
+          <a:noFill/>
+          <a:ln/>
+        </p:spPr>
+        <p:txBody>
+          <a:bodyPr wrap="square" lIns="0" tIns="0" rIns="0" bIns="0" rtlCol="0" anchor="ctr"/>
+          <a:lstStyle/>
+          <a:p>
+            <a:pPr indent="0" marL="0">
+              <a:buNone/>
+            </a:pPr>
+            <a:r>
+              <a:rPr lang="en-US" sz="2100" b="1" dirty="0">
+                <a:solidFill>
+                  <a:srgbClr val="1E3C72"/>
+                </a:solidFill>
+                <a:latin typeface="Microsoft YaHei" pitchFamily="34" charset="0"/>
+                <a:ea typeface="Microsoft YaHei" pitchFamily="34" charset="-122"/>
+                <a:cs typeface="Microsoft YaHei" pitchFamily="34" charset="-120"/>
+              </a:rPr>
+              <a:t>病因、基本机制、诱因与高危因素</a:t>
+            </a:r>
+            <a:endParaRPr lang="en-US" sz="2100" dirty="0"/>
+          </a:p>
+        </p:txBody>
+      </p:sp>
+      <p:sp>
+        <p:nvSpPr>
+          <p:cNvPr id="6" name="Shape 4"/>
+          <p:cNvSpPr/>
+          <p:nvPr/>
+        </p:nvSpPr>
+        <p:spPr>
+          <a:xfrm>
+            <a:off x="749808" y="1828800"/>
+            <a:ext cx="5376672" cy="4526280"/>
           </a:xfrm>
           <a:prstGeom prst="roundRect">
             <a:avLst>
-              <a:gd name="adj" fmla="val 2581"/>
+              <a:gd name="adj" fmla="val 1010"/>
             </a:avLst>
           </a:prstGeom>
           <a:solidFill>
-            <a:srgbClr val="FFFFFF"/>
+            <a:srgbClr val="F8FAFC"/>
           </a:solidFill>
-          <a:ln w="12700">
+          <a:ln w="13970">
             <a:solidFill>
-              <a:srgbClr val="DCE6F2"/>
+              <a:srgbClr val="CBD5E1"/>
             </a:solidFill>
             <a:prstDash val="solid"/>
           </a:ln>
@@ -3668,26 +3756,101 @@
       </p:sp>
       <p:sp>
         <p:nvSpPr>
-          <p:cNvPr id="6" name="Shape 4"/>
-          <p:cNvSpPr/>
-          <p:nvPr/>
-        </p:nvSpPr>
-        <p:spPr>
-          <a:xfrm>
-            <a:off x="1051560" y="1965960"/>
-            <a:ext cx="1143000" cy="713232"/>
+          <p:cNvPr id="7" name="Text 5"/>
+          <p:cNvSpPr/>
+          <p:nvPr/>
+        </p:nvSpPr>
+        <p:spPr>
+          <a:xfrm>
+            <a:off x="950976" y="1993392"/>
+            <a:ext cx="4974336" cy="4197096"/>
+          </a:xfrm>
+          <a:prstGeom prst="rect">
+            <a:avLst/>
+          </a:prstGeom>
+          <a:noFill/>
+          <a:ln/>
+        </p:spPr>
+        <p:txBody>
+          <a:bodyPr wrap="square" lIns="0" tIns="0" rIns="0" bIns="0" rtlCol="0" anchor="t">
+            <a:normAutofit/>
+          </a:bodyPr>
+          <a:lstStyle/>
+          <a:p>
+            <a:pPr indent="0" marL="0">
+              <a:buNone/>
+            </a:pPr>
+            <a:r>
+              <a:rPr lang="en-US" sz="1120" dirty="0">
+                <a:solidFill>
+                  <a:srgbClr val="334155"/>
+                </a:solidFill>
+                <a:latin typeface="Microsoft YaHei" pitchFamily="34" charset="0"/>
+                <a:ea typeface="Microsoft YaHei" pitchFamily="34" charset="-122"/>
+                <a:cs typeface="Microsoft YaHei" pitchFamily="34" charset="-120"/>
+              </a:rPr>
+              <a:t>费城染色体（Ph 染色体）及其融合基因是 CML 的 确定性病因分子机制：9 号染色体长臂（9q34）上的 ABL 原癌基因，与 22 号染色体长臂（22q11）上的 BCR 基因发生易位，形成 t(9;22)(q34;q11)易位，即费城染色体（Ph 染色体）。</a:t>
+            </a:r>
+            <a:endParaRPr lang="en-US" sz="1120" dirty="0"/>
+          </a:p>
+          <a:p>
+            <a:pPr indent="0" marL="0">
+              <a:buNone/>
+            </a:pPr>
+            <a:r>
+              <a:rPr lang="en-US" sz="1120" dirty="0">
+                <a:solidFill>
+                  <a:srgbClr val="334155"/>
+                </a:solidFill>
+                <a:latin typeface="Microsoft YaHei" pitchFamily="34" charset="0"/>
+                <a:ea typeface="Microsoft YaHei" pitchFamily="34" charset="-122"/>
+                <a:cs typeface="Microsoft YaHei" pitchFamily="34" charset="-120"/>
+              </a:rPr>
+              <a:t>易位后产生 BCR-ABL1 融合基因，其编码的 BCR-ABL 融合蛋白具有持续激活的酪氨酸激酶活性，不受细胞正常调控，导致髓系细胞（粒细胞为主）不受控增殖、凋亡受抑，最终引发</a:t>
+            </a:r>
+            <a:endParaRPr lang="en-US" sz="1120" dirty="0"/>
+          </a:p>
+          <a:p>
+            <a:pPr indent="0" marL="0">
+              <a:buNone/>
+            </a:pPr>
+            <a:r>
+              <a:rPr lang="en-US" sz="1120" dirty="0">
+                <a:solidFill>
+                  <a:srgbClr val="334155"/>
+                </a:solidFill>
+                <a:latin typeface="Microsoft YaHei" pitchFamily="34" charset="0"/>
+                <a:ea typeface="Microsoft YaHei" pitchFamily="34" charset="-122"/>
+                <a:cs typeface="Microsoft YaHei" pitchFamily="34" charset="-120"/>
+              </a:rPr>
+              <a:t>CML。</a:t>
+            </a:r>
+            <a:endParaRPr lang="en-US" sz="1120" dirty="0"/>
+          </a:p>
+        </p:txBody>
+      </p:sp>
+      <p:sp>
+        <p:nvSpPr>
+          <p:cNvPr id="8" name="Shape 6"/>
+          <p:cNvSpPr/>
+          <p:nvPr/>
+        </p:nvSpPr>
+        <p:spPr>
+          <a:xfrm>
+            <a:off x="6089904" y="1828800"/>
+            <a:ext cx="5376672" cy="4526280"/>
           </a:xfrm>
           <a:prstGeom prst="roundRect">
             <a:avLst>
-              <a:gd name="adj" fmla="val 7692"/>
+              <a:gd name="adj" fmla="val 1010"/>
             </a:avLst>
           </a:prstGeom>
           <a:solidFill>
-            <a:srgbClr val="F0FDF4"/>
+            <a:srgbClr val="F8FAFC"/>
           </a:solidFill>
-          <a:ln w="12700">
+          <a:ln w="13970">
             <a:solidFill>
-              <a:srgbClr val="BBF7D0"/>
+              <a:srgbClr val="CBD5E1"/>
             </a:solidFill>
             <a:prstDash val="solid"/>
           </a:ln>
@@ -3695,14 +3858,14 @@
       </p:sp>
       <p:sp>
         <p:nvSpPr>
-          <p:cNvPr id="7" name="Text 5"/>
-          <p:cNvSpPr/>
-          <p:nvPr/>
-        </p:nvSpPr>
-        <p:spPr>
-          <a:xfrm>
-            <a:off x="1051560" y="2130552"/>
-            <a:ext cx="1143000" cy="237744"/>
+          <p:cNvPr id="9" name="Text 7"/>
+          <p:cNvSpPr/>
+          <p:nvPr/>
+        </p:nvSpPr>
+        <p:spPr>
+          <a:xfrm>
+            <a:off x="6291072" y="1993392"/>
+            <a:ext cx="4974336" cy="4197096"/>
           </a:xfrm>
           <a:prstGeom prst="rect">
             <a:avLst/>
@@ -3711,37 +3874,447 @@
           <a:ln/>
         </p:spPr>
         <p:txBody>
-          <a:bodyPr wrap="square" lIns="0" tIns="0" rIns="0" bIns="0" rtlCol="0" anchor="ctr"/>
-          <a:lstStyle/>
-          <a:p>
-            <a:pPr algn="ctr" indent="0" marL="0">
-              <a:buNone/>
-            </a:pPr>
-            <a:r>
-              <a:rPr lang="en-US" sz="1800" b="1" dirty="0">
-                <a:solidFill>
-                  <a:srgbClr val="166534"/>
-                </a:solidFill>
-                <a:latin typeface="Microsoft YaHei" pitchFamily="34" charset="0"/>
-                <a:ea typeface="Microsoft YaHei" pitchFamily="34" charset="-122"/>
-                <a:cs typeface="Microsoft YaHei" pitchFamily="34" charset="-120"/>
-              </a:rPr>
-              <a:t>Q6</a:t>
-            </a:r>
-            <a:endParaRPr lang="en-US" sz="1800" dirty="0"/>
-          </a:p>
-        </p:txBody>
-      </p:sp>
-      <p:sp>
-        <p:nvSpPr>
-          <p:cNvPr id="8" name="Text 6"/>
-          <p:cNvSpPr/>
-          <p:nvPr/>
-        </p:nvSpPr>
-        <p:spPr>
-          <a:xfrm>
-            <a:off x="2468880" y="1847088"/>
-            <a:ext cx="7680960" cy="475488"/>
+          <a:bodyPr wrap="square" lIns="0" tIns="0" rIns="0" bIns="0" rtlCol="0" anchor="t">
+            <a:normAutofit/>
+          </a:bodyPr>
+          <a:lstStyle/>
+          <a:p>
+            <a:pPr indent="0" marL="0">
+              <a:buNone/>
+            </a:pPr>
+            <a:r>
+              <a:rPr lang="en-US" sz="1060" dirty="0">
+                <a:solidFill>
+                  <a:srgbClr val="334155"/>
+                </a:solidFill>
+                <a:latin typeface="Microsoft YaHei" pitchFamily="34" charset="0"/>
+                <a:ea typeface="Microsoft YaHei" pitchFamily="34" charset="-122"/>
+                <a:cs typeface="Microsoft YaHei" pitchFamily="34" charset="-120"/>
+              </a:rPr>
+              <a:t>诱因及高危因素：</a:t>
+            </a:r>
+            <a:endParaRPr lang="en-US" sz="1060" dirty="0"/>
+          </a:p>
+          <a:p>
+            <a:pPr indent="0" marL="0">
+              <a:buNone/>
+            </a:pPr>
+            <a:r>
+              <a:rPr lang="en-US" sz="1060" dirty="0">
+                <a:solidFill>
+                  <a:srgbClr val="334155"/>
+                </a:solidFill>
+                <a:latin typeface="Microsoft YaHei" pitchFamily="34" charset="0"/>
+                <a:ea typeface="Microsoft YaHei" pitchFamily="34" charset="-122"/>
+                <a:cs typeface="Microsoft YaHei" pitchFamily="34" charset="-120"/>
+              </a:rPr>
+              <a:t>1）生物因素 主要是病毒感染和免疫功能异常。成人 T 细胞白血病、 类 T 淋</a:t>
+            </a:r>
+            <a:endParaRPr lang="en-US" sz="1060" dirty="0"/>
+          </a:p>
+          <a:p>
+            <a:pPr indent="0" marL="0">
+              <a:buNone/>
+            </a:pPr>
+            <a:r>
+              <a:rPr lang="en-US" sz="1060" dirty="0">
+                <a:solidFill>
+                  <a:srgbClr val="334155"/>
+                </a:solidFill>
+                <a:latin typeface="Microsoft YaHei" pitchFamily="34" charset="0"/>
+                <a:ea typeface="Microsoft YaHei" pitchFamily="34" charset="-122"/>
+                <a:cs typeface="Microsoft YaHei" pitchFamily="34" charset="-120"/>
+              </a:rPr>
+              <a:t>巴细胞病毒 I 型所致。病毒感染机件后，可作为内源性病毒整合并潜伏在宿主细</a:t>
+            </a:r>
+            <a:endParaRPr lang="en-US" sz="1060" dirty="0"/>
+          </a:p>
+          <a:p>
+            <a:pPr indent="0" marL="0">
+              <a:buNone/>
+            </a:pPr>
+            <a:r>
+              <a:rPr lang="en-US" sz="1060" dirty="0">
+                <a:solidFill>
+                  <a:srgbClr val="334155"/>
+                </a:solidFill>
+                <a:latin typeface="Microsoft YaHei" pitchFamily="34" charset="0"/>
+                <a:ea typeface="Microsoft YaHei" pitchFamily="34" charset="-122"/>
+                <a:cs typeface="Microsoft YaHei" pitchFamily="34" charset="-120"/>
+              </a:rPr>
+              <a:t>胞内，在某些理化因素作用下，被激活表达而诱发白血病;或作为外源性病毒在</a:t>
+            </a:r>
+            <a:endParaRPr lang="en-US" sz="1060" dirty="0"/>
+          </a:p>
+          <a:p>
+            <a:pPr indent="0" marL="0">
+              <a:buNone/>
+            </a:pPr>
+            <a:r>
+              <a:rPr lang="en-US" sz="1060" dirty="0">
+                <a:solidFill>
+                  <a:srgbClr val="334155"/>
+                </a:solidFill>
+                <a:latin typeface="Microsoft YaHei" pitchFamily="34" charset="0"/>
+                <a:ea typeface="Microsoft YaHei" pitchFamily="34" charset="-122"/>
+                <a:cs typeface="Microsoft YaHei" pitchFamily="34" charset="-120"/>
+              </a:rPr>
+              <a:t>外界以横向方式传播感染，直接致病。部分免疫功能异常者,如某些自身免疫病</a:t>
+            </a:r>
+            <a:endParaRPr lang="en-US" sz="1060" dirty="0"/>
+          </a:p>
+          <a:p>
+            <a:pPr indent="0" marL="0">
+              <a:buNone/>
+            </a:pPr>
+            <a:r>
+              <a:rPr lang="en-US" sz="1060" dirty="0">
+                <a:solidFill>
+                  <a:srgbClr val="334155"/>
+                </a:solidFill>
+                <a:latin typeface="Microsoft YaHei" pitchFamily="34" charset="0"/>
+                <a:ea typeface="Microsoft YaHei" pitchFamily="34" charset="-122"/>
+                <a:cs typeface="Microsoft YaHei" pitchFamily="34" charset="-120"/>
+              </a:rPr>
+              <a:t>患者,患白血病风险会增加。</a:t>
+            </a:r>
+            <a:endParaRPr lang="en-US" sz="1060" dirty="0"/>
+          </a:p>
+          <a:p>
+            <a:pPr indent="0" marL="0">
+              <a:buNone/>
+            </a:pPr>
+            <a:r>
+              <a:rPr lang="en-US" sz="1060" dirty="0">
+                <a:solidFill>
+                  <a:srgbClr val="334155"/>
+                </a:solidFill>
+                <a:latin typeface="Microsoft YaHei" pitchFamily="34" charset="0"/>
+                <a:ea typeface="Microsoft YaHei" pitchFamily="34" charset="-122"/>
+                <a:cs typeface="Microsoft YaHei" pitchFamily="34" charset="-120"/>
+              </a:rPr>
+              <a:t>2）物理因素 包括 X 射线、y 射线等电离辐射。1911 年首次报道了放射工作者</a:t>
+            </a:r>
+            <a:endParaRPr lang="en-US" sz="1060" dirty="0"/>
+          </a:p>
+          <a:p>
+            <a:pPr indent="0" marL="0">
+              <a:buNone/>
+            </a:pPr>
+            <a:r>
+              <a:rPr lang="en-US" sz="1060" dirty="0">
+                <a:solidFill>
+                  <a:srgbClr val="334155"/>
+                </a:solidFill>
+                <a:latin typeface="Microsoft YaHei" pitchFamily="34" charset="0"/>
+                <a:ea typeface="Microsoft YaHei" pitchFamily="34" charset="-122"/>
+                <a:cs typeface="Microsoft YaHei" pitchFamily="34" charset="-120"/>
+              </a:rPr>
+              <a:t>发生白血病的病例。日本广岛及长崎受原子弹袭击后， 幸存者中白血病发病率</a:t>
+            </a:r>
+            <a:endParaRPr lang="en-US" sz="1060" dirty="0"/>
+          </a:p>
+          <a:p>
+            <a:pPr indent="0" marL="0">
+              <a:buNone/>
+            </a:pPr>
+            <a:r>
+              <a:rPr lang="en-US" sz="1060" dirty="0">
+                <a:solidFill>
+                  <a:srgbClr val="334155"/>
+                </a:solidFill>
+                <a:latin typeface="Microsoft YaHei" pitchFamily="34" charset="0"/>
+                <a:ea typeface="Microsoft YaHei" pitchFamily="34" charset="-122"/>
+                <a:cs typeface="Microsoft YaHei" pitchFamily="34" charset="-120"/>
+              </a:rPr>
+              <a:t>比未受照射的人群高 30 倍和 17 倍，患者多为 AL 和 CML。研究表明，大面积和</a:t>
+            </a:r>
+            <a:endParaRPr lang="en-US" sz="1060" dirty="0"/>
+          </a:p>
+          <a:p>
+            <a:pPr indent="0" marL="0">
+              <a:buNone/>
+            </a:pPr>
+            <a:r>
+              <a:rPr lang="en-US" sz="1060" dirty="0">
+                <a:solidFill>
+                  <a:srgbClr val="334155"/>
+                </a:solidFill>
+                <a:latin typeface="Microsoft YaHei" pitchFamily="34" charset="0"/>
+                <a:ea typeface="Microsoft YaHei" pitchFamily="34" charset="-122"/>
+                <a:cs typeface="Microsoft YaHei" pitchFamily="34" charset="-120"/>
+              </a:rPr>
+              <a:t>大剂量照射可导致骨髓抑制和机体免疫力下降，DNA 突变、 断裂和重组,导致白</a:t>
+            </a:r>
+            <a:endParaRPr lang="en-US" sz="1060" dirty="0"/>
+          </a:p>
+          <a:p>
+            <a:pPr indent="0" marL="0">
+              <a:buNone/>
+            </a:pPr>
+            <a:r>
+              <a:rPr lang="en-US" sz="1060" dirty="0">
+                <a:solidFill>
+                  <a:srgbClr val="334155"/>
+                </a:solidFill>
+                <a:latin typeface="Microsoft YaHei" pitchFamily="34" charset="0"/>
+                <a:ea typeface="Microsoft YaHei" pitchFamily="34" charset="-122"/>
+                <a:cs typeface="Microsoft YaHei" pitchFamily="34" charset="-120"/>
+              </a:rPr>
+              <a:t>血病的发生。</a:t>
+            </a:r>
+            <a:endParaRPr lang="en-US" sz="1060" dirty="0"/>
+          </a:p>
+          <a:p>
+            <a:pPr indent="0" marL="0">
+              <a:buNone/>
+            </a:pPr>
+            <a:r>
+              <a:rPr lang="en-US" sz="1060" dirty="0">
+                <a:solidFill>
+                  <a:srgbClr val="334155"/>
+                </a:solidFill>
+                <a:latin typeface="Microsoft YaHei" pitchFamily="34" charset="0"/>
+                <a:ea typeface="Microsoft YaHei" pitchFamily="34" charset="-122"/>
+                <a:cs typeface="Microsoft YaHei" pitchFamily="34" charset="-120"/>
+              </a:rPr>
+              <a:t>3）化学因素 多年接触苯以及含有苯的有机溶剂与白血病的发生有关。乙双吗</a:t>
+            </a:r>
+            <a:endParaRPr lang="en-US" sz="1060" dirty="0"/>
+          </a:p>
+          <a:p>
+            <a:pPr indent="0" marL="0">
+              <a:buNone/>
+            </a:pPr>
+            <a:r>
+              <a:rPr lang="en-US" sz="1060" dirty="0">
+                <a:solidFill>
+                  <a:srgbClr val="334155"/>
+                </a:solidFill>
+                <a:latin typeface="Microsoft YaHei" pitchFamily="34" charset="0"/>
+                <a:ea typeface="Microsoft YaHei" pitchFamily="34" charset="-122"/>
+                <a:cs typeface="Microsoft YaHei" pitchFamily="34" charset="-120"/>
+              </a:rPr>
+              <a:t>啉是乙亚胺的衍生物,具有极强的致染色体畸变和致白血病作用。抗肿瘤药物中</a:t>
+            </a:r>
+            <a:endParaRPr lang="en-US" sz="1060" dirty="0"/>
+          </a:p>
+          <a:p>
+            <a:pPr indent="0" marL="0">
+              <a:buNone/>
+            </a:pPr>
+            <a:r>
+              <a:rPr lang="en-US" sz="1060" dirty="0">
+                <a:solidFill>
+                  <a:srgbClr val="334155"/>
+                </a:solidFill>
+                <a:latin typeface="Microsoft YaHei" pitchFamily="34" charset="0"/>
+                <a:ea typeface="Microsoft YaHei" pitchFamily="34" charset="-122"/>
+                <a:cs typeface="Microsoft YaHei" pitchFamily="34" charset="-120"/>
+              </a:rPr>
+              <a:t>烷化剂和拓扑异构酶Ⅱ抑制剂有致白血病的作用。化学物质所致的白血病以 AML</a:t>
+            </a:r>
+            <a:endParaRPr lang="en-US" sz="1060" dirty="0"/>
+          </a:p>
+          <a:p>
+            <a:pPr indent="0" marL="0">
+              <a:buNone/>
+            </a:pPr>
+            <a:r>
+              <a:rPr lang="en-US" sz="1060" dirty="0">
+                <a:solidFill>
+                  <a:srgbClr val="334155"/>
+                </a:solidFill>
+                <a:latin typeface="Microsoft YaHei" pitchFamily="34" charset="0"/>
+                <a:ea typeface="Microsoft YaHei" pitchFamily="34" charset="-122"/>
+                <a:cs typeface="Microsoft YaHei" pitchFamily="34" charset="-120"/>
+              </a:rPr>
+              <a:t>为多。</a:t>
+            </a:r>
+            <a:endParaRPr lang="en-US" sz="1060" dirty="0"/>
+          </a:p>
+          <a:p>
+            <a:pPr indent="0" marL="0">
+              <a:buNone/>
+            </a:pPr>
+            <a:r>
+              <a:rPr lang="en-US" sz="1060" dirty="0">
+                <a:solidFill>
+                  <a:srgbClr val="334155"/>
+                </a:solidFill>
+                <a:latin typeface="Microsoft YaHei" pitchFamily="34" charset="0"/>
+                <a:ea typeface="Microsoft YaHei" pitchFamily="34" charset="-122"/>
+                <a:cs typeface="Microsoft YaHei" pitchFamily="34" charset="-120"/>
+              </a:rPr>
+              <a:t>4）遗传因素 家族性白血病约占白血病的 0.7%。单卵孪生子,如果一个人发生</a:t>
+            </a:r>
+            <a:endParaRPr lang="en-US" sz="1060" dirty="0"/>
+          </a:p>
+          <a:p>
+            <a:pPr indent="0" marL="0">
+              <a:buNone/>
+            </a:pPr>
+            <a:r>
+              <a:rPr lang="en-US" sz="1060" dirty="0">
+                <a:solidFill>
+                  <a:srgbClr val="334155"/>
+                </a:solidFill>
+                <a:latin typeface="Microsoft YaHei" pitchFamily="34" charset="0"/>
+                <a:ea typeface="Microsoft YaHei" pitchFamily="34" charset="-122"/>
+                <a:cs typeface="Microsoft YaHei" pitchFamily="34" charset="-120"/>
+              </a:rPr>
+              <a:t>白血病,另一个人的发病率为 1/5,比双卵孪生者高 12 倍。Down 综合征(唐氏综合</a:t>
+            </a:r>
+            <a:endParaRPr lang="en-US" sz="1060" dirty="0"/>
+          </a:p>
+          <a:p>
+            <a:pPr indent="0" marL="0">
+              <a:buNone/>
+            </a:pPr>
+            <a:r>
+              <a:rPr lang="en-US" sz="1060" dirty="0">
+                <a:solidFill>
+                  <a:srgbClr val="334155"/>
+                </a:solidFill>
+                <a:latin typeface="Microsoft YaHei" pitchFamily="34" charset="0"/>
+                <a:ea typeface="Microsoft YaHei" pitchFamily="34" charset="-122"/>
+                <a:cs typeface="Microsoft YaHei" pitchFamily="34" charset="-120"/>
+              </a:rPr>
+              <a:t>征）有 21 号染色体三体改变,其白血病发病率达 50/10 万,是正常人群的 20 倍。</a:t>
+            </a:r>
+            <a:endParaRPr lang="en-US" sz="1060" dirty="0"/>
+          </a:p>
+          <a:p>
+            <a:pPr indent="0" marL="0">
+              <a:buNone/>
+            </a:pPr>
+            <a:r>
+              <a:rPr lang="en-US" sz="1060" dirty="0">
+                <a:solidFill>
+                  <a:srgbClr val="334155"/>
+                </a:solidFill>
+                <a:latin typeface="Microsoft YaHei" pitchFamily="34" charset="0"/>
+                <a:ea typeface="Microsoft YaHei" pitchFamily="34" charset="-122"/>
+                <a:cs typeface="Microsoft YaHei" pitchFamily="34" charset="-120"/>
+              </a:rPr>
+              <a:t>Fanconi 贫血、Bloom 综合征(侏儒面部毛细血管扩张)、 共济失调-毛细血管扩张</a:t>
+            </a:r>
+            <a:endParaRPr lang="en-US" sz="1060" dirty="0"/>
+          </a:p>
+          <a:p>
+            <a:pPr indent="0" marL="0">
+              <a:buNone/>
+            </a:pPr>
+            <a:r>
+              <a:rPr lang="en-US" sz="1060" dirty="0">
+                <a:solidFill>
+                  <a:srgbClr val="334155"/>
+                </a:solidFill>
+                <a:latin typeface="Microsoft YaHei" pitchFamily="34" charset="0"/>
+                <a:ea typeface="Microsoft YaHei" pitchFamily="34" charset="-122"/>
+                <a:cs typeface="Microsoft YaHei" pitchFamily="34" charset="-120"/>
+              </a:rPr>
+              <a:t>症及先天性免疫球蛋白缺乏症等患者的白血病发病率均较高。</a:t>
+            </a:r>
+            <a:endParaRPr lang="en-US" sz="1060" dirty="0"/>
+          </a:p>
+          <a:p>
+            <a:pPr indent="0" marL="0">
+              <a:buNone/>
+            </a:pPr>
+            <a:r>
+              <a:rPr lang="en-US" sz="1060" dirty="0">
+                <a:solidFill>
+                  <a:srgbClr val="334155"/>
+                </a:solidFill>
+                <a:latin typeface="Microsoft YaHei" pitchFamily="34" charset="0"/>
+                <a:ea typeface="Microsoft YaHei" pitchFamily="34" charset="-122"/>
+                <a:cs typeface="Microsoft YaHei" pitchFamily="34" charset="-120"/>
+              </a:rPr>
+              <a:t>5）其他血液病 某些血液病最终可能发展为白血病，如 MDS、PNH 等，亦有</a:t>
+            </a:r>
+            <a:endParaRPr lang="en-US" sz="1060" dirty="0"/>
+          </a:p>
+          <a:p>
+            <a:pPr indent="0" marL="0">
+              <a:buNone/>
+            </a:pPr>
+            <a:r>
+              <a:rPr lang="en-US" sz="1060" dirty="0">
+                <a:solidFill>
+                  <a:srgbClr val="334155"/>
+                </a:solidFill>
+                <a:latin typeface="Microsoft YaHei" pitchFamily="34" charset="0"/>
+                <a:ea typeface="Microsoft YaHei" pitchFamily="34" charset="-122"/>
+                <a:cs typeface="Microsoft YaHei" pitchFamily="34" charset="-120"/>
+              </a:rPr>
+              <a:t>淋巴瘤和骨髓瘤继发白血病的报道,但具体机制不明。</a:t>
+            </a:r>
+            <a:endParaRPr lang="en-US" sz="1060" dirty="0"/>
+          </a:p>
+          <a:p>
+            <a:pPr indent="0" marL="0">
+              <a:buNone/>
+            </a:pPr>
+            <a:r>
+              <a:rPr lang="en-US" sz="1060" dirty="0">
+                <a:solidFill>
+                  <a:srgbClr val="334155"/>
+                </a:solidFill>
+                <a:latin typeface="Microsoft YaHei" pitchFamily="34" charset="0"/>
+                <a:ea typeface="Microsoft YaHei" pitchFamily="34" charset="-122"/>
+                <a:cs typeface="Microsoft YaHei" pitchFamily="34" charset="-120"/>
+              </a:rPr>
+              <a:t>6）年龄因素 CML 发病高峰为 45~55 岁，年龄增长是重要的发病相关因素，儿童罕见发病，</a:t>
+            </a:r>
+            <a:endParaRPr lang="en-US" sz="1060" dirty="0"/>
+          </a:p>
+          <a:p>
+            <a:pPr indent="0" marL="0">
+              <a:buNone/>
+            </a:pPr>
+            <a:r>
+              <a:rPr lang="en-US" sz="1060" dirty="0">
+                <a:solidFill>
+                  <a:srgbClr val="334155"/>
+                </a:solidFill>
+                <a:latin typeface="Microsoft YaHei" pitchFamily="34" charset="0"/>
+                <a:ea typeface="Microsoft YaHei" pitchFamily="34" charset="-122"/>
+                <a:cs typeface="Microsoft YaHei" pitchFamily="34" charset="-120"/>
+              </a:rPr>
+              <a:t>老年人群发病率相对升高。</a:t>
+            </a:r>
+            <a:endParaRPr lang="en-US" sz="1060" dirty="0"/>
+          </a:p>
+          <a:p>
+            <a:pPr indent="0" marL="0">
+              <a:buNone/>
+            </a:pPr>
+            <a:r>
+              <a:rPr lang="en-US" sz="1060" dirty="0">
+                <a:solidFill>
+                  <a:srgbClr val="334155"/>
+                </a:solidFill>
+                <a:latin typeface="Microsoft YaHei" pitchFamily="34" charset="0"/>
+                <a:ea typeface="Microsoft YaHei" pitchFamily="34" charset="-122"/>
+                <a:cs typeface="Microsoft YaHei" pitchFamily="34" charset="-120"/>
+              </a:rPr>
+              <a:t>7）性别因素 男性发病率略高于女性（约 1.4:1），但具体机制尚未明确，仅为流行病学关联。</a:t>
+            </a:r>
+            <a:endParaRPr lang="en-US" sz="1060" dirty="0"/>
+          </a:p>
+        </p:txBody>
+      </p:sp>
+      <p:sp>
+        <p:nvSpPr>
+          <p:cNvPr id="10" name="Text 8"/>
+          <p:cNvSpPr/>
+          <p:nvPr/>
+        </p:nvSpPr>
+        <p:spPr>
+          <a:xfrm>
+            <a:off x="502920" y="6419088"/>
+            <a:ext cx="6217920" cy="201168"/>
           </a:xfrm>
           <a:prstGeom prst="rect">
             <a:avLst/>
@@ -3757,30 +4330,30 @@
               <a:buNone/>
             </a:pPr>
             <a:r>
-              <a:rPr lang="en-US" sz="2400" b="1" dirty="0">
-                <a:solidFill>
-                  <a:srgbClr val="1E3C72"/>
-                </a:solidFill>
-                <a:latin typeface="Microsoft YaHei" pitchFamily="34" charset="0"/>
-                <a:ea typeface="Microsoft YaHei" pitchFamily="34" charset="-122"/>
-                <a:cs typeface="Microsoft YaHei" pitchFamily="34" charset="-120"/>
-              </a:rPr>
-              <a:t>病因、高危暴露与一级 / 二级预防</a:t>
-            </a:r>
-            <a:endParaRPr lang="en-US" sz="2400" dirty="0"/>
-          </a:p>
-        </p:txBody>
-      </p:sp>
-      <p:sp>
-        <p:nvSpPr>
-          <p:cNvPr id="9" name="Text 7"/>
-          <p:cNvSpPr/>
-          <p:nvPr/>
-        </p:nvSpPr>
-        <p:spPr>
-          <a:xfrm>
-            <a:off x="2487168" y="2633472"/>
-            <a:ext cx="7818120" cy="640080"/>
+              <a:rPr lang="en-US" sz="900" i="1" dirty="0">
+                <a:solidFill>
+                  <a:srgbClr val="94A3B8"/>
+                </a:solidFill>
+                <a:latin typeface="Microsoft YaHei" pitchFamily="34" charset="0"/>
+                <a:ea typeface="Microsoft YaHei" pitchFamily="34" charset="-122"/>
+                <a:cs typeface="Microsoft YaHei" pitchFamily="34" charset="-120"/>
+              </a:rPr>
+              <a:t>补充页｜依据 Word 标注整理：病因 / 基本机制 / 诱因 / 高危因素</a:t>
+            </a:r>
+            <a:endParaRPr lang="en-US" sz="900" dirty="0"/>
+          </a:p>
+        </p:txBody>
+      </p:sp>
+      <p:sp>
+        <p:nvSpPr>
+          <p:cNvPr id="11" name="Text 9"/>
+          <p:cNvSpPr/>
+          <p:nvPr/>
+        </p:nvSpPr>
+        <p:spPr>
+          <a:xfrm>
+            <a:off x="7909560" y="6400800"/>
+            <a:ext cx="3749040" cy="228600"/>
           </a:xfrm>
           <a:prstGeom prst="rect">
             <a:avLst/>
@@ -3792,84 +4365,6 @@
           <a:bodyPr wrap="square" lIns="0" tIns="0" rIns="0" bIns="0" rtlCol="0" anchor="ctr"/>
           <a:lstStyle/>
           <a:p>
-            <a:pPr indent="0" marL="0">
-              <a:buNone/>
-            </a:pPr>
-            <a:r>
-              <a:rPr lang="en-US" sz="1500" dirty="0">
-                <a:solidFill>
-                  <a:srgbClr val="475569"/>
-                </a:solidFill>
-                <a:latin typeface="Microsoft YaHei" pitchFamily="34" charset="0"/>
-                <a:ea typeface="Microsoft YaHei" pitchFamily="34" charset="-122"/>
-                <a:cs typeface="Microsoft YaHei" pitchFamily="34" charset="-120"/>
-              </a:rPr>
-              <a:t>回到暴露史追问、风险因素判断以及如何做一级、二级预防。</a:t>
-            </a:r>
-            <a:endParaRPr lang="en-US" sz="1500" dirty="0"/>
-          </a:p>
-        </p:txBody>
-      </p:sp>
-      <p:sp>
-        <p:nvSpPr>
-          <p:cNvPr id="10" name="Text 8"/>
-          <p:cNvSpPr/>
-          <p:nvPr/>
-        </p:nvSpPr>
-        <p:spPr>
-          <a:xfrm>
-            <a:off x="502920" y="6419088"/>
-            <a:ext cx="6217920" cy="201168"/>
-          </a:xfrm>
-          <a:prstGeom prst="rect">
-            <a:avLst/>
-          </a:prstGeom>
-          <a:noFill/>
-          <a:ln/>
-        </p:spPr>
-        <p:txBody>
-          <a:bodyPr wrap="square" lIns="0" tIns="0" rIns="0" bIns="0" rtlCol="0" anchor="ctr"/>
-          <a:lstStyle/>
-          <a:p>
-            <a:pPr indent="0" marL="0">
-              <a:buNone/>
-            </a:pPr>
-            <a:r>
-              <a:rPr lang="en-US" sz="900" i="1" dirty="0">
-                <a:solidFill>
-                  <a:srgbClr val="94A3B8"/>
-                </a:solidFill>
-                <a:latin typeface="Microsoft YaHei" pitchFamily="34" charset="0"/>
-                <a:ea typeface="Microsoft YaHei" pitchFamily="34" charset="-122"/>
-                <a:cs typeface="Microsoft YaHei" pitchFamily="34" charset="-120"/>
-              </a:rPr>
-              <a:t>Q6 过渡页</a:t>
-            </a:r>
-            <a:endParaRPr lang="en-US" sz="900" dirty="0"/>
-          </a:p>
-        </p:txBody>
-      </p:sp>
-      <p:sp>
-        <p:nvSpPr>
-          <p:cNvPr id="11" name="Text 9"/>
-          <p:cNvSpPr/>
-          <p:nvPr/>
-        </p:nvSpPr>
-        <p:spPr>
-          <a:xfrm>
-            <a:off x="7909560" y="6400800"/>
-            <a:ext cx="3749040" cy="228600"/>
-          </a:xfrm>
-          <a:prstGeom prst="rect">
-            <a:avLst/>
-          </a:prstGeom>
-          <a:noFill/>
-          <a:ln/>
-        </p:spPr>
-        <p:txBody>
-          <a:bodyPr wrap="square" lIns="0" tIns="0" rIns="0" bIns="0" rtlCol="0" anchor="ctr"/>
-          <a:lstStyle/>
-          <a:p>
             <a:pPr algn="r" indent="0" marL="0">
               <a:buNone/>
             </a:pPr>
@@ -3882,7 +4377,7 @@
                 <a:ea typeface="Microsoft YaHei" pitchFamily="34" charset="-122"/>
                 <a:cs typeface="Microsoft YaHei" pitchFamily="34" charset="-120"/>
               </a:rPr>
-              <a:t>张家赫｜儿科班｜PBL Case 1 第二幕</a:t>
+              <a:t>血液与肿瘤｜PBL Case 1 第二幕</a:t>
             </a:r>
             <a:endParaRPr lang="en-US" sz="900" dirty="0"/>
           </a:p>
@@ -4252,7 +4747,7 @@
                 <a:ea typeface="Microsoft YaHei" pitchFamily="34" charset="-122"/>
                 <a:cs typeface="Microsoft YaHei" pitchFamily="34" charset="-120"/>
               </a:rPr>
-              <a:t>张家赫｜儿科班｜PBL Case 1 第二幕</a:t>
+              <a:t>血液与肿瘤｜PBL Case 1 第二幕</a:t>
             </a:r>
             <a:endParaRPr lang="en-US" sz="900" dirty="0"/>
           </a:p>
@@ -4350,7 +4845,7 @@
                 <a:ea typeface="Microsoft YaHei" pitchFamily="34" charset="-122"/>
                 <a:cs typeface="Microsoft YaHei" pitchFamily="34" charset="-120"/>
               </a:rPr>
-              <a:t>汇报主线</a:t>
+              <a:t>问题 1</a:t>
             </a:r>
             <a:endParaRPr lang="en-US" sz="2200" dirty="0"/>
           </a:p>
@@ -4381,57 +4876,18 @@
       </p:sp>
       <p:sp>
         <p:nvSpPr>
-          <p:cNvPr id="5" name="Text 3"/>
-          <p:cNvSpPr/>
-          <p:nvPr/>
-        </p:nvSpPr>
-        <p:spPr>
-          <a:xfrm>
-            <a:off x="658368" y="1115568"/>
-            <a:ext cx="8961120" cy="329184"/>
-          </a:xfrm>
-          <a:prstGeom prst="rect">
-            <a:avLst/>
-          </a:prstGeom>
-          <a:noFill/>
-          <a:ln/>
-        </p:spPr>
-        <p:txBody>
-          <a:bodyPr wrap="square" lIns="0" tIns="0" rIns="0" bIns="0" rtlCol="0" anchor="ctr"/>
-          <a:lstStyle/>
-          <a:p>
-            <a:pPr indent="0" marL="0">
-              <a:buNone/>
-            </a:pPr>
-            <a:r>
-              <a:rPr lang="en-US" sz="1400" dirty="0">
-                <a:solidFill>
-                  <a:srgbClr val="475569"/>
-                </a:solidFill>
-                <a:latin typeface="Microsoft YaHei" pitchFamily="34" charset="0"/>
-                <a:ea typeface="Microsoft YaHei" pitchFamily="34" charset="-122"/>
-                <a:cs typeface="Microsoft YaHei" pitchFamily="34" charset="-120"/>
-              </a:rPr>
-              <a:t>本次汇报按问题链依次推进，重点放在 Q4 的机制讲解与同学文献补充。</a:t>
-            </a:r>
-            <a:endParaRPr lang="en-US" sz="1400" dirty="0"/>
-          </a:p>
-        </p:txBody>
-      </p:sp>
-      <p:sp>
-        <p:nvSpPr>
-          <p:cNvPr id="6" name="Shape 4"/>
-          <p:cNvSpPr/>
-          <p:nvPr/>
-        </p:nvSpPr>
-        <p:spPr>
-          <a:xfrm>
-            <a:off x="658368" y="1691640"/>
-            <a:ext cx="2971800" cy="1325880"/>
+          <p:cNvPr id="5" name="Shape 3"/>
+          <p:cNvSpPr/>
+          <p:nvPr/>
+        </p:nvSpPr>
+        <p:spPr>
+          <a:xfrm>
+            <a:off x="822960" y="1417320"/>
+            <a:ext cx="10561320" cy="3794760"/>
           </a:xfrm>
           <a:prstGeom prst="roundRect">
             <a:avLst>
-              <a:gd name="adj" fmla="val 3448"/>
+              <a:gd name="adj" fmla="val 1928"/>
             </a:avLst>
           </a:prstGeom>
           <a:solidFill>
@@ -4443,139 +4899,45 @@
             </a:solidFill>
             <a:prstDash val="solid"/>
           </a:ln>
-          <a:effectLst>
-            <a:outerShdw sx="100000" sy="100000" kx="0" ky="0" algn="bl" rotWithShape="0" blurRad="12700" dist="50800" dir="2700000">
-              <a:srgbClr val="000000">
-                <a:alpha val="6000"/>
-              </a:srgbClr>
-            </a:outerShdw>
-          </a:effectLst>
-        </p:spPr>
-      </p:sp>
-      <p:sp>
-        <p:nvSpPr>
-          <p:cNvPr id="7" name="Text 5"/>
-          <p:cNvSpPr/>
-          <p:nvPr/>
-        </p:nvSpPr>
-        <p:spPr>
-          <a:xfrm>
-            <a:off x="822960" y="1856232"/>
-            <a:ext cx="502920" cy="274320"/>
-          </a:xfrm>
-          <a:prstGeom prst="rect">
-            <a:avLst/>
-          </a:prstGeom>
-          <a:noFill/>
-          <a:ln/>
-        </p:spPr>
-        <p:txBody>
-          <a:bodyPr wrap="square" lIns="0" tIns="0" rIns="0" bIns="0" rtlCol="0" anchor="ctr"/>
-          <a:lstStyle/>
-          <a:p>
-            <a:pPr indent="0" marL="0">
-              <a:buNone/>
-            </a:pPr>
-            <a:r>
-              <a:rPr lang="en-US" sz="1200" b="1" dirty="0">
-                <a:solidFill>
-                  <a:srgbClr val="0F766E"/>
-                </a:solidFill>
-                <a:latin typeface="Microsoft YaHei" pitchFamily="34" charset="0"/>
-                <a:ea typeface="Microsoft YaHei" pitchFamily="34" charset="-122"/>
-                <a:cs typeface="Microsoft YaHei" pitchFamily="34" charset="-120"/>
-              </a:rPr>
-              <a:t>01</a:t>
-            </a:r>
-            <a:endParaRPr lang="en-US" sz="1200" dirty="0"/>
-          </a:p>
-        </p:txBody>
-      </p:sp>
-      <p:sp>
-        <p:nvSpPr>
-          <p:cNvPr id="8" name="Text 6"/>
-          <p:cNvSpPr/>
-          <p:nvPr/>
-        </p:nvSpPr>
-        <p:spPr>
-          <a:xfrm>
-            <a:off x="822960" y="2194560"/>
-            <a:ext cx="2606040" cy="621792"/>
-          </a:xfrm>
-          <a:prstGeom prst="rect">
-            <a:avLst/>
-          </a:prstGeom>
-          <a:noFill/>
-          <a:ln/>
-        </p:spPr>
-        <p:txBody>
-          <a:bodyPr wrap="square" lIns="0" tIns="0" rIns="0" bIns="0" rtlCol="0" anchor="ctr">
-            <a:normAutofit/>
-          </a:bodyPr>
-          <a:lstStyle/>
-          <a:p>
-            <a:pPr indent="0" marL="0">
-              <a:buNone/>
-            </a:pPr>
-            <a:r>
-              <a:rPr lang="en-US" sz="1300" b="1" dirty="0">
-                <a:solidFill>
-                  <a:srgbClr val="1E293B"/>
-                </a:solidFill>
-                <a:latin typeface="Microsoft YaHei" pitchFamily="34" charset="0"/>
-                <a:ea typeface="Microsoft YaHei" pitchFamily="34" charset="-122"/>
-                <a:cs typeface="Microsoft YaHei" pitchFamily="34" charset="-120"/>
-              </a:rPr>
-              <a:t>问题1：胸水穿刺检查与当前胸水性质判断</a:t>
-            </a:r>
-            <a:endParaRPr lang="en-US" sz="1300" dirty="0"/>
-          </a:p>
-        </p:txBody>
-      </p:sp>
-      <p:sp>
-        <p:nvSpPr>
-          <p:cNvPr id="9" name="Shape 7"/>
-          <p:cNvSpPr/>
-          <p:nvPr/>
-        </p:nvSpPr>
-        <p:spPr>
-          <a:xfrm>
-            <a:off x="4096512" y="1691640"/>
-            <a:ext cx="2971800" cy="1325880"/>
+        </p:spPr>
+      </p:sp>
+      <p:sp>
+        <p:nvSpPr>
+          <p:cNvPr id="6" name="Shape 4"/>
+          <p:cNvSpPr/>
+          <p:nvPr/>
+        </p:nvSpPr>
+        <p:spPr>
+          <a:xfrm>
+            <a:off x="1051560" y="1828800"/>
+            <a:ext cx="1417320" cy="822960"/>
           </a:xfrm>
           <a:prstGeom prst="roundRect">
             <a:avLst>
-              <a:gd name="adj" fmla="val 3448"/>
+              <a:gd name="adj" fmla="val 6667"/>
             </a:avLst>
           </a:prstGeom>
           <a:solidFill>
-            <a:srgbClr val="FFFFFF"/>
+            <a:srgbClr val="F0FDF4"/>
           </a:solidFill>
           <a:ln w="12700">
             <a:solidFill>
-              <a:srgbClr val="DCE6F2"/>
+              <a:srgbClr val="BBF7D0"/>
             </a:solidFill>
             <a:prstDash val="solid"/>
           </a:ln>
-          <a:effectLst>
-            <a:outerShdw sx="100000" sy="100000" kx="0" ky="0" algn="bl" rotWithShape="0" blurRad="12700" dist="50800" dir="2700000">
-              <a:srgbClr val="000000">
-                <a:alpha val="6000"/>
-              </a:srgbClr>
-            </a:outerShdw>
-          </a:effectLst>
-        </p:spPr>
-      </p:sp>
-      <p:sp>
-        <p:nvSpPr>
-          <p:cNvPr id="10" name="Text 8"/>
-          <p:cNvSpPr/>
-          <p:nvPr/>
-        </p:nvSpPr>
-        <p:spPr>
-          <a:xfrm>
-            <a:off x="4261104" y="1856232"/>
-            <a:ext cx="502920" cy="274320"/>
+        </p:spPr>
+      </p:sp>
+      <p:sp>
+        <p:nvSpPr>
+          <p:cNvPr id="7" name="Text 5"/>
+          <p:cNvSpPr/>
+          <p:nvPr/>
+        </p:nvSpPr>
+        <p:spPr>
+          <a:xfrm>
+            <a:off x="1051560" y="2029968"/>
+            <a:ext cx="1417320" cy="274320"/>
           </a:xfrm>
           <a:prstGeom prst="rect">
             <a:avLst/>
@@ -4587,34 +4949,34 @@
           <a:bodyPr wrap="square" lIns="0" tIns="0" rIns="0" bIns="0" rtlCol="0" anchor="ctr"/>
           <a:lstStyle/>
           <a:p>
-            <a:pPr indent="0" marL="0">
-              <a:buNone/>
-            </a:pPr>
-            <a:r>
-              <a:rPr lang="en-US" sz="1200" b="1" dirty="0">
-                <a:solidFill>
-                  <a:srgbClr val="0F766E"/>
-                </a:solidFill>
-                <a:latin typeface="Microsoft YaHei" pitchFamily="34" charset="0"/>
-                <a:ea typeface="Microsoft YaHei" pitchFamily="34" charset="-122"/>
-                <a:cs typeface="Microsoft YaHei" pitchFamily="34" charset="-120"/>
-              </a:rPr>
-              <a:t>02</a:t>
-            </a:r>
-            <a:endParaRPr lang="en-US" sz="1200" dirty="0"/>
-          </a:p>
-        </p:txBody>
-      </p:sp>
-      <p:sp>
-        <p:nvSpPr>
-          <p:cNvPr id="11" name="Text 9"/>
-          <p:cNvSpPr/>
-          <p:nvPr/>
-        </p:nvSpPr>
-        <p:spPr>
-          <a:xfrm>
-            <a:off x="4261104" y="2194560"/>
-            <a:ext cx="2606040" cy="621792"/>
+            <a:pPr algn="ctr" indent="0" marL="0">
+              <a:buNone/>
+            </a:pPr>
+            <a:r>
+              <a:rPr lang="en-US" sz="1900" b="1" dirty="0">
+                <a:solidFill>
+                  <a:srgbClr val="166534"/>
+                </a:solidFill>
+                <a:latin typeface="Microsoft YaHei" pitchFamily="34" charset="0"/>
+                <a:ea typeface="Microsoft YaHei" pitchFamily="34" charset="-122"/>
+                <a:cs typeface="Microsoft YaHei" pitchFamily="34" charset="-120"/>
+              </a:rPr>
+              <a:t>问题 1</a:t>
+            </a:r>
+            <a:endParaRPr lang="en-US" sz="1900" dirty="0"/>
+          </a:p>
+        </p:txBody>
+      </p:sp>
+      <p:sp>
+        <p:nvSpPr>
+          <p:cNvPr id="8" name="Text 6"/>
+          <p:cNvSpPr/>
+          <p:nvPr/>
+        </p:nvSpPr>
+        <p:spPr>
+          <a:xfrm>
+            <a:off x="2788920" y="1810512"/>
+            <a:ext cx="7726680" cy="2057400"/>
           </a:xfrm>
           <a:prstGeom prst="rect">
             <a:avLst/>
@@ -4623,73 +4985,37 @@
           <a:ln/>
         </p:spPr>
         <p:txBody>
-          <a:bodyPr wrap="square" lIns="0" tIns="0" rIns="0" bIns="0" rtlCol="0" anchor="ctr">
-            <a:normAutofit/>
-          </a:bodyPr>
-          <a:lstStyle/>
-          <a:p>
-            <a:pPr indent="0" marL="0">
-              <a:buNone/>
-            </a:pPr>
-            <a:r>
-              <a:rPr lang="en-US" sz="1300" b="1" dirty="0">
-                <a:solidFill>
-                  <a:srgbClr val="1E293B"/>
-                </a:solidFill>
-                <a:latin typeface="Microsoft YaHei" pitchFamily="34" charset="0"/>
-                <a:ea typeface="Microsoft YaHei" pitchFamily="34" charset="-122"/>
-                <a:cs typeface="Microsoft YaHei" pitchFamily="34" charset="-120"/>
-              </a:rPr>
-              <a:t>问题2：白血病分类与 CML 在现代分类中的位置</a:t>
-            </a:r>
-            <a:endParaRPr lang="en-US" sz="1300" dirty="0"/>
-          </a:p>
-        </p:txBody>
-      </p:sp>
-      <p:sp>
-        <p:nvSpPr>
-          <p:cNvPr id="12" name="Shape 10"/>
-          <p:cNvSpPr/>
-          <p:nvPr/>
-        </p:nvSpPr>
-        <p:spPr>
-          <a:xfrm>
-            <a:off x="7534656" y="1691640"/>
-            <a:ext cx="2971800" cy="1325880"/>
-          </a:xfrm>
-          <a:prstGeom prst="roundRect">
-            <a:avLst>
-              <a:gd name="adj" fmla="val 3448"/>
-            </a:avLst>
-          </a:prstGeom>
-          <a:solidFill>
-            <a:srgbClr val="FFFFFF"/>
-          </a:solidFill>
-          <a:ln w="12700">
-            <a:solidFill>
-              <a:srgbClr val="DCE6F2"/>
-            </a:solidFill>
-            <a:prstDash val="solid"/>
-          </a:ln>
-          <a:effectLst>
-            <a:outerShdw sx="100000" sy="100000" kx="0" ky="0" algn="bl" rotWithShape="0" blurRad="12700" dist="50800" dir="2700000">
-              <a:srgbClr val="000000">
-                <a:alpha val="6000"/>
-              </a:srgbClr>
-            </a:outerShdw>
-          </a:effectLst>
-        </p:spPr>
-      </p:sp>
-      <p:sp>
-        <p:nvSpPr>
-          <p:cNvPr id="13" name="Text 11"/>
-          <p:cNvSpPr/>
-          <p:nvPr/>
-        </p:nvSpPr>
-        <p:spPr>
-          <a:xfrm>
-            <a:off x="7699248" y="1856232"/>
-            <a:ext cx="502920" cy="274320"/>
+          <a:bodyPr wrap="square" lIns="0" tIns="0" rIns="0" bIns="0" rtlCol="0" anchor="ctr"/>
+          <a:lstStyle/>
+          <a:p>
+            <a:pPr indent="0" marL="0">
+              <a:buNone/>
+            </a:pPr>
+            <a:r>
+              <a:rPr lang="en-US" sz="2300" b="1" dirty="0">
+                <a:solidFill>
+                  <a:srgbClr val="1E3C72"/>
+                </a:solidFill>
+                <a:latin typeface="Microsoft YaHei" pitchFamily="34" charset="0"/>
+                <a:ea typeface="Microsoft YaHei" pitchFamily="34" charset="-122"/>
+                <a:cs typeface="Microsoft YaHei" pitchFamily="34" charset="-120"/>
+              </a:rPr>
+              <a:t>诊断性胸腔穿刺后常做哪些实验室检查？赵阿姨现有胸水结果说明了什么？</a:t>
+            </a:r>
+            <a:endParaRPr lang="en-US" sz="2300" dirty="0"/>
+          </a:p>
+        </p:txBody>
+      </p:sp>
+      <p:sp>
+        <p:nvSpPr>
+          <p:cNvPr id="9" name="Text 7"/>
+          <p:cNvSpPr/>
+          <p:nvPr/>
+        </p:nvSpPr>
+        <p:spPr>
+          <a:xfrm>
+            <a:off x="502920" y="6419088"/>
+            <a:ext cx="6217920" cy="201168"/>
           </a:xfrm>
           <a:prstGeom prst="rect">
             <a:avLst/>
@@ -4705,30 +5031,30 @@
               <a:buNone/>
             </a:pPr>
             <a:r>
-              <a:rPr lang="en-US" sz="1200" b="1" dirty="0">
-                <a:solidFill>
-                  <a:srgbClr val="0F766E"/>
-                </a:solidFill>
-                <a:latin typeface="Microsoft YaHei" pitchFamily="34" charset="0"/>
-                <a:ea typeface="Microsoft YaHei" pitchFamily="34" charset="-122"/>
-                <a:cs typeface="Microsoft YaHei" pitchFamily="34" charset="-120"/>
-              </a:rPr>
-              <a:t>03</a:t>
-            </a:r>
-            <a:endParaRPr lang="en-US" sz="1200" dirty="0"/>
-          </a:p>
-        </p:txBody>
-      </p:sp>
-      <p:sp>
-        <p:nvSpPr>
-          <p:cNvPr id="14" name="Text 12"/>
-          <p:cNvSpPr/>
-          <p:nvPr/>
-        </p:nvSpPr>
-        <p:spPr>
-          <a:xfrm>
-            <a:off x="7699248" y="2194560"/>
-            <a:ext cx="2606040" cy="621792"/>
+              <a:rPr lang="en-US" sz="900" i="1" dirty="0">
+                <a:solidFill>
+                  <a:srgbClr val="94A3B8"/>
+                </a:solidFill>
+                <a:latin typeface="Microsoft YaHei" pitchFamily="34" charset="0"/>
+                <a:ea typeface="Microsoft YaHei" pitchFamily="34" charset="-122"/>
+                <a:cs typeface="Microsoft YaHei" pitchFamily="34" charset="-120"/>
+              </a:rPr>
+              <a:t>问题 1 标题页</a:t>
+            </a:r>
+            <a:endParaRPr lang="en-US" sz="900" dirty="0"/>
+          </a:p>
+        </p:txBody>
+      </p:sp>
+      <p:sp>
+        <p:nvSpPr>
+          <p:cNvPr id="10" name="Text 8"/>
+          <p:cNvSpPr/>
+          <p:nvPr/>
+        </p:nvSpPr>
+        <p:spPr>
+          <a:xfrm>
+            <a:off x="7909560" y="6400800"/>
+            <a:ext cx="3749040" cy="228600"/>
           </a:xfrm>
           <a:prstGeom prst="rect">
             <a:avLst/>
@@ -4737,431 +5063,9 @@
           <a:ln/>
         </p:spPr>
         <p:txBody>
-          <a:bodyPr wrap="square" lIns="0" tIns="0" rIns="0" bIns="0" rtlCol="0" anchor="ctr">
-            <a:normAutofit/>
-          </a:bodyPr>
-          <a:lstStyle/>
-          <a:p>
-            <a:pPr indent="0" marL="0">
-              <a:buNone/>
-            </a:pPr>
-            <a:r>
-              <a:rPr lang="en-US" sz="1300" b="1" dirty="0">
-                <a:solidFill>
-                  <a:srgbClr val="1E293B"/>
-                </a:solidFill>
-                <a:latin typeface="Microsoft YaHei" pitchFamily="34" charset="0"/>
-                <a:ea typeface="Microsoft YaHei" pitchFamily="34" charset="-122"/>
-                <a:cs typeface="Microsoft YaHei" pitchFamily="34" charset="-120"/>
-              </a:rPr>
-              <a:t>问题3：CML 的诊断标准、分期标准与病例缺口</a:t>
-            </a:r>
-            <a:endParaRPr lang="en-US" sz="1300" dirty="0"/>
-          </a:p>
-        </p:txBody>
-      </p:sp>
-      <p:sp>
-        <p:nvSpPr>
-          <p:cNvPr id="15" name="Shape 13"/>
-          <p:cNvSpPr/>
-          <p:nvPr/>
-        </p:nvSpPr>
-        <p:spPr>
-          <a:xfrm>
-            <a:off x="658368" y="3520440"/>
-            <a:ext cx="2971800" cy="1325880"/>
-          </a:xfrm>
-          <a:prstGeom prst="roundRect">
-            <a:avLst>
-              <a:gd name="adj" fmla="val 3448"/>
-            </a:avLst>
-          </a:prstGeom>
-          <a:solidFill>
-            <a:srgbClr val="FFFFFF"/>
-          </a:solidFill>
-          <a:ln w="12700">
-            <a:solidFill>
-              <a:srgbClr val="DCE6F2"/>
-            </a:solidFill>
-            <a:prstDash val="solid"/>
-          </a:ln>
-          <a:effectLst>
-            <a:outerShdw sx="100000" sy="100000" kx="0" ky="0" algn="bl" rotWithShape="0" blurRad="12700" dist="50800" dir="2700000">
-              <a:srgbClr val="000000">
-                <a:alpha val="6000"/>
-              </a:srgbClr>
-            </a:outerShdw>
-          </a:effectLst>
-        </p:spPr>
-      </p:sp>
-      <p:sp>
-        <p:nvSpPr>
-          <p:cNvPr id="16" name="Text 14"/>
-          <p:cNvSpPr/>
-          <p:nvPr/>
-        </p:nvSpPr>
-        <p:spPr>
-          <a:xfrm>
-            <a:off x="822960" y="3685032"/>
-            <a:ext cx="502920" cy="274320"/>
-          </a:xfrm>
-          <a:prstGeom prst="rect">
-            <a:avLst/>
-          </a:prstGeom>
-          <a:noFill/>
-          <a:ln/>
-        </p:spPr>
-        <p:txBody>
           <a:bodyPr wrap="square" lIns="0" tIns="0" rIns="0" bIns="0" rtlCol="0" anchor="ctr"/>
           <a:lstStyle/>
           <a:p>
-            <a:pPr indent="0" marL="0">
-              <a:buNone/>
-            </a:pPr>
-            <a:r>
-              <a:rPr lang="en-US" sz="1200" b="1" dirty="0">
-                <a:solidFill>
-                  <a:srgbClr val="0F766E"/>
-                </a:solidFill>
-                <a:latin typeface="Microsoft YaHei" pitchFamily="34" charset="0"/>
-                <a:ea typeface="Microsoft YaHei" pitchFamily="34" charset="-122"/>
-                <a:cs typeface="Microsoft YaHei" pitchFamily="34" charset="-120"/>
-              </a:rPr>
-              <a:t>04</a:t>
-            </a:r>
-            <a:endParaRPr lang="en-US" sz="1200" dirty="0"/>
-          </a:p>
-        </p:txBody>
-      </p:sp>
-      <p:sp>
-        <p:nvSpPr>
-          <p:cNvPr id="17" name="Text 15"/>
-          <p:cNvSpPr/>
-          <p:nvPr/>
-        </p:nvSpPr>
-        <p:spPr>
-          <a:xfrm>
-            <a:off x="822960" y="4023360"/>
-            <a:ext cx="2606040" cy="621792"/>
-          </a:xfrm>
-          <a:prstGeom prst="rect">
-            <a:avLst/>
-          </a:prstGeom>
-          <a:noFill/>
-          <a:ln/>
-        </p:spPr>
-        <p:txBody>
-          <a:bodyPr wrap="square" lIns="0" tIns="0" rIns="0" bIns="0" rtlCol="0" anchor="ctr">
-            <a:normAutofit/>
-          </a:bodyPr>
-          <a:lstStyle/>
-          <a:p>
-            <a:pPr indent="0" marL="0">
-              <a:buNone/>
-            </a:pPr>
-            <a:r>
-              <a:rPr lang="en-US" sz="1300" b="1" dirty="0">
-                <a:solidFill>
-                  <a:srgbClr val="1E293B"/>
-                </a:solidFill>
-                <a:latin typeface="Microsoft YaHei" pitchFamily="34" charset="0"/>
-                <a:ea typeface="Microsoft YaHei" pitchFamily="34" charset="-122"/>
-                <a:cs typeface="Microsoft YaHei" pitchFamily="34" charset="-120"/>
-              </a:rPr>
-              <a:t>问题4：为什么会出现幼稚白细胞、核左移及相关机制</a:t>
-            </a:r>
-            <a:endParaRPr lang="en-US" sz="1300" dirty="0"/>
-          </a:p>
-        </p:txBody>
-      </p:sp>
-      <p:sp>
-        <p:nvSpPr>
-          <p:cNvPr id="18" name="Shape 16"/>
-          <p:cNvSpPr/>
-          <p:nvPr/>
-        </p:nvSpPr>
-        <p:spPr>
-          <a:xfrm>
-            <a:off x="4096512" y="3520440"/>
-            <a:ext cx="2971800" cy="1325880"/>
-          </a:xfrm>
-          <a:prstGeom prst="roundRect">
-            <a:avLst>
-              <a:gd name="adj" fmla="val 3448"/>
-            </a:avLst>
-          </a:prstGeom>
-          <a:solidFill>
-            <a:srgbClr val="FFFFFF"/>
-          </a:solidFill>
-          <a:ln w="12700">
-            <a:solidFill>
-              <a:srgbClr val="DCE6F2"/>
-            </a:solidFill>
-            <a:prstDash val="solid"/>
-          </a:ln>
-          <a:effectLst>
-            <a:outerShdw sx="100000" sy="100000" kx="0" ky="0" algn="bl" rotWithShape="0" blurRad="12700" dist="50800" dir="2700000">
-              <a:srgbClr val="000000">
-                <a:alpha val="6000"/>
-              </a:srgbClr>
-            </a:outerShdw>
-          </a:effectLst>
-        </p:spPr>
-      </p:sp>
-      <p:sp>
-        <p:nvSpPr>
-          <p:cNvPr id="19" name="Text 17"/>
-          <p:cNvSpPr/>
-          <p:nvPr/>
-        </p:nvSpPr>
-        <p:spPr>
-          <a:xfrm>
-            <a:off x="4261104" y="3685032"/>
-            <a:ext cx="502920" cy="274320"/>
-          </a:xfrm>
-          <a:prstGeom prst="rect">
-            <a:avLst/>
-          </a:prstGeom>
-          <a:noFill/>
-          <a:ln/>
-        </p:spPr>
-        <p:txBody>
-          <a:bodyPr wrap="square" lIns="0" tIns="0" rIns="0" bIns="0" rtlCol="0" anchor="ctr"/>
-          <a:lstStyle/>
-          <a:p>
-            <a:pPr indent="0" marL="0">
-              <a:buNone/>
-            </a:pPr>
-            <a:r>
-              <a:rPr lang="en-US" sz="1200" b="1" dirty="0">
-                <a:solidFill>
-                  <a:srgbClr val="0F766E"/>
-                </a:solidFill>
-                <a:latin typeface="Microsoft YaHei" pitchFamily="34" charset="0"/>
-                <a:ea typeface="Microsoft YaHei" pitchFamily="34" charset="-122"/>
-                <a:cs typeface="Microsoft YaHei" pitchFamily="34" charset="-120"/>
-              </a:rPr>
-              <a:t>05</a:t>
-            </a:r>
-            <a:endParaRPr lang="en-US" sz="1200" dirty="0"/>
-          </a:p>
-        </p:txBody>
-      </p:sp>
-      <p:sp>
-        <p:nvSpPr>
-          <p:cNvPr id="20" name="Text 18"/>
-          <p:cNvSpPr/>
-          <p:nvPr/>
-        </p:nvSpPr>
-        <p:spPr>
-          <a:xfrm>
-            <a:off x="4261104" y="4023360"/>
-            <a:ext cx="2606040" cy="621792"/>
-          </a:xfrm>
-          <a:prstGeom prst="rect">
-            <a:avLst/>
-          </a:prstGeom>
-          <a:noFill/>
-          <a:ln/>
-        </p:spPr>
-        <p:txBody>
-          <a:bodyPr wrap="square" lIns="0" tIns="0" rIns="0" bIns="0" rtlCol="0" anchor="ctr">
-            <a:normAutofit/>
-          </a:bodyPr>
-          <a:lstStyle/>
-          <a:p>
-            <a:pPr indent="0" marL="0">
-              <a:buNone/>
-            </a:pPr>
-            <a:r>
-              <a:rPr lang="en-US" sz="1300" b="1" dirty="0">
-                <a:solidFill>
-                  <a:srgbClr val="1E293B"/>
-                </a:solidFill>
-                <a:latin typeface="Microsoft YaHei" pitchFamily="34" charset="0"/>
-                <a:ea typeface="Microsoft YaHei" pitchFamily="34" charset="-122"/>
-                <a:cs typeface="Microsoft YaHei" pitchFamily="34" charset="-120"/>
-              </a:rPr>
-              <a:t>问题5：外周血涂片与骨髓象的典型形态学特征</a:t>
-            </a:r>
-            <a:endParaRPr lang="en-US" sz="1300" dirty="0"/>
-          </a:p>
-        </p:txBody>
-      </p:sp>
-      <p:sp>
-        <p:nvSpPr>
-          <p:cNvPr id="21" name="Shape 19"/>
-          <p:cNvSpPr/>
-          <p:nvPr/>
-        </p:nvSpPr>
-        <p:spPr>
-          <a:xfrm>
-            <a:off x="7534656" y="3520440"/>
-            <a:ext cx="2971800" cy="1325880"/>
-          </a:xfrm>
-          <a:prstGeom prst="roundRect">
-            <a:avLst>
-              <a:gd name="adj" fmla="val 3448"/>
-            </a:avLst>
-          </a:prstGeom>
-          <a:solidFill>
-            <a:srgbClr val="FFFFFF"/>
-          </a:solidFill>
-          <a:ln w="12700">
-            <a:solidFill>
-              <a:srgbClr val="DCE6F2"/>
-            </a:solidFill>
-            <a:prstDash val="solid"/>
-          </a:ln>
-          <a:effectLst>
-            <a:outerShdw sx="100000" sy="100000" kx="0" ky="0" algn="bl" rotWithShape="0" blurRad="12700" dist="50800" dir="2700000">
-              <a:srgbClr val="000000">
-                <a:alpha val="6000"/>
-              </a:srgbClr>
-            </a:outerShdw>
-          </a:effectLst>
-        </p:spPr>
-      </p:sp>
-      <p:sp>
-        <p:nvSpPr>
-          <p:cNvPr id="22" name="Text 20"/>
-          <p:cNvSpPr/>
-          <p:nvPr/>
-        </p:nvSpPr>
-        <p:spPr>
-          <a:xfrm>
-            <a:off x="7699248" y="3685032"/>
-            <a:ext cx="502920" cy="274320"/>
-          </a:xfrm>
-          <a:prstGeom prst="rect">
-            <a:avLst/>
-          </a:prstGeom>
-          <a:noFill/>
-          <a:ln/>
-        </p:spPr>
-        <p:txBody>
-          <a:bodyPr wrap="square" lIns="0" tIns="0" rIns="0" bIns="0" rtlCol="0" anchor="ctr"/>
-          <a:lstStyle/>
-          <a:p>
-            <a:pPr indent="0" marL="0">
-              <a:buNone/>
-            </a:pPr>
-            <a:r>
-              <a:rPr lang="en-US" sz="1200" b="1" dirty="0">
-                <a:solidFill>
-                  <a:srgbClr val="0F766E"/>
-                </a:solidFill>
-                <a:latin typeface="Microsoft YaHei" pitchFamily="34" charset="0"/>
-                <a:ea typeface="Microsoft YaHei" pitchFamily="34" charset="-122"/>
-                <a:cs typeface="Microsoft YaHei" pitchFamily="34" charset="-120"/>
-              </a:rPr>
-              <a:t>06</a:t>
-            </a:r>
-            <a:endParaRPr lang="en-US" sz="1200" dirty="0"/>
-          </a:p>
-        </p:txBody>
-      </p:sp>
-      <p:sp>
-        <p:nvSpPr>
-          <p:cNvPr id="23" name="Text 21"/>
-          <p:cNvSpPr/>
-          <p:nvPr/>
-        </p:nvSpPr>
-        <p:spPr>
-          <a:xfrm>
-            <a:off x="7699248" y="4023360"/>
-            <a:ext cx="2606040" cy="621792"/>
-          </a:xfrm>
-          <a:prstGeom prst="rect">
-            <a:avLst/>
-          </a:prstGeom>
-          <a:noFill/>
-          <a:ln/>
-        </p:spPr>
-        <p:txBody>
-          <a:bodyPr wrap="square" lIns="0" tIns="0" rIns="0" bIns="0" rtlCol="0" anchor="ctr">
-            <a:normAutofit/>
-          </a:bodyPr>
-          <a:lstStyle/>
-          <a:p>
-            <a:pPr indent="0" marL="0">
-              <a:buNone/>
-            </a:pPr>
-            <a:r>
-              <a:rPr lang="en-US" sz="1300" b="1" dirty="0">
-                <a:solidFill>
-                  <a:srgbClr val="1E293B"/>
-                </a:solidFill>
-                <a:latin typeface="Microsoft YaHei" pitchFamily="34" charset="0"/>
-                <a:ea typeface="Microsoft YaHei" pitchFamily="34" charset="-122"/>
-                <a:cs typeface="Microsoft YaHei" pitchFamily="34" charset="-120"/>
-              </a:rPr>
-              <a:t>问题6：病因、高危暴露与一级 / 二级预防</a:t>
-            </a:r>
-            <a:endParaRPr lang="en-US" sz="1300" dirty="0"/>
-          </a:p>
-        </p:txBody>
-      </p:sp>
-      <p:sp>
-        <p:nvSpPr>
-          <p:cNvPr id="24" name="Text 22"/>
-          <p:cNvSpPr/>
-          <p:nvPr/>
-        </p:nvSpPr>
-        <p:spPr>
-          <a:xfrm>
-            <a:off x="502920" y="6419088"/>
-            <a:ext cx="6217920" cy="201168"/>
-          </a:xfrm>
-          <a:prstGeom prst="rect">
-            <a:avLst/>
-          </a:prstGeom>
-          <a:noFill/>
-          <a:ln/>
-        </p:spPr>
-        <p:txBody>
-          <a:bodyPr wrap="square" lIns="0" tIns="0" rIns="0" bIns="0" rtlCol="0" anchor="ctr"/>
-          <a:lstStyle/>
-          <a:p>
-            <a:pPr indent="0" marL="0">
-              <a:buNone/>
-            </a:pPr>
-            <a:r>
-              <a:rPr lang="en-US" sz="900" i="1" dirty="0">
-                <a:solidFill>
-                  <a:srgbClr val="94A3B8"/>
-                </a:solidFill>
-                <a:latin typeface="Microsoft YaHei" pitchFamily="34" charset="0"/>
-                <a:ea typeface="Microsoft YaHei" pitchFamily="34" charset="-122"/>
-                <a:cs typeface="Microsoft YaHei" pitchFamily="34" charset="-120"/>
-              </a:rPr>
-              <a:t>第二幕总汇报目录</a:t>
-            </a:r>
-            <a:endParaRPr lang="en-US" sz="900" dirty="0"/>
-          </a:p>
-        </p:txBody>
-      </p:sp>
-      <p:sp>
-        <p:nvSpPr>
-          <p:cNvPr id="25" name="Text 23"/>
-          <p:cNvSpPr/>
-          <p:nvPr/>
-        </p:nvSpPr>
-        <p:spPr>
-          <a:xfrm>
-            <a:off x="7909560" y="6400800"/>
-            <a:ext cx="3749040" cy="228600"/>
-          </a:xfrm>
-          <a:prstGeom prst="rect">
-            <a:avLst/>
-          </a:prstGeom>
-          <a:noFill/>
-          <a:ln/>
-        </p:spPr>
-        <p:txBody>
-          <a:bodyPr wrap="square" lIns="0" tIns="0" rIns="0" bIns="0" rtlCol="0" anchor="ctr"/>
-          <a:lstStyle/>
-          <a:p>
             <a:pPr algn="r" indent="0" marL="0">
               <a:buNone/>
             </a:pPr>
@@ -5174,7 +5078,7 @@
                 <a:ea typeface="Microsoft YaHei" pitchFamily="34" charset="-122"/>
                 <a:cs typeface="Microsoft YaHei" pitchFamily="34" charset="-120"/>
               </a:rPr>
-              <a:t>张家赫｜儿科班｜PBL Case 1 第二幕</a:t>
+              <a:t>血液与肿瘤｜PBL Case 1 第二幕</a:t>
             </a:r>
             <a:endParaRPr lang="en-US" sz="900" dirty="0"/>
           </a:p>
@@ -5272,7 +5176,7 @@
                 <a:ea typeface="Microsoft YaHei" pitchFamily="34" charset="-122"/>
                 <a:cs typeface="Microsoft YaHei" pitchFamily="34" charset="-120"/>
               </a:rPr>
-              <a:t>Q1｜问题过渡</a:t>
+              <a:t>问题 2</a:t>
             </a:r>
             <a:endParaRPr lang="en-US" sz="2200" dirty="0"/>
           </a:p>
@@ -5309,12 +5213,12 @@
         </p:nvSpPr>
         <p:spPr>
           <a:xfrm>
-            <a:off x="822960" y="1600200"/>
-            <a:ext cx="10561320" cy="2834640"/>
+            <a:off x="822960" y="1417320"/>
+            <a:ext cx="10561320" cy="3794760"/>
           </a:xfrm>
           <a:prstGeom prst="roundRect">
             <a:avLst>
-              <a:gd name="adj" fmla="val 2581"/>
+              <a:gd name="adj" fmla="val 1928"/>
             </a:avLst>
           </a:prstGeom>
           <a:solidFill>
@@ -5336,12 +5240,12 @@
         </p:nvSpPr>
         <p:spPr>
           <a:xfrm>
-            <a:off x="1051560" y="1965960"/>
-            <a:ext cx="1143000" cy="713232"/>
+            <a:off x="1051560" y="1828800"/>
+            <a:ext cx="1417320" cy="822960"/>
           </a:xfrm>
           <a:prstGeom prst="roundRect">
             <a:avLst>
-              <a:gd name="adj" fmla="val 7692"/>
+              <a:gd name="adj" fmla="val 6667"/>
             </a:avLst>
           </a:prstGeom>
           <a:solidFill>
@@ -5363,8 +5267,8 @@
         </p:nvSpPr>
         <p:spPr>
           <a:xfrm>
-            <a:off x="1051560" y="2130552"/>
-            <a:ext cx="1143000" cy="237744"/>
+            <a:off x="1051560" y="2029968"/>
+            <a:ext cx="1417320" cy="274320"/>
           </a:xfrm>
           <a:prstGeom prst="rect">
             <a:avLst/>
@@ -5380,7 +5284,7 @@
               <a:buNone/>
             </a:pPr>
             <a:r>
-              <a:rPr lang="en-US" sz="1800" b="1" dirty="0">
+              <a:rPr lang="en-US" sz="1900" b="1" dirty="0">
                 <a:solidFill>
                   <a:srgbClr val="166534"/>
                 </a:solidFill>
@@ -5388,9 +5292,9 @@
                 <a:ea typeface="Microsoft YaHei" pitchFamily="34" charset="-122"/>
                 <a:cs typeface="Microsoft YaHei" pitchFamily="34" charset="-120"/>
               </a:rPr>
-              <a:t>Q1</a:t>
-            </a:r>
-            <a:endParaRPr lang="en-US" sz="1800" dirty="0"/>
+              <a:t>问题 2</a:t>
+            </a:r>
+            <a:endParaRPr lang="en-US" sz="1900" dirty="0"/>
           </a:p>
         </p:txBody>
       </p:sp>
@@ -5402,8 +5306,8 @@
         </p:nvSpPr>
         <p:spPr>
           <a:xfrm>
-            <a:off x="2468880" y="1847088"/>
-            <a:ext cx="7680960" cy="475488"/>
+            <a:off x="2788920" y="1810512"/>
+            <a:ext cx="7726680" cy="2057400"/>
           </a:xfrm>
           <a:prstGeom prst="rect">
             <a:avLst/>
@@ -5419,7 +5323,7 @@
               <a:buNone/>
             </a:pPr>
             <a:r>
-              <a:rPr lang="en-US" sz="2400" b="1" dirty="0">
+              <a:rPr lang="en-US" sz="2300" b="1" dirty="0">
                 <a:solidFill>
                   <a:srgbClr val="1E3C72"/>
                 </a:solidFill>
@@ -5427,9 +5331,9 @@
                 <a:ea typeface="Microsoft YaHei" pitchFamily="34" charset="-122"/>
                 <a:cs typeface="Microsoft YaHei" pitchFamily="34" charset="-120"/>
               </a:rPr>
-              <a:t>胸水穿刺检查与当前胸水性质判断</a:t>
-            </a:r>
-            <a:endParaRPr lang="en-US" sz="2400" dirty="0"/>
+              <a:t>白血病如何分类？CML 在白血病与骨髓增殖性肿瘤谱系中处于什么位置？</a:t>
+            </a:r>
+            <a:endParaRPr lang="en-US" sz="2300" dirty="0"/>
           </a:p>
         </p:txBody>
       </p:sp>
@@ -5441,8 +5345,8 @@
         </p:nvSpPr>
         <p:spPr>
           <a:xfrm>
-            <a:off x="2487168" y="2633472"/>
-            <a:ext cx="7818120" cy="640080"/>
+            <a:off x="502920" y="6419088"/>
+            <a:ext cx="6217920" cy="201168"/>
           </a:xfrm>
           <a:prstGeom prst="rect">
             <a:avLst/>
@@ -5458,17 +5362,17 @@
               <a:buNone/>
             </a:pPr>
             <a:r>
-              <a:rPr lang="en-US" sz="1500" dirty="0">
-                <a:solidFill>
-                  <a:srgbClr val="475569"/>
-                </a:solidFill>
-                <a:latin typeface="Microsoft YaHei" pitchFamily="34" charset="0"/>
-                <a:ea typeface="Microsoft YaHei" pitchFamily="34" charset="-122"/>
-                <a:cs typeface="Microsoft YaHei" pitchFamily="34" charset="-120"/>
-              </a:rPr>
-              <a:t>先把胸水性质讲清楚，再把诊断重心转回 CML 主线。</a:t>
-            </a:r>
-            <a:endParaRPr lang="en-US" sz="1500" dirty="0"/>
+              <a:rPr lang="en-US" sz="900" i="1" dirty="0">
+                <a:solidFill>
+                  <a:srgbClr val="94A3B8"/>
+                </a:solidFill>
+                <a:latin typeface="Microsoft YaHei" pitchFamily="34" charset="0"/>
+                <a:ea typeface="Microsoft YaHei" pitchFamily="34" charset="-122"/>
+                <a:cs typeface="Microsoft YaHei" pitchFamily="34" charset="-120"/>
+              </a:rPr>
+              <a:t>问题 2 标题页</a:t>
+            </a:r>
+            <a:endParaRPr lang="en-US" sz="900" dirty="0"/>
           </a:p>
         </p:txBody>
       </p:sp>
@@ -5480,8 +5384,8 @@
         </p:nvSpPr>
         <p:spPr>
           <a:xfrm>
-            <a:off x="502920" y="6419088"/>
-            <a:ext cx="6217920" cy="201168"/>
+            <a:off x="7909560" y="6400800"/>
+            <a:ext cx="3749040" cy="228600"/>
           </a:xfrm>
           <a:prstGeom prst="rect">
             <a:avLst/>
@@ -5493,45 +5397,6 @@
           <a:bodyPr wrap="square" lIns="0" tIns="0" rIns="0" bIns="0" rtlCol="0" anchor="ctr"/>
           <a:lstStyle/>
           <a:p>
-            <a:pPr indent="0" marL="0">
-              <a:buNone/>
-            </a:pPr>
-            <a:r>
-              <a:rPr lang="en-US" sz="900" i="1" dirty="0">
-                <a:solidFill>
-                  <a:srgbClr val="94A3B8"/>
-                </a:solidFill>
-                <a:latin typeface="Microsoft YaHei" pitchFamily="34" charset="0"/>
-                <a:ea typeface="Microsoft YaHei" pitchFamily="34" charset="-122"/>
-                <a:cs typeface="Microsoft YaHei" pitchFamily="34" charset="-120"/>
-              </a:rPr>
-              <a:t>Q1 过渡页</a:t>
-            </a:r>
-            <a:endParaRPr lang="en-US" sz="900" dirty="0"/>
-          </a:p>
-        </p:txBody>
-      </p:sp>
-      <p:sp>
-        <p:nvSpPr>
-          <p:cNvPr id="11" name="Text 9"/>
-          <p:cNvSpPr/>
-          <p:nvPr/>
-        </p:nvSpPr>
-        <p:spPr>
-          <a:xfrm>
-            <a:off x="7909560" y="6400800"/>
-            <a:ext cx="3749040" cy="228600"/>
-          </a:xfrm>
-          <a:prstGeom prst="rect">
-            <a:avLst/>
-          </a:prstGeom>
-          <a:noFill/>
-          <a:ln/>
-        </p:spPr>
-        <p:txBody>
-          <a:bodyPr wrap="square" lIns="0" tIns="0" rIns="0" bIns="0" rtlCol="0" anchor="ctr"/>
-          <a:lstStyle/>
-          <a:p>
             <a:pPr algn="r" indent="0" marL="0">
               <a:buNone/>
             </a:pPr>
@@ -5544,7 +5409,7 @@
                 <a:ea typeface="Microsoft YaHei" pitchFamily="34" charset="-122"/>
                 <a:cs typeface="Microsoft YaHei" pitchFamily="34" charset="-120"/>
               </a:rPr>
-              <a:t>张家赫｜儿科班｜PBL Case 1 第二幕</a:t>
+              <a:t>血液与肿瘤｜PBL Case 1 第二幕</a:t>
             </a:r>
             <a:endParaRPr lang="en-US" sz="900" dirty="0"/>
           </a:p>
@@ -5564,377 +5429,7 @@
     <p:bg>
       <p:bgPr>
         <a:solidFill>
-          <a:srgbClr val="F8FAFC"/>
-        </a:solidFill>
-      </p:bgPr>
-    </p:bg>
-    <p:spTree>
-      <p:nvGrpSpPr>
-        <p:cNvPr id="1" name=""/>
-        <p:cNvGrpSpPr/>
-        <p:nvPr/>
-      </p:nvGrpSpPr>
-      <p:grpSpPr>
-        <a:xfrm>
-          <a:off x="0" y="0"/>
-          <a:ext cx="0" cy="0"/>
-          <a:chOff x="0" y="0"/>
-          <a:chExt cx="0" cy="0"/>
-        </a:xfrm>
-      </p:grpSpPr>
-      <p:sp>
-        <p:nvSpPr>
-          <p:cNvPr id="2" name="Shape 0"/>
-          <p:cNvSpPr/>
-          <p:nvPr/>
-        </p:nvSpPr>
-        <p:spPr>
-          <a:xfrm>
-            <a:off x="0" y="0"/>
-            <a:ext cx="12191695" cy="868680"/>
-          </a:xfrm>
-          <a:prstGeom prst="rect">
-            <a:avLst/>
-          </a:prstGeom>
-          <a:solidFill>
-            <a:srgbClr val="2F5597"/>
-          </a:solidFill>
-          <a:ln w="12700">
-            <a:solidFill>
-              <a:srgbClr val="2F5597">
-                <a:alpha val="0"/>
-              </a:srgbClr>
-            </a:solidFill>
-            <a:prstDash val="solid"/>
-          </a:ln>
-        </p:spPr>
-      </p:sp>
-      <p:sp>
-        <p:nvSpPr>
-          <p:cNvPr id="3" name="Text 1"/>
-          <p:cNvSpPr/>
-          <p:nvPr/>
-        </p:nvSpPr>
-        <p:spPr>
-          <a:xfrm>
-            <a:off x="457200" y="164592"/>
-            <a:ext cx="8961120" cy="384048"/>
-          </a:xfrm>
-          <a:prstGeom prst="rect">
-            <a:avLst/>
-          </a:prstGeom>
-          <a:noFill/>
-          <a:ln/>
-        </p:spPr>
-        <p:txBody>
-          <a:bodyPr wrap="square" lIns="0" tIns="0" rIns="0" bIns="0" rtlCol="0" anchor="ctr"/>
-          <a:lstStyle/>
-          <a:p>
-            <a:pPr indent="0" marL="0">
-              <a:buNone/>
-            </a:pPr>
-            <a:r>
-              <a:rPr lang="en-US" sz="2200" b="1" dirty="0">
-                <a:solidFill>
-                  <a:srgbClr val="FFFFFF"/>
-                </a:solidFill>
-                <a:latin typeface="Microsoft YaHei" pitchFamily="34" charset="0"/>
-                <a:ea typeface="Microsoft YaHei" pitchFamily="34" charset="-122"/>
-                <a:cs typeface="Microsoft YaHei" pitchFamily="34" charset="-120"/>
-              </a:rPr>
-              <a:t>Q2｜问题过渡</a:t>
-            </a:r>
-            <a:endParaRPr lang="en-US" sz="2200" dirty="0"/>
-          </a:p>
-        </p:txBody>
-      </p:sp>
-      <p:sp>
-        <p:nvSpPr>
-          <p:cNvPr id="4" name="Shape 2"/>
-          <p:cNvSpPr/>
-          <p:nvPr/>
-        </p:nvSpPr>
-        <p:spPr>
-          <a:xfrm>
-            <a:off x="0" y="868680"/>
-            <a:ext cx="12191695" cy="0"/>
-          </a:xfrm>
-          <a:prstGeom prst="line">
-            <a:avLst/>
-          </a:prstGeom>
-          <a:noFill/>
-          <a:ln w="15240">
-            <a:solidFill>
-              <a:srgbClr val="DCE6F2"/>
-            </a:solidFill>
-            <a:prstDash val="solid"/>
-          </a:ln>
-        </p:spPr>
-      </p:sp>
-      <p:sp>
-        <p:nvSpPr>
-          <p:cNvPr id="5" name="Shape 3"/>
-          <p:cNvSpPr/>
-          <p:nvPr/>
-        </p:nvSpPr>
-        <p:spPr>
-          <a:xfrm>
-            <a:off x="822960" y="1600200"/>
-            <a:ext cx="10561320" cy="2834640"/>
-          </a:xfrm>
-          <a:prstGeom prst="roundRect">
-            <a:avLst>
-              <a:gd name="adj" fmla="val 2581"/>
-            </a:avLst>
-          </a:prstGeom>
-          <a:solidFill>
-            <a:srgbClr val="FFFFFF"/>
-          </a:solidFill>
-          <a:ln w="12700">
-            <a:solidFill>
-              <a:srgbClr val="DCE6F2"/>
-            </a:solidFill>
-            <a:prstDash val="solid"/>
-          </a:ln>
-        </p:spPr>
-      </p:sp>
-      <p:sp>
-        <p:nvSpPr>
-          <p:cNvPr id="6" name="Shape 4"/>
-          <p:cNvSpPr/>
-          <p:nvPr/>
-        </p:nvSpPr>
-        <p:spPr>
-          <a:xfrm>
-            <a:off x="1051560" y="1965960"/>
-            <a:ext cx="1143000" cy="713232"/>
-          </a:xfrm>
-          <a:prstGeom prst="roundRect">
-            <a:avLst>
-              <a:gd name="adj" fmla="val 7692"/>
-            </a:avLst>
-          </a:prstGeom>
-          <a:solidFill>
-            <a:srgbClr val="F0FDF4"/>
-          </a:solidFill>
-          <a:ln w="12700">
-            <a:solidFill>
-              <a:srgbClr val="BBF7D0"/>
-            </a:solidFill>
-            <a:prstDash val="solid"/>
-          </a:ln>
-        </p:spPr>
-      </p:sp>
-      <p:sp>
-        <p:nvSpPr>
-          <p:cNvPr id="7" name="Text 5"/>
-          <p:cNvSpPr/>
-          <p:nvPr/>
-        </p:nvSpPr>
-        <p:spPr>
-          <a:xfrm>
-            <a:off x="1051560" y="2130552"/>
-            <a:ext cx="1143000" cy="237744"/>
-          </a:xfrm>
-          <a:prstGeom prst="rect">
-            <a:avLst/>
-          </a:prstGeom>
-          <a:noFill/>
-          <a:ln/>
-        </p:spPr>
-        <p:txBody>
-          <a:bodyPr wrap="square" lIns="0" tIns="0" rIns="0" bIns="0" rtlCol="0" anchor="ctr"/>
-          <a:lstStyle/>
-          <a:p>
-            <a:pPr algn="ctr" indent="0" marL="0">
-              <a:buNone/>
-            </a:pPr>
-            <a:r>
-              <a:rPr lang="en-US" sz="1800" b="1" dirty="0">
-                <a:solidFill>
-                  <a:srgbClr val="166534"/>
-                </a:solidFill>
-                <a:latin typeface="Microsoft YaHei" pitchFamily="34" charset="0"/>
-                <a:ea typeface="Microsoft YaHei" pitchFamily="34" charset="-122"/>
-                <a:cs typeface="Microsoft YaHei" pitchFamily="34" charset="-120"/>
-              </a:rPr>
-              <a:t>Q2</a:t>
-            </a:r>
-            <a:endParaRPr lang="en-US" sz="1800" dirty="0"/>
-          </a:p>
-        </p:txBody>
-      </p:sp>
-      <p:sp>
-        <p:nvSpPr>
-          <p:cNvPr id="8" name="Text 6"/>
-          <p:cNvSpPr/>
-          <p:nvPr/>
-        </p:nvSpPr>
-        <p:spPr>
-          <a:xfrm>
-            <a:off x="2468880" y="1847088"/>
-            <a:ext cx="7680960" cy="475488"/>
-          </a:xfrm>
-          <a:prstGeom prst="rect">
-            <a:avLst/>
-          </a:prstGeom>
-          <a:noFill/>
-          <a:ln/>
-        </p:spPr>
-        <p:txBody>
-          <a:bodyPr wrap="square" lIns="0" tIns="0" rIns="0" bIns="0" rtlCol="0" anchor="ctr"/>
-          <a:lstStyle/>
-          <a:p>
-            <a:pPr indent="0" marL="0">
-              <a:buNone/>
-            </a:pPr>
-            <a:r>
-              <a:rPr lang="en-US" sz="2400" b="1" dirty="0">
-                <a:solidFill>
-                  <a:srgbClr val="1E3C72"/>
-                </a:solidFill>
-                <a:latin typeface="Microsoft YaHei" pitchFamily="34" charset="0"/>
-                <a:ea typeface="Microsoft YaHei" pitchFamily="34" charset="-122"/>
-                <a:cs typeface="Microsoft YaHei" pitchFamily="34" charset="-120"/>
-              </a:rPr>
-              <a:t>白血病分类与 CML 的现代定位</a:t>
-            </a:r>
-            <a:endParaRPr lang="en-US" sz="2400" dirty="0"/>
-          </a:p>
-        </p:txBody>
-      </p:sp>
-      <p:sp>
-        <p:nvSpPr>
-          <p:cNvPr id="9" name="Text 7"/>
-          <p:cNvSpPr/>
-          <p:nvPr/>
-        </p:nvSpPr>
-        <p:spPr>
-          <a:xfrm>
-            <a:off x="2487168" y="2633472"/>
-            <a:ext cx="7818120" cy="640080"/>
-          </a:xfrm>
-          <a:prstGeom prst="rect">
-            <a:avLst/>
-          </a:prstGeom>
-          <a:noFill/>
-          <a:ln/>
-        </p:spPr>
-        <p:txBody>
-          <a:bodyPr wrap="square" lIns="0" tIns="0" rIns="0" bIns="0" rtlCol="0" anchor="ctr"/>
-          <a:lstStyle/>
-          <a:p>
-            <a:pPr indent="0" marL="0">
-              <a:buNone/>
-            </a:pPr>
-            <a:r>
-              <a:rPr lang="en-US" sz="1500" dirty="0">
-                <a:solidFill>
-                  <a:srgbClr val="475569"/>
-                </a:solidFill>
-                <a:latin typeface="Microsoft YaHei" pitchFamily="34" charset="0"/>
-                <a:ea typeface="Microsoft YaHei" pitchFamily="34" charset="-122"/>
-                <a:cs typeface="Microsoft YaHei" pitchFamily="34" charset="-120"/>
-              </a:rPr>
-              <a:t>从传统“四大型”入门，再过渡到 WHO / ICC 下的 MPN 定位。</a:t>
-            </a:r>
-            <a:endParaRPr lang="en-US" sz="1500" dirty="0"/>
-          </a:p>
-        </p:txBody>
-      </p:sp>
-      <p:sp>
-        <p:nvSpPr>
-          <p:cNvPr id="10" name="Text 8"/>
-          <p:cNvSpPr/>
-          <p:nvPr/>
-        </p:nvSpPr>
-        <p:spPr>
-          <a:xfrm>
-            <a:off x="502920" y="6419088"/>
-            <a:ext cx="6217920" cy="201168"/>
-          </a:xfrm>
-          <a:prstGeom prst="rect">
-            <a:avLst/>
-          </a:prstGeom>
-          <a:noFill/>
-          <a:ln/>
-        </p:spPr>
-        <p:txBody>
-          <a:bodyPr wrap="square" lIns="0" tIns="0" rIns="0" bIns="0" rtlCol="0" anchor="ctr"/>
-          <a:lstStyle/>
-          <a:p>
-            <a:pPr indent="0" marL="0">
-              <a:buNone/>
-            </a:pPr>
-            <a:r>
-              <a:rPr lang="en-US" sz="900" i="1" dirty="0">
-                <a:solidFill>
-                  <a:srgbClr val="94A3B8"/>
-                </a:solidFill>
-                <a:latin typeface="Microsoft YaHei" pitchFamily="34" charset="0"/>
-                <a:ea typeface="Microsoft YaHei" pitchFamily="34" charset="-122"/>
-                <a:cs typeface="Microsoft YaHei" pitchFamily="34" charset="-120"/>
-              </a:rPr>
-              <a:t>Q2 过渡页</a:t>
-            </a:r>
-            <a:endParaRPr lang="en-US" sz="900" dirty="0"/>
-          </a:p>
-        </p:txBody>
-      </p:sp>
-      <p:sp>
-        <p:nvSpPr>
-          <p:cNvPr id="11" name="Text 9"/>
-          <p:cNvSpPr/>
-          <p:nvPr/>
-        </p:nvSpPr>
-        <p:spPr>
-          <a:xfrm>
-            <a:off x="7909560" y="6400800"/>
-            <a:ext cx="3749040" cy="228600"/>
-          </a:xfrm>
-          <a:prstGeom prst="rect">
-            <a:avLst/>
-          </a:prstGeom>
-          <a:noFill/>
-          <a:ln/>
-        </p:spPr>
-        <p:txBody>
-          <a:bodyPr wrap="square" lIns="0" tIns="0" rIns="0" bIns="0" rtlCol="0" anchor="ctr"/>
-          <a:lstStyle/>
-          <a:p>
-            <a:pPr algn="r" indent="0" marL="0">
-              <a:buNone/>
-            </a:pPr>
-            <a:r>
-              <a:rPr lang="en-US" sz="900" dirty="0">
-                <a:solidFill>
-                  <a:srgbClr val="64748B"/>
-                </a:solidFill>
-                <a:latin typeface="Microsoft YaHei" pitchFamily="34" charset="0"/>
-                <a:ea typeface="Microsoft YaHei" pitchFamily="34" charset="-122"/>
-                <a:cs typeface="Microsoft YaHei" pitchFamily="34" charset="-120"/>
-              </a:rPr>
-              <a:t>张家赫｜儿科班｜PBL Case 1 第二幕</a:t>
-            </a:r>
-            <a:endParaRPr lang="en-US" sz="900" dirty="0"/>
-          </a:p>
-        </p:txBody>
-      </p:sp>
-    </p:spTree>
-  </p:cSld>
-  <p:clrMapOvr>
-    <a:masterClrMapping/>
-  </p:clrMapOvr>
-</p:sld>
-</file>
-
-<file path=ppt/slides/slide5.xml><?xml version="1.0" encoding="utf-8"?>
-<p:sld xmlns:a="http://schemas.openxmlformats.org/drawingml/2006/main" xmlns:r="http://schemas.openxmlformats.org/officeDocument/2006/relationships" xmlns:p="http://schemas.openxmlformats.org/presentationml/2006/main">
-  <p:cSld name="Slide 5">
-    <p:bg>
-      <p:bgPr>
-        <a:solidFill>
-          <a:srgbClr val="111827"/>
+          <a:srgbClr val="FFFFFF"/>
         </a:solidFill>
       </p:bgPr>
     </p:bg>
@@ -5968,14 +5463,121 @@
         </p:blipFill>
         <p:spPr>
           <a:xfrm>
-            <a:off x="0" y="86"/>
-            <a:ext cx="12191695" cy="6857829"/>
+            <a:off x="0" y="0"/>
+            <a:ext cx="12191695" cy="6858000"/>
           </a:xfrm>
           <a:prstGeom prst="rect">
             <a:avLst/>
           </a:prstGeom>
         </p:spPr>
       </p:pic>
+      <p:sp>
+        <p:nvSpPr>
+          <p:cNvPr id="3" name="Shape 0"/>
+          <p:cNvSpPr/>
+          <p:nvPr/>
+        </p:nvSpPr>
+        <p:spPr>
+          <a:xfrm>
+            <a:off x="0" y="6414516"/>
+            <a:ext cx="12191695" cy="443484"/>
+          </a:xfrm>
+          <a:prstGeom prst="rect">
+            <a:avLst/>
+          </a:prstGeom>
+          <a:solidFill>
+            <a:srgbClr val="F8FAFC"/>
+          </a:solidFill>
+          <a:ln w="10160">
+            <a:solidFill>
+              <a:srgbClr val="E2E8F0"/>
+            </a:solidFill>
+            <a:prstDash val="solid"/>
+          </a:ln>
+        </p:spPr>
+      </p:sp>
+      <p:sp>
+        <p:nvSpPr>
+          <p:cNvPr id="4" name="Text 1"/>
+          <p:cNvSpPr/>
+          <p:nvPr/>
+        </p:nvSpPr>
+        <p:spPr>
+          <a:xfrm>
+            <a:off x="384048" y="6510528"/>
+            <a:ext cx="6995160" cy="164592"/>
+          </a:xfrm>
+          <a:prstGeom prst="rect">
+            <a:avLst/>
+          </a:prstGeom>
+          <a:noFill/>
+          <a:ln/>
+        </p:spPr>
+        <p:txBody>
+          <a:bodyPr wrap="square" lIns="0" tIns="0" rIns="0" bIns="0" rtlCol="0" anchor="ctr">
+            <a:normAutofit/>
+          </a:bodyPr>
+          <a:lstStyle/>
+          <a:p>
+            <a:pPr indent="0" marL="0">
+              <a:buNone/>
+            </a:pPr>
+            <a:r>
+              <a:rPr lang="en-US" sz="820" i="1" dirty="0">
+                <a:solidFill>
+                  <a:srgbClr val="94A3B8"/>
+                </a:solidFill>
+                <a:latin typeface="Microsoft YaHei" pitchFamily="34" charset="0"/>
+                <a:ea typeface="Microsoft YaHei" pitchFamily="34" charset="-122"/>
+                <a:cs typeface="Microsoft YaHei" pitchFamily="34" charset="-120"/>
+              </a:rPr>
+              <a:t>来源：《内科学》第10版 九章白血病；Li W. WHO 5th Ed Classification. Leukemia, 2022.</a:t>
+            </a:r>
+            <a:endParaRPr lang="en-US" sz="820" dirty="0"/>
+          </a:p>
+        </p:txBody>
+      </p:sp>
+      <p:sp>
+        <p:nvSpPr>
+          <p:cNvPr id="5" name="Text 2"/>
+          <p:cNvSpPr/>
+          <p:nvPr/>
+        </p:nvSpPr>
+        <p:spPr>
+          <a:xfrm>
+            <a:off x="7498080" y="6501384"/>
+            <a:ext cx="4315968" cy="182880"/>
+          </a:xfrm>
+          <a:prstGeom prst="rect">
+            <a:avLst/>
+          </a:prstGeom>
+          <a:noFill/>
+          <a:ln/>
+        </p:spPr>
+        <p:txBody>
+          <a:bodyPr wrap="square" lIns="0" tIns="0" rIns="0" bIns="0" rtlCol="0" anchor="ctr">
+            <a:normAutofit/>
+          </a:bodyPr>
+          <a:lstStyle/>
+          <a:p>
+            <a:pPr algn="r" indent="0" marL="0">
+              <a:buNone/>
+            </a:pPr>
+            <a:r>
+              <a:rPr lang="en-US" sz="840" dirty="0">
+                <a:solidFill>
+                  <a:srgbClr val="64748B"/>
+                </a:solidFill>
+                <a:latin typeface="Microsoft YaHei" pitchFamily="34" charset="0"/>
+                <a:ea typeface="Microsoft YaHei" pitchFamily="34" charset="-122"/>
+                <a:cs typeface="Microsoft YaHei" pitchFamily="34" charset="-120"/>
+              </a:rPr>
+              <a:t>张家赫｜学号：2024193112｜儿科班｜PBL Case 1</a:t>
+            </a:r>
+            <a:endParaRPr lang="en-US" sz="840" dirty="0"/>
+          </a:p>
+        </p:txBody>
+      </p:sp>
     </p:spTree>
   </p:cSld>
   <p:clrMapOvr>
@@ -5984,9 +5586,9 @@
 </p:sld>
 </file>
 
-<file path=ppt/slides/slide6.xml><?xml version="1.0" encoding="utf-8"?>
+<file path=ppt/slides/slide5.xml><?xml version="1.0" encoding="utf-8"?>
 <p:sld xmlns:a="http://schemas.openxmlformats.org/drawingml/2006/main" xmlns:r="http://schemas.openxmlformats.org/officeDocument/2006/relationships" xmlns:p="http://schemas.openxmlformats.org/presentationml/2006/main">
-  <p:cSld name="Slide 6">
+  <p:cSld name="Slide 5">
     <p:bg>
       <p:bgPr>
         <a:solidFill>
@@ -6068,7 +5670,7 @@
                 <a:ea typeface="Microsoft YaHei" pitchFamily="34" charset="-122"/>
                 <a:cs typeface="Microsoft YaHei" pitchFamily="34" charset="-120"/>
               </a:rPr>
-              <a:t>Q3｜问题过渡</a:t>
+              <a:t>问题 3</a:t>
             </a:r>
             <a:endParaRPr lang="en-US" sz="2200" dirty="0"/>
           </a:p>
@@ -6105,12 +5707,12 @@
         </p:nvSpPr>
         <p:spPr>
           <a:xfrm>
-            <a:off x="822960" y="1600200"/>
-            <a:ext cx="10561320" cy="2834640"/>
+            <a:off x="822960" y="1417320"/>
+            <a:ext cx="10561320" cy="3794760"/>
           </a:xfrm>
           <a:prstGeom prst="roundRect">
             <a:avLst>
-              <a:gd name="adj" fmla="val 2581"/>
+              <a:gd name="adj" fmla="val 1928"/>
             </a:avLst>
           </a:prstGeom>
           <a:solidFill>
@@ -6132,12 +5734,12 @@
         </p:nvSpPr>
         <p:spPr>
           <a:xfrm>
-            <a:off x="1051560" y="1965960"/>
-            <a:ext cx="1143000" cy="713232"/>
+            <a:off x="1051560" y="1828800"/>
+            <a:ext cx="1417320" cy="822960"/>
           </a:xfrm>
           <a:prstGeom prst="roundRect">
             <a:avLst>
-              <a:gd name="adj" fmla="val 7692"/>
+              <a:gd name="adj" fmla="val 6667"/>
             </a:avLst>
           </a:prstGeom>
           <a:solidFill>
@@ -6159,8 +5761,8 @@
         </p:nvSpPr>
         <p:spPr>
           <a:xfrm>
-            <a:off x="1051560" y="2130552"/>
-            <a:ext cx="1143000" cy="237744"/>
+            <a:off x="1051560" y="2029968"/>
+            <a:ext cx="1417320" cy="274320"/>
           </a:xfrm>
           <a:prstGeom prst="rect">
             <a:avLst/>
@@ -6176,7 +5778,7 @@
               <a:buNone/>
             </a:pPr>
             <a:r>
-              <a:rPr lang="en-US" sz="1800" b="1" dirty="0">
+              <a:rPr lang="en-US" sz="1900" b="1" dirty="0">
                 <a:solidFill>
                   <a:srgbClr val="166534"/>
                 </a:solidFill>
@@ -6184,9 +5786,9 @@
                 <a:ea typeface="Microsoft YaHei" pitchFamily="34" charset="-122"/>
                 <a:cs typeface="Microsoft YaHei" pitchFamily="34" charset="-120"/>
               </a:rPr>
-              <a:t>Q3</a:t>
-            </a:r>
-            <a:endParaRPr lang="en-US" sz="1800" dirty="0"/>
+              <a:t>问题 3</a:t>
+            </a:r>
+            <a:endParaRPr lang="en-US" sz="1900" dirty="0"/>
           </a:p>
         </p:txBody>
       </p:sp>
@@ -6198,8 +5800,8 @@
         </p:nvSpPr>
         <p:spPr>
           <a:xfrm>
-            <a:off x="2468880" y="1847088"/>
-            <a:ext cx="7680960" cy="475488"/>
+            <a:off x="2788920" y="1810512"/>
+            <a:ext cx="7726680" cy="2057400"/>
           </a:xfrm>
           <a:prstGeom prst="rect">
             <a:avLst/>
@@ -6215,7 +5817,7 @@
               <a:buNone/>
             </a:pPr>
             <a:r>
-              <a:rPr lang="en-US" sz="2400" b="1" dirty="0">
+              <a:rPr lang="en-US" sz="2300" b="1" dirty="0">
                 <a:solidFill>
                   <a:srgbClr val="1E3C72"/>
                 </a:solidFill>
@@ -6223,9 +5825,9 @@
                 <a:ea typeface="Microsoft YaHei" pitchFamily="34" charset="-122"/>
                 <a:cs typeface="Microsoft YaHei" pitchFamily="34" charset="-120"/>
               </a:rPr>
-              <a:t>CML 的诊断标准、分期标准与病例缺口</a:t>
-            </a:r>
-            <a:endParaRPr lang="en-US" sz="2400" dirty="0"/>
+              <a:t>CML 的诊断标准与分期标准是什么？本病例目前符合哪些条目，还缺哪些确诊信息？</a:t>
+            </a:r>
+            <a:endParaRPr lang="en-US" sz="2300" dirty="0"/>
           </a:p>
         </p:txBody>
       </p:sp>
@@ -6237,8 +5839,8 @@
         </p:nvSpPr>
         <p:spPr>
           <a:xfrm>
-            <a:off x="2487168" y="2633472"/>
-            <a:ext cx="7818120" cy="640080"/>
+            <a:off x="502920" y="6419088"/>
+            <a:ext cx="6217920" cy="201168"/>
           </a:xfrm>
           <a:prstGeom prst="rect">
             <a:avLst/>
@@ -6254,17 +5856,17 @@
               <a:buNone/>
             </a:pPr>
             <a:r>
-              <a:rPr lang="en-US" sz="1500" dirty="0">
-                <a:solidFill>
-                  <a:srgbClr val="475569"/>
-                </a:solidFill>
-                <a:latin typeface="Microsoft YaHei" pitchFamily="34" charset="0"/>
-                <a:ea typeface="Microsoft YaHei" pitchFamily="34" charset="-122"/>
-                <a:cs typeface="Microsoft YaHei" pitchFamily="34" charset="-120"/>
-              </a:rPr>
-              <a:t>先定疑诊方向，再指出确诊和分期仍缺少哪些关键证据。</a:t>
-            </a:r>
-            <a:endParaRPr lang="en-US" sz="1500" dirty="0"/>
+              <a:rPr lang="en-US" sz="900" i="1" dirty="0">
+                <a:solidFill>
+                  <a:srgbClr val="94A3B8"/>
+                </a:solidFill>
+                <a:latin typeface="Microsoft YaHei" pitchFamily="34" charset="0"/>
+                <a:ea typeface="Microsoft YaHei" pitchFamily="34" charset="-122"/>
+                <a:cs typeface="Microsoft YaHei" pitchFamily="34" charset="-120"/>
+              </a:rPr>
+              <a:t>问题 3 标题页</a:t>
+            </a:r>
+            <a:endParaRPr lang="en-US" sz="900" dirty="0"/>
           </a:p>
         </p:txBody>
       </p:sp>
@@ -6276,8 +5878,8 @@
         </p:nvSpPr>
         <p:spPr>
           <a:xfrm>
-            <a:off x="502920" y="6419088"/>
-            <a:ext cx="6217920" cy="201168"/>
+            <a:off x="7909560" y="6400800"/>
+            <a:ext cx="3749040" cy="228600"/>
           </a:xfrm>
           <a:prstGeom prst="rect">
             <a:avLst/>
@@ -6289,45 +5891,6 @@
           <a:bodyPr wrap="square" lIns="0" tIns="0" rIns="0" bIns="0" rtlCol="0" anchor="ctr"/>
           <a:lstStyle/>
           <a:p>
-            <a:pPr indent="0" marL="0">
-              <a:buNone/>
-            </a:pPr>
-            <a:r>
-              <a:rPr lang="en-US" sz="900" i="1" dirty="0">
-                <a:solidFill>
-                  <a:srgbClr val="94A3B8"/>
-                </a:solidFill>
-                <a:latin typeface="Microsoft YaHei" pitchFamily="34" charset="0"/>
-                <a:ea typeface="Microsoft YaHei" pitchFamily="34" charset="-122"/>
-                <a:cs typeface="Microsoft YaHei" pitchFamily="34" charset="-120"/>
-              </a:rPr>
-              <a:t>Q3 过渡页</a:t>
-            </a:r>
-            <a:endParaRPr lang="en-US" sz="900" dirty="0"/>
-          </a:p>
-        </p:txBody>
-      </p:sp>
-      <p:sp>
-        <p:nvSpPr>
-          <p:cNvPr id="11" name="Text 9"/>
-          <p:cNvSpPr/>
-          <p:nvPr/>
-        </p:nvSpPr>
-        <p:spPr>
-          <a:xfrm>
-            <a:off x="7909560" y="6400800"/>
-            <a:ext cx="3749040" cy="228600"/>
-          </a:xfrm>
-          <a:prstGeom prst="rect">
-            <a:avLst/>
-          </a:prstGeom>
-          <a:noFill/>
-          <a:ln/>
-        </p:spPr>
-        <p:txBody>
-          <a:bodyPr wrap="square" lIns="0" tIns="0" rIns="0" bIns="0" rtlCol="0" anchor="ctr"/>
-          <a:lstStyle/>
-          <a:p>
             <a:pPr algn="r" indent="0" marL="0">
               <a:buNone/>
             </a:pPr>
@@ -6340,7 +5903,7 @@
                 <a:ea typeface="Microsoft YaHei" pitchFamily="34" charset="-122"/>
                 <a:cs typeface="Microsoft YaHei" pitchFamily="34" charset="-120"/>
               </a:rPr>
-              <a:t>张家赫｜儿科班｜PBL Case 1 第二幕</a:t>
+              <a:t>血液与肿瘤｜PBL Case 1 第二幕</a:t>
             </a:r>
             <a:endParaRPr lang="en-US" sz="900" dirty="0"/>
           </a:p>
@@ -6354,13 +5917,13 @@
 </p:sld>
 </file>
 
-<file path=ppt/slides/slide7.xml><?xml version="1.0" encoding="utf-8"?>
+<file path=ppt/slides/slide6.xml><?xml version="1.0" encoding="utf-8"?>
 <p:sld xmlns:a="http://schemas.openxmlformats.org/drawingml/2006/main" xmlns:r="http://schemas.openxmlformats.org/officeDocument/2006/relationships" xmlns:p="http://schemas.openxmlformats.org/presentationml/2006/main">
-  <p:cSld name="Slide 7">
+  <p:cSld name="Slide 6">
     <p:bg>
       <p:bgPr>
         <a:solidFill>
-          <a:srgbClr val="111827"/>
+          <a:srgbClr val="FFFFFF"/>
         </a:solidFill>
       </p:bgPr>
     </p:bg>
@@ -6394,14 +5957,705 @@
         </p:blipFill>
         <p:spPr>
           <a:xfrm>
-            <a:off x="0" y="86"/>
-            <a:ext cx="12191695" cy="6857829"/>
+            <a:off x="0" y="0"/>
+            <a:ext cx="12191695" cy="6858000"/>
           </a:xfrm>
           <a:prstGeom prst="rect">
             <a:avLst/>
           </a:prstGeom>
         </p:spPr>
       </p:pic>
+      <p:sp>
+        <p:nvSpPr>
+          <p:cNvPr id="3" name="Shape 0"/>
+          <p:cNvSpPr/>
+          <p:nvPr/>
+        </p:nvSpPr>
+        <p:spPr>
+          <a:xfrm>
+            <a:off x="0" y="6414516"/>
+            <a:ext cx="12191695" cy="443484"/>
+          </a:xfrm>
+          <a:prstGeom prst="rect">
+            <a:avLst/>
+          </a:prstGeom>
+          <a:solidFill>
+            <a:srgbClr val="F8FAFC"/>
+          </a:solidFill>
+          <a:ln w="10160">
+            <a:solidFill>
+              <a:srgbClr val="E2E8F0"/>
+            </a:solidFill>
+            <a:prstDash val="solid"/>
+          </a:ln>
+        </p:spPr>
+      </p:sp>
+      <p:sp>
+        <p:nvSpPr>
+          <p:cNvPr id="4" name="Text 1"/>
+          <p:cNvSpPr/>
+          <p:nvPr/>
+        </p:nvSpPr>
+        <p:spPr>
+          <a:xfrm>
+            <a:off x="384048" y="6510528"/>
+            <a:ext cx="6995160" cy="164592"/>
+          </a:xfrm>
+          <a:prstGeom prst="rect">
+            <a:avLst/>
+          </a:prstGeom>
+          <a:noFill/>
+          <a:ln/>
+        </p:spPr>
+        <p:txBody>
+          <a:bodyPr wrap="square" lIns="0" tIns="0" rIns="0" bIns="0" rtlCol="0" anchor="ctr">
+            <a:normAutofit/>
+          </a:bodyPr>
+          <a:lstStyle/>
+          <a:p>
+            <a:pPr indent="0" marL="0">
+              <a:buNone/>
+            </a:pPr>
+            <a:r>
+              <a:rPr lang="en-US" sz="820" i="1" dirty="0">
+                <a:solidFill>
+                  <a:srgbClr val="94A3B8"/>
+                </a:solidFill>
+                <a:latin typeface="Microsoft YaHei" pitchFamily="34" charset="0"/>
+                <a:ea typeface="Microsoft YaHei" pitchFamily="34" charset="-122"/>
+                <a:cs typeface="Microsoft YaHei" pitchFamily="34" charset="-120"/>
+              </a:rPr>
+              <a:t>来源：国家卫健委《慢性髓性白血病诊疗指南（2022年版）》；《内科学》第10版；中国 CML 指南 2025.</a:t>
+            </a:r>
+            <a:endParaRPr lang="en-US" sz="820" dirty="0"/>
+          </a:p>
+        </p:txBody>
+      </p:sp>
+      <p:sp>
+        <p:nvSpPr>
+          <p:cNvPr id="5" name="Text 2"/>
+          <p:cNvSpPr/>
+          <p:nvPr/>
+        </p:nvSpPr>
+        <p:spPr>
+          <a:xfrm>
+            <a:off x="7498080" y="6501384"/>
+            <a:ext cx="4315968" cy="182880"/>
+          </a:xfrm>
+          <a:prstGeom prst="rect">
+            <a:avLst/>
+          </a:prstGeom>
+          <a:noFill/>
+          <a:ln/>
+        </p:spPr>
+        <p:txBody>
+          <a:bodyPr wrap="square" lIns="0" tIns="0" rIns="0" bIns="0" rtlCol="0" anchor="ctr">
+            <a:normAutofit/>
+          </a:bodyPr>
+          <a:lstStyle/>
+          <a:p>
+            <a:pPr algn="r" indent="0" marL="0">
+              <a:buNone/>
+            </a:pPr>
+            <a:r>
+              <a:rPr lang="en-US" sz="840" dirty="0">
+                <a:solidFill>
+                  <a:srgbClr val="64748B"/>
+                </a:solidFill>
+                <a:latin typeface="Microsoft YaHei" pitchFamily="34" charset="0"/>
+                <a:ea typeface="Microsoft YaHei" pitchFamily="34" charset="-122"/>
+                <a:cs typeface="Microsoft YaHei" pitchFamily="34" charset="-120"/>
+              </a:rPr>
+              <a:t>张家赫｜学号：2024193112｜儿科班｜PBL Case 1</a:t>
+            </a:r>
+            <a:endParaRPr lang="en-US" sz="840" dirty="0"/>
+          </a:p>
+        </p:txBody>
+      </p:sp>
+    </p:spTree>
+  </p:cSld>
+  <p:clrMapOvr>
+    <a:masterClrMapping/>
+  </p:clrMapOvr>
+</p:sld>
+</file>
+
+<file path=ppt/slides/slide7.xml><?xml version="1.0" encoding="utf-8"?>
+<p:sld xmlns:a="http://schemas.openxmlformats.org/drawingml/2006/main" xmlns:r="http://schemas.openxmlformats.org/officeDocument/2006/relationships" xmlns:p="http://schemas.openxmlformats.org/presentationml/2006/main">
+  <p:cSld name="Slide 7">
+    <p:bg>
+      <p:bgPr>
+        <a:solidFill>
+          <a:srgbClr val="F8FAFC"/>
+        </a:solidFill>
+      </p:bgPr>
+    </p:bg>
+    <p:spTree>
+      <p:nvGrpSpPr>
+        <p:cNvPr id="1" name=""/>
+        <p:cNvGrpSpPr/>
+        <p:nvPr/>
+      </p:nvGrpSpPr>
+      <p:grpSpPr>
+        <a:xfrm>
+          <a:off x="0" y="0"/>
+          <a:ext cx="0" cy="0"/>
+          <a:chOff x="0" y="0"/>
+          <a:chExt cx="0" cy="0"/>
+        </a:xfrm>
+      </p:grpSpPr>
+      <p:sp>
+        <p:nvSpPr>
+          <p:cNvPr id="2" name="Shape 0"/>
+          <p:cNvSpPr/>
+          <p:nvPr/>
+        </p:nvSpPr>
+        <p:spPr>
+          <a:xfrm>
+            <a:off x="0" y="0"/>
+            <a:ext cx="12191695" cy="868680"/>
+          </a:xfrm>
+          <a:prstGeom prst="rect">
+            <a:avLst/>
+          </a:prstGeom>
+          <a:solidFill>
+            <a:srgbClr val="2F5597"/>
+          </a:solidFill>
+          <a:ln w="12700">
+            <a:solidFill>
+              <a:srgbClr val="2F5597">
+                <a:alpha val="0"/>
+              </a:srgbClr>
+            </a:solidFill>
+            <a:prstDash val="solid"/>
+          </a:ln>
+        </p:spPr>
+      </p:sp>
+      <p:sp>
+        <p:nvSpPr>
+          <p:cNvPr id="3" name="Text 1"/>
+          <p:cNvSpPr/>
+          <p:nvPr/>
+        </p:nvSpPr>
+        <p:spPr>
+          <a:xfrm>
+            <a:off x="457200" y="164592"/>
+            <a:ext cx="8961120" cy="384048"/>
+          </a:xfrm>
+          <a:prstGeom prst="rect">
+            <a:avLst/>
+          </a:prstGeom>
+          <a:noFill/>
+          <a:ln/>
+        </p:spPr>
+        <p:txBody>
+          <a:bodyPr wrap="square" lIns="0" tIns="0" rIns="0" bIns="0" rtlCol="0" anchor="ctr"/>
+          <a:lstStyle/>
+          <a:p>
+            <a:pPr indent="0" marL="0">
+              <a:buNone/>
+            </a:pPr>
+            <a:r>
+              <a:rPr lang="en-US" sz="2200" b="1" dirty="0">
+                <a:solidFill>
+                  <a:srgbClr val="FFFFFF"/>
+                </a:solidFill>
+                <a:latin typeface="Microsoft YaHei" pitchFamily="34" charset="0"/>
+                <a:ea typeface="Microsoft YaHei" pitchFamily="34" charset="-122"/>
+                <a:cs typeface="Microsoft YaHei" pitchFamily="34" charset="-120"/>
+              </a:rPr>
+              <a:t>问题 3｜补充讨论</a:t>
+            </a:r>
+            <a:endParaRPr lang="en-US" sz="2200" dirty="0"/>
+          </a:p>
+        </p:txBody>
+      </p:sp>
+      <p:sp>
+        <p:nvSpPr>
+          <p:cNvPr id="4" name="Shape 2"/>
+          <p:cNvSpPr/>
+          <p:nvPr/>
+        </p:nvSpPr>
+        <p:spPr>
+          <a:xfrm>
+            <a:off x="0" y="868680"/>
+            <a:ext cx="12191695" cy="0"/>
+          </a:xfrm>
+          <a:prstGeom prst="line">
+            <a:avLst/>
+          </a:prstGeom>
+          <a:noFill/>
+          <a:ln w="15240">
+            <a:solidFill>
+              <a:srgbClr val="DCE6F2"/>
+            </a:solidFill>
+            <a:prstDash val="solid"/>
+          </a:ln>
+        </p:spPr>
+      </p:sp>
+      <p:sp>
+        <p:nvSpPr>
+          <p:cNvPr id="5" name="Text 3"/>
+          <p:cNvSpPr/>
+          <p:nvPr/>
+        </p:nvSpPr>
+        <p:spPr>
+          <a:xfrm>
+            <a:off x="713232" y="1078992"/>
+            <a:ext cx="7040880" cy="502920"/>
+          </a:xfrm>
+          <a:prstGeom prst="rect">
+            <a:avLst/>
+          </a:prstGeom>
+          <a:noFill/>
+          <a:ln/>
+        </p:spPr>
+        <p:txBody>
+          <a:bodyPr wrap="square" lIns="0" tIns="0" rIns="0" bIns="0" rtlCol="0" anchor="ctr"/>
+          <a:lstStyle/>
+          <a:p>
+            <a:pPr indent="0" marL="0">
+              <a:buNone/>
+            </a:pPr>
+            <a:r>
+              <a:rPr lang="en-US" sz="2100" b="1" dirty="0">
+                <a:solidFill>
+                  <a:srgbClr val="1E3C72"/>
+                </a:solidFill>
+                <a:latin typeface="Microsoft YaHei" pitchFamily="34" charset="0"/>
+                <a:ea typeface="Microsoft YaHei" pitchFamily="34" charset="-122"/>
+                <a:cs typeface="Microsoft YaHei" pitchFamily="34" charset="-120"/>
+              </a:rPr>
+              <a:t>鉴别诊断</a:t>
+            </a:r>
+            <a:endParaRPr lang="en-US" sz="2100" dirty="0"/>
+          </a:p>
+        </p:txBody>
+      </p:sp>
+      <p:sp>
+        <p:nvSpPr>
+          <p:cNvPr id="6" name="Shape 4"/>
+          <p:cNvSpPr/>
+          <p:nvPr/>
+        </p:nvSpPr>
+        <p:spPr>
+          <a:xfrm>
+            <a:off x="749808" y="1828800"/>
+            <a:ext cx="5376672" cy="4526280"/>
+          </a:xfrm>
+          <a:prstGeom prst="roundRect">
+            <a:avLst>
+              <a:gd name="adj" fmla="val 1010"/>
+            </a:avLst>
+          </a:prstGeom>
+          <a:solidFill>
+            <a:srgbClr val="F8FAFC"/>
+          </a:solidFill>
+          <a:ln w="13970">
+            <a:solidFill>
+              <a:srgbClr val="CBD5E1"/>
+            </a:solidFill>
+            <a:prstDash val="solid"/>
+          </a:ln>
+        </p:spPr>
+      </p:sp>
+      <p:sp>
+        <p:nvSpPr>
+          <p:cNvPr id="7" name="Text 5"/>
+          <p:cNvSpPr/>
+          <p:nvPr/>
+        </p:nvSpPr>
+        <p:spPr>
+          <a:xfrm>
+            <a:off x="950976" y="1993392"/>
+            <a:ext cx="4974336" cy="4197096"/>
+          </a:xfrm>
+          <a:prstGeom prst="rect">
+            <a:avLst/>
+          </a:prstGeom>
+          <a:noFill/>
+          <a:ln/>
+        </p:spPr>
+        <p:txBody>
+          <a:bodyPr wrap="square" lIns="0" tIns="0" rIns="0" bIns="0" rtlCol="0" anchor="t">
+            <a:normAutofit/>
+          </a:bodyPr>
+          <a:lstStyle/>
+          <a:p>
+            <a:pPr indent="0" marL="0">
+              <a:buNone/>
+            </a:pPr>
+            <a:r>
+              <a:rPr lang="en-US" sz="1120" dirty="0">
+                <a:solidFill>
+                  <a:srgbClr val="334155"/>
+                </a:solidFill>
+                <a:latin typeface="Microsoft YaHei" pitchFamily="34" charset="0"/>
+                <a:ea typeface="Microsoft YaHei" pitchFamily="34" charset="-122"/>
+                <a:cs typeface="Microsoft YaHei" pitchFamily="34" charset="-120"/>
+              </a:rPr>
+              <a:t>鉴别诊断：</a:t>
+            </a:r>
+            <a:endParaRPr lang="en-US" sz="1120" dirty="0"/>
+          </a:p>
+          <a:p>
+            <a:pPr indent="0" marL="0">
+              <a:buNone/>
+            </a:pPr>
+            <a:r>
+              <a:rPr lang="en-US" sz="1120" dirty="0">
+                <a:solidFill>
+                  <a:srgbClr val="334155"/>
+                </a:solidFill>
+                <a:latin typeface="Microsoft YaHei" pitchFamily="34" charset="0"/>
+                <a:ea typeface="Microsoft YaHei" pitchFamily="34" charset="-122"/>
+                <a:cs typeface="Microsoft YaHei" pitchFamily="34" charset="-120"/>
+              </a:rPr>
+              <a:t>（1）其他原因引起的脾大 血吸虫病、慢性疟疾、黑热病、肝硬化、脾功能亢进</a:t>
+            </a:r>
+            <a:endParaRPr lang="en-US" sz="1120" dirty="0"/>
+          </a:p>
+          <a:p>
+            <a:pPr indent="0" marL="0">
+              <a:buNone/>
+            </a:pPr>
+            <a:r>
+              <a:rPr lang="en-US" sz="1120" dirty="0">
+                <a:solidFill>
+                  <a:srgbClr val="334155"/>
+                </a:solidFill>
+                <a:latin typeface="Microsoft YaHei" pitchFamily="34" charset="0"/>
+                <a:ea typeface="Microsoft YaHei" pitchFamily="34" charset="-122"/>
+                <a:cs typeface="Microsoft YaHei" pitchFamily="34" charset="-120"/>
+              </a:rPr>
+              <a:t>等均有脾大,但均有各自原发病的临床特点，并且血象及骨髓象无 CML 的典型改</a:t>
+            </a:r>
+            <a:endParaRPr lang="en-US" sz="1120" dirty="0"/>
+          </a:p>
+          <a:p>
+            <a:pPr indent="0" marL="0">
+              <a:buNone/>
+            </a:pPr>
+            <a:r>
+              <a:rPr lang="en-US" sz="1120" dirty="0">
+                <a:solidFill>
+                  <a:srgbClr val="334155"/>
+                </a:solidFill>
+                <a:latin typeface="Microsoft YaHei" pitchFamily="34" charset="0"/>
+                <a:ea typeface="Microsoft YaHei" pitchFamily="34" charset="-122"/>
+                <a:cs typeface="Microsoft YaHei" pitchFamily="34" charset="-120"/>
+              </a:rPr>
+              <a:t>变。 Ph 染色体及 BCR::ABLI 融合基因均阴性。</a:t>
+            </a:r>
+            <a:endParaRPr lang="en-US" sz="1120" dirty="0"/>
+          </a:p>
+        </p:txBody>
+      </p:sp>
+      <p:sp>
+        <p:nvSpPr>
+          <p:cNvPr id="8" name="Shape 6"/>
+          <p:cNvSpPr/>
+          <p:nvPr/>
+        </p:nvSpPr>
+        <p:spPr>
+          <a:xfrm>
+            <a:off x="6089904" y="1828800"/>
+            <a:ext cx="5376672" cy="4526280"/>
+          </a:xfrm>
+          <a:prstGeom prst="roundRect">
+            <a:avLst>
+              <a:gd name="adj" fmla="val 1010"/>
+            </a:avLst>
+          </a:prstGeom>
+          <a:solidFill>
+            <a:srgbClr val="F8FAFC"/>
+          </a:solidFill>
+          <a:ln w="13970">
+            <a:solidFill>
+              <a:srgbClr val="CBD5E1"/>
+            </a:solidFill>
+            <a:prstDash val="solid"/>
+          </a:ln>
+        </p:spPr>
+      </p:sp>
+      <p:sp>
+        <p:nvSpPr>
+          <p:cNvPr id="9" name="Text 7"/>
+          <p:cNvSpPr/>
+          <p:nvPr/>
+        </p:nvSpPr>
+        <p:spPr>
+          <a:xfrm>
+            <a:off x="6291072" y="1993392"/>
+            <a:ext cx="4974336" cy="4197096"/>
+          </a:xfrm>
+          <a:prstGeom prst="rect">
+            <a:avLst/>
+          </a:prstGeom>
+          <a:noFill/>
+          <a:ln/>
+        </p:spPr>
+        <p:txBody>
+          <a:bodyPr wrap="square" lIns="0" tIns="0" rIns="0" bIns="0" rtlCol="0" anchor="t">
+            <a:normAutofit/>
+          </a:bodyPr>
+          <a:lstStyle/>
+          <a:p>
+            <a:pPr indent="0" marL="0">
+              <a:buNone/>
+            </a:pPr>
+            <a:r>
+              <a:rPr lang="en-US" sz="1060" dirty="0">
+                <a:solidFill>
+                  <a:srgbClr val="334155"/>
+                </a:solidFill>
+                <a:latin typeface="Microsoft YaHei" pitchFamily="34" charset="0"/>
+                <a:ea typeface="Microsoft YaHei" pitchFamily="34" charset="-122"/>
+                <a:cs typeface="Microsoft YaHei" pitchFamily="34" charset="-120"/>
+              </a:rPr>
+              <a:t>（2）类白血病反应 常并发于严重感染、恶性肿瘤等基础疾病,并有相应原发病的</a:t>
+            </a:r>
+            <a:endParaRPr lang="en-US" sz="1060" dirty="0"/>
+          </a:p>
+          <a:p>
+            <a:pPr indent="0" marL="0">
+              <a:buNone/>
+            </a:pPr>
+            <a:r>
+              <a:rPr lang="en-US" sz="1060" dirty="0">
+                <a:solidFill>
+                  <a:srgbClr val="334155"/>
+                </a:solidFill>
+                <a:latin typeface="Microsoft YaHei" pitchFamily="34" charset="0"/>
+                <a:ea typeface="Microsoft YaHei" pitchFamily="34" charset="-122"/>
+                <a:cs typeface="Microsoft YaHei" pitchFamily="34" charset="-120"/>
+              </a:rPr>
+              <a:t>临床表现。粒细胞胞质中常有中毒颗粒和空泡。嗜酸性粒细胞和嗜碱性粒细胞不</a:t>
+            </a:r>
+            <a:endParaRPr lang="en-US" sz="1060" dirty="0"/>
+          </a:p>
+          <a:p>
+            <a:pPr indent="0" marL="0">
+              <a:buNone/>
+            </a:pPr>
+            <a:r>
+              <a:rPr lang="en-US" sz="1060" dirty="0">
+                <a:solidFill>
+                  <a:srgbClr val="334155"/>
+                </a:solidFill>
+                <a:latin typeface="Microsoft YaHei" pitchFamily="34" charset="0"/>
+                <a:ea typeface="Microsoft YaHei" pitchFamily="34" charset="-122"/>
+                <a:cs typeface="Microsoft YaHei" pitchFamily="34" charset="-120"/>
+              </a:rPr>
+              <a:t>增多。NAP 反应强阳性。Ph 染色体及 BCR::ABLI 融合基因阴性。血小板和血红蛋</a:t>
+            </a:r>
+            <a:endParaRPr lang="en-US" sz="1060" dirty="0"/>
+          </a:p>
+          <a:p>
+            <a:pPr indent="0" marL="0">
+              <a:buNone/>
+            </a:pPr>
+            <a:r>
+              <a:rPr lang="en-US" sz="1060" dirty="0">
+                <a:solidFill>
+                  <a:srgbClr val="334155"/>
+                </a:solidFill>
+                <a:latin typeface="Microsoft YaHei" pitchFamily="34" charset="0"/>
+                <a:ea typeface="Microsoft YaHei" pitchFamily="34" charset="-122"/>
+                <a:cs typeface="Microsoft YaHei" pitchFamily="34" charset="-120"/>
+              </a:rPr>
+              <a:t>白大多正常。原发病控制后,白细胞恢复正常。</a:t>
+            </a:r>
+            <a:endParaRPr lang="en-US" sz="1060" dirty="0"/>
+          </a:p>
+          <a:p>
+            <a:pPr indent="0" marL="0">
+              <a:buNone/>
+            </a:pPr>
+            <a:endParaRPr lang="en-US" sz="1060" dirty="0"/>
+          </a:p>
+          <a:p>
+            <a:pPr indent="0" marL="0">
+              <a:buNone/>
+            </a:pPr>
+            <a:r>
+              <a:rPr lang="en-US" sz="1060" dirty="0">
+                <a:solidFill>
+                  <a:srgbClr val="334155"/>
+                </a:solidFill>
+                <a:latin typeface="Microsoft YaHei" pitchFamily="34" charset="0"/>
+                <a:ea typeface="Microsoft YaHei" pitchFamily="34" charset="-122"/>
+                <a:cs typeface="Microsoft YaHei" pitchFamily="34" charset="-120"/>
+              </a:rPr>
+              <a:t>（3）骨髓纤维化 原发性骨髓纤维化脾大显著，血象中白细胞增多，并出现幼粒</a:t>
+            </a:r>
+            <a:endParaRPr lang="en-US" sz="1060" dirty="0"/>
+          </a:p>
+          <a:p>
+            <a:pPr indent="0" marL="0">
+              <a:buNone/>
+            </a:pPr>
+            <a:r>
+              <a:rPr lang="en-US" sz="1060" dirty="0">
+                <a:solidFill>
+                  <a:srgbClr val="334155"/>
+                </a:solidFill>
+                <a:latin typeface="Microsoft YaHei" pitchFamily="34" charset="0"/>
+                <a:ea typeface="Microsoft YaHei" pitchFamily="34" charset="-122"/>
+                <a:cs typeface="Microsoft YaHei" pitchFamily="34" charset="-120"/>
+              </a:rPr>
+              <a:t>细胞等，易与 CML 混淆。但骨髓纤维化外周血白细胞数一般比 CML 少，多不超</a:t>
+            </a:r>
+            <a:endParaRPr lang="en-US" sz="1060" dirty="0"/>
+          </a:p>
+          <a:p>
+            <a:pPr indent="0" marL="0">
+              <a:buNone/>
+            </a:pPr>
+            <a:r>
+              <a:rPr lang="en-US" sz="1060" dirty="0">
+                <a:solidFill>
+                  <a:srgbClr val="334155"/>
+                </a:solidFill>
+                <a:latin typeface="Microsoft YaHei" pitchFamily="34" charset="0"/>
+                <a:ea typeface="Microsoft YaHei" pitchFamily="34" charset="-122"/>
+                <a:cs typeface="Microsoft YaHei" pitchFamily="34" charset="-120"/>
+              </a:rPr>
+              <a:t>过 30x109/L。 NAP 阳性。此外幼红细胞持续出现于外周血中，红细胞形态异常，</a:t>
+            </a:r>
+            <a:endParaRPr lang="en-US" sz="1060" dirty="0"/>
+          </a:p>
+          <a:p>
+            <a:pPr indent="0" marL="0">
+              <a:buNone/>
+            </a:pPr>
+            <a:r>
+              <a:rPr lang="en-US" sz="1060" dirty="0">
+                <a:solidFill>
+                  <a:srgbClr val="334155"/>
+                </a:solidFill>
+                <a:latin typeface="Microsoft YaHei" pitchFamily="34" charset="0"/>
+                <a:ea typeface="Microsoft YaHei" pitchFamily="34" charset="-122"/>
+                <a:cs typeface="Microsoft YaHei" pitchFamily="34" charset="-120"/>
+              </a:rPr>
+              <a:t>特别是泪滴状红细胞易见。 Ph 染色体及 BCR::ABLI 融合基因阴性。患者可存在</a:t>
+            </a:r>
+            <a:endParaRPr lang="en-US" sz="1060" dirty="0"/>
+          </a:p>
+          <a:p>
+            <a:pPr indent="0" marL="0">
+              <a:buNone/>
+            </a:pPr>
+            <a:r>
+              <a:rPr lang="en-US" sz="1060" dirty="0">
+                <a:solidFill>
+                  <a:srgbClr val="334155"/>
+                </a:solidFill>
+                <a:latin typeface="Microsoft YaHei" pitchFamily="34" charset="0"/>
+                <a:ea typeface="Microsoft YaHei" pitchFamily="34" charset="-122"/>
+                <a:cs typeface="Microsoft YaHei" pitchFamily="34" charset="-120"/>
+              </a:rPr>
+              <a:t>JAK2 V617F、CALR、MPL 基因突变。多次多部位骨髓穿刺干抽。骨髓活检网状纤</a:t>
+            </a:r>
+            <a:endParaRPr lang="en-US" sz="1060" dirty="0"/>
+          </a:p>
+          <a:p>
+            <a:pPr indent="0" marL="0">
+              <a:buNone/>
+            </a:pPr>
+            <a:r>
+              <a:rPr lang="en-US" sz="1060" dirty="0">
+                <a:solidFill>
+                  <a:srgbClr val="334155"/>
+                </a:solidFill>
+                <a:latin typeface="Microsoft YaHei" pitchFamily="34" charset="0"/>
+                <a:ea typeface="Microsoft YaHei" pitchFamily="34" charset="-122"/>
+                <a:cs typeface="Microsoft YaHei" pitchFamily="34" charset="-120"/>
+              </a:rPr>
+              <a:t>维染色阳性。</a:t>
+            </a:r>
+            <a:endParaRPr lang="en-US" sz="1060" dirty="0"/>
+          </a:p>
+        </p:txBody>
+      </p:sp>
+      <p:sp>
+        <p:nvSpPr>
+          <p:cNvPr id="10" name="Text 8"/>
+          <p:cNvSpPr/>
+          <p:nvPr/>
+        </p:nvSpPr>
+        <p:spPr>
+          <a:xfrm>
+            <a:off x="502920" y="6419088"/>
+            <a:ext cx="6217920" cy="201168"/>
+          </a:xfrm>
+          <a:prstGeom prst="rect">
+            <a:avLst/>
+          </a:prstGeom>
+          <a:noFill/>
+          <a:ln/>
+        </p:spPr>
+        <p:txBody>
+          <a:bodyPr wrap="square" lIns="0" tIns="0" rIns="0" bIns="0" rtlCol="0" anchor="ctr"/>
+          <a:lstStyle/>
+          <a:p>
+            <a:pPr indent="0" marL="0">
+              <a:buNone/>
+            </a:pPr>
+            <a:r>
+              <a:rPr lang="en-US" sz="900" i="1" dirty="0">
+                <a:solidFill>
+                  <a:srgbClr val="94A3B8"/>
+                </a:solidFill>
+                <a:latin typeface="Microsoft YaHei" pitchFamily="34" charset="0"/>
+                <a:ea typeface="Microsoft YaHei" pitchFamily="34" charset="-122"/>
+                <a:cs typeface="Microsoft YaHei" pitchFamily="34" charset="-120"/>
+              </a:rPr>
+              <a:t>补充页｜依据 Word 标注整理：鉴别诊断</a:t>
+            </a:r>
+            <a:endParaRPr lang="en-US" sz="900" dirty="0"/>
+          </a:p>
+        </p:txBody>
+      </p:sp>
+      <p:sp>
+        <p:nvSpPr>
+          <p:cNvPr id="11" name="Text 9"/>
+          <p:cNvSpPr/>
+          <p:nvPr/>
+        </p:nvSpPr>
+        <p:spPr>
+          <a:xfrm>
+            <a:off x="7909560" y="6400800"/>
+            <a:ext cx="3749040" cy="228600"/>
+          </a:xfrm>
+          <a:prstGeom prst="rect">
+            <a:avLst/>
+          </a:prstGeom>
+          <a:noFill/>
+          <a:ln/>
+        </p:spPr>
+        <p:txBody>
+          <a:bodyPr wrap="square" lIns="0" tIns="0" rIns="0" bIns="0" rtlCol="0" anchor="ctr"/>
+          <a:lstStyle/>
+          <a:p>
+            <a:pPr algn="r" indent="0" marL="0">
+              <a:buNone/>
+            </a:pPr>
+            <a:r>
+              <a:rPr lang="en-US" sz="900" dirty="0">
+                <a:solidFill>
+                  <a:srgbClr val="64748B"/>
+                </a:solidFill>
+                <a:latin typeface="Microsoft YaHei" pitchFamily="34" charset="0"/>
+                <a:ea typeface="Microsoft YaHei" pitchFamily="34" charset="-122"/>
+                <a:cs typeface="Microsoft YaHei" pitchFamily="34" charset="-120"/>
+              </a:rPr>
+              <a:t>血液与肿瘤｜PBL Case 1 第二幕</a:t>
+            </a:r>
+            <a:endParaRPr lang="en-US" sz="900" dirty="0"/>
+          </a:p>
+        </p:txBody>
+      </p:sp>
     </p:spTree>
   </p:cSld>
   <p:clrMapOvr>
@@ -6494,7 +6748,7 @@
                 <a:ea typeface="Microsoft YaHei" pitchFamily="34" charset="-122"/>
                 <a:cs typeface="Microsoft YaHei" pitchFamily="34" charset="-120"/>
               </a:rPr>
-              <a:t>Q4｜问题过渡</a:t>
+              <a:t>问题 4</a:t>
             </a:r>
             <a:endParaRPr lang="en-US" sz="2200" dirty="0"/>
           </a:p>
@@ -6531,12 +6785,12 @@
         </p:nvSpPr>
         <p:spPr>
           <a:xfrm>
-            <a:off x="822960" y="1600200"/>
-            <a:ext cx="10561320" cy="2834640"/>
+            <a:off x="822960" y="1417320"/>
+            <a:ext cx="10561320" cy="3794760"/>
           </a:xfrm>
           <a:prstGeom prst="roundRect">
             <a:avLst>
-              <a:gd name="adj" fmla="val 2581"/>
+              <a:gd name="adj" fmla="val 1928"/>
             </a:avLst>
           </a:prstGeom>
           <a:solidFill>
@@ -6558,12 +6812,12 @@
         </p:nvSpPr>
         <p:spPr>
           <a:xfrm>
-            <a:off x="1051560" y="1965960"/>
-            <a:ext cx="1143000" cy="713232"/>
+            <a:off x="1051560" y="1828800"/>
+            <a:ext cx="1417320" cy="822960"/>
           </a:xfrm>
           <a:prstGeom prst="roundRect">
             <a:avLst>
-              <a:gd name="adj" fmla="val 7692"/>
+              <a:gd name="adj" fmla="val 6667"/>
             </a:avLst>
           </a:prstGeom>
           <a:solidFill>
@@ -6585,8 +6839,8 @@
         </p:nvSpPr>
         <p:spPr>
           <a:xfrm>
-            <a:off x="1051560" y="2130552"/>
-            <a:ext cx="1143000" cy="237744"/>
+            <a:off x="1051560" y="2029968"/>
+            <a:ext cx="1417320" cy="274320"/>
           </a:xfrm>
           <a:prstGeom prst="rect">
             <a:avLst/>
@@ -6602,7 +6856,7 @@
               <a:buNone/>
             </a:pPr>
             <a:r>
-              <a:rPr lang="en-US" sz="1800" b="1" dirty="0">
+              <a:rPr lang="en-US" sz="1900" b="1" dirty="0">
                 <a:solidFill>
                   <a:srgbClr val="166534"/>
                 </a:solidFill>
@@ -6610,9 +6864,9 @@
                 <a:ea typeface="Microsoft YaHei" pitchFamily="34" charset="-122"/>
                 <a:cs typeface="Microsoft YaHei" pitchFamily="34" charset="-120"/>
               </a:rPr>
-              <a:t>Q4</a:t>
-            </a:r>
-            <a:endParaRPr lang="en-US" sz="1800" dirty="0"/>
+              <a:t>问题 4</a:t>
+            </a:r>
+            <a:endParaRPr lang="en-US" sz="1900" dirty="0"/>
           </a:p>
         </p:txBody>
       </p:sp>
@@ -6624,8 +6878,8 @@
         </p:nvSpPr>
         <p:spPr>
           <a:xfrm>
-            <a:off x="2468880" y="1847088"/>
-            <a:ext cx="7680960" cy="475488"/>
+            <a:off x="2788920" y="1810512"/>
+            <a:ext cx="7726680" cy="2057400"/>
           </a:xfrm>
           <a:prstGeom prst="rect">
             <a:avLst/>
@@ -6641,7 +6895,7 @@
               <a:buNone/>
             </a:pPr>
             <a:r>
-              <a:rPr lang="en-US" sz="2400" b="1" dirty="0">
+              <a:rPr lang="en-US" sz="2300" b="1" dirty="0">
                 <a:solidFill>
                   <a:srgbClr val="1E3C72"/>
                 </a:solidFill>
@@ -6649,9 +6903,9 @@
                 <a:ea typeface="Microsoft YaHei" pitchFamily="34" charset="-122"/>
                 <a:cs typeface="Microsoft YaHei" pitchFamily="34" charset="-120"/>
               </a:rPr>
-              <a:t>为什么会产生幼稚白细胞与核左移</a:t>
-            </a:r>
-            <a:endParaRPr lang="en-US" sz="2400" dirty="0"/>
+              <a:t>为什么 CML 会出现幼稚白细胞、核左移以及嗜酸/嗜碱粒细胞增多？</a:t>
+            </a:r>
+            <a:endParaRPr lang="en-US" sz="2300" dirty="0"/>
           </a:p>
         </p:txBody>
       </p:sp>
@@ -6663,8 +6917,8 @@
         </p:nvSpPr>
         <p:spPr>
           <a:xfrm>
-            <a:off x="2487168" y="2633472"/>
-            <a:ext cx="7818120" cy="640080"/>
+            <a:off x="502920" y="6419088"/>
+            <a:ext cx="6217920" cy="201168"/>
           </a:xfrm>
           <a:prstGeom prst="rect">
             <a:avLst/>
@@ -6680,17 +6934,17 @@
               <a:buNone/>
             </a:pPr>
             <a:r>
-              <a:rPr lang="en-US" sz="1500" dirty="0">
-                <a:solidFill>
-                  <a:srgbClr val="475569"/>
-                </a:solidFill>
-                <a:latin typeface="Microsoft YaHei" pitchFamily="34" charset="0"/>
-                <a:ea typeface="Microsoft YaHei" pitchFamily="34" charset="-122"/>
-                <a:cs typeface="Microsoft YaHei" pitchFamily="34" charset="-120"/>
-              </a:rPr>
-              <a:t>这一题是第二幕重点，先走主线机制，再接同学补充文献与前沿研究。</a:t>
-            </a:r>
-            <a:endParaRPr lang="en-US" sz="1500" dirty="0"/>
+              <a:rPr lang="en-US" sz="900" i="1" dirty="0">
+                <a:solidFill>
+                  <a:srgbClr val="94A3B8"/>
+                </a:solidFill>
+                <a:latin typeface="Microsoft YaHei" pitchFamily="34" charset="0"/>
+                <a:ea typeface="Microsoft YaHei" pitchFamily="34" charset="-122"/>
+                <a:cs typeface="Microsoft YaHei" pitchFamily="34" charset="-120"/>
+              </a:rPr>
+              <a:t>问题 4 标题页</a:t>
+            </a:r>
+            <a:endParaRPr lang="en-US" sz="900" dirty="0"/>
           </a:p>
         </p:txBody>
       </p:sp>
@@ -6702,8 +6956,8 @@
         </p:nvSpPr>
         <p:spPr>
           <a:xfrm>
-            <a:off x="502920" y="6419088"/>
-            <a:ext cx="6217920" cy="201168"/>
+            <a:off x="7909560" y="6400800"/>
+            <a:ext cx="3749040" cy="228600"/>
           </a:xfrm>
           <a:prstGeom prst="rect">
             <a:avLst/>
@@ -6715,45 +6969,6 @@
           <a:bodyPr wrap="square" lIns="0" tIns="0" rIns="0" bIns="0" rtlCol="0" anchor="ctr"/>
           <a:lstStyle/>
           <a:p>
-            <a:pPr indent="0" marL="0">
-              <a:buNone/>
-            </a:pPr>
-            <a:r>
-              <a:rPr lang="en-US" sz="900" i="1" dirty="0">
-                <a:solidFill>
-                  <a:srgbClr val="94A3B8"/>
-                </a:solidFill>
-                <a:latin typeface="Microsoft YaHei" pitchFamily="34" charset="0"/>
-                <a:ea typeface="Microsoft YaHei" pitchFamily="34" charset="-122"/>
-                <a:cs typeface="Microsoft YaHei" pitchFamily="34" charset="-120"/>
-              </a:rPr>
-              <a:t>Q4 过渡页</a:t>
-            </a:r>
-            <a:endParaRPr lang="en-US" sz="900" dirty="0"/>
-          </a:p>
-        </p:txBody>
-      </p:sp>
-      <p:sp>
-        <p:nvSpPr>
-          <p:cNvPr id="11" name="Text 9"/>
-          <p:cNvSpPr/>
-          <p:nvPr/>
-        </p:nvSpPr>
-        <p:spPr>
-          <a:xfrm>
-            <a:off x="7909560" y="6400800"/>
-            <a:ext cx="3749040" cy="228600"/>
-          </a:xfrm>
-          <a:prstGeom prst="rect">
-            <a:avLst/>
-          </a:prstGeom>
-          <a:noFill/>
-          <a:ln/>
-        </p:spPr>
-        <p:txBody>
-          <a:bodyPr wrap="square" lIns="0" tIns="0" rIns="0" bIns="0" rtlCol="0" anchor="ctr"/>
-          <a:lstStyle/>
-          <a:p>
             <a:pPr algn="r" indent="0" marL="0">
               <a:buNone/>
             </a:pPr>
@@ -6766,7 +6981,7 @@
                 <a:ea typeface="Microsoft YaHei" pitchFamily="34" charset="-122"/>
                 <a:cs typeface="Microsoft YaHei" pitchFamily="34" charset="-120"/>
               </a:rPr>
-              <a:t>张家赫｜儿科班｜PBL Case 1 第二幕</a:t>
+              <a:t>血液与肿瘤｜PBL Case 1 第二幕</a:t>
             </a:r>
             <a:endParaRPr lang="en-US" sz="900" dirty="0"/>
           </a:p>
@@ -6786,7 +7001,7 @@
     <p:bg>
       <p:bgPr>
         <a:solidFill>
-          <a:srgbClr val="111827"/>
+          <a:srgbClr val="FFFFFF"/>
         </a:solidFill>
       </p:bgPr>
     </p:bg>
@@ -6820,14 +7035,121 @@
         </p:blipFill>
         <p:spPr>
           <a:xfrm>
-            <a:off x="0" y="86"/>
-            <a:ext cx="12191695" cy="6857829"/>
+            <a:off x="0" y="0"/>
+            <a:ext cx="12191695" cy="6858000"/>
           </a:xfrm>
           <a:prstGeom prst="rect">
             <a:avLst/>
           </a:prstGeom>
         </p:spPr>
       </p:pic>
+      <p:sp>
+        <p:nvSpPr>
+          <p:cNvPr id="3" name="Shape 0"/>
+          <p:cNvSpPr/>
+          <p:nvPr/>
+        </p:nvSpPr>
+        <p:spPr>
+          <a:xfrm>
+            <a:off x="0" y="6414516"/>
+            <a:ext cx="12191695" cy="443484"/>
+          </a:xfrm>
+          <a:prstGeom prst="rect">
+            <a:avLst/>
+          </a:prstGeom>
+          <a:solidFill>
+            <a:srgbClr val="F8FAFC"/>
+          </a:solidFill>
+          <a:ln w="10160">
+            <a:solidFill>
+              <a:srgbClr val="E2E8F0"/>
+            </a:solidFill>
+            <a:prstDash val="solid"/>
+          </a:ln>
+        </p:spPr>
+      </p:sp>
+      <p:sp>
+        <p:nvSpPr>
+          <p:cNvPr id="4" name="Text 1"/>
+          <p:cNvSpPr/>
+          <p:nvPr/>
+        </p:nvSpPr>
+        <p:spPr>
+          <a:xfrm>
+            <a:off x="384048" y="6510528"/>
+            <a:ext cx="6995160" cy="164592"/>
+          </a:xfrm>
+          <a:prstGeom prst="rect">
+            <a:avLst/>
+          </a:prstGeom>
+          <a:noFill/>
+          <a:ln/>
+        </p:spPr>
+        <p:txBody>
+          <a:bodyPr wrap="square" lIns="0" tIns="0" rIns="0" bIns="0" rtlCol="0" anchor="ctr">
+            <a:normAutofit/>
+          </a:bodyPr>
+          <a:lstStyle/>
+          <a:p>
+            <a:pPr indent="0" marL="0">
+              <a:buNone/>
+            </a:pPr>
+            <a:r>
+              <a:rPr lang="en-US" sz="820" i="1" dirty="0">
+                <a:solidFill>
+                  <a:srgbClr val="94A3B8"/>
+                </a:solidFill>
+                <a:latin typeface="Microsoft YaHei" pitchFamily="34" charset="0"/>
+                <a:ea typeface="Microsoft YaHei" pitchFamily="34" charset="-122"/>
+                <a:cs typeface="Microsoft YaHei" pitchFamily="34" charset="-120"/>
+              </a:rPr>
+              <a:t>引证：Hantschel O, et al. Nat Chem Biol. 2012；Targeting Leukemic Stem Cells, 2021.</a:t>
+            </a:r>
+            <a:endParaRPr lang="en-US" sz="820" dirty="0"/>
+          </a:p>
+        </p:txBody>
+      </p:sp>
+      <p:sp>
+        <p:nvSpPr>
+          <p:cNvPr id="5" name="Text 2"/>
+          <p:cNvSpPr/>
+          <p:nvPr/>
+        </p:nvSpPr>
+        <p:spPr>
+          <a:xfrm>
+            <a:off x="7498080" y="6501384"/>
+            <a:ext cx="4315968" cy="182880"/>
+          </a:xfrm>
+          <a:prstGeom prst="rect">
+            <a:avLst/>
+          </a:prstGeom>
+          <a:noFill/>
+          <a:ln/>
+        </p:spPr>
+        <p:txBody>
+          <a:bodyPr wrap="square" lIns="0" tIns="0" rIns="0" bIns="0" rtlCol="0" anchor="ctr">
+            <a:normAutofit/>
+          </a:bodyPr>
+          <a:lstStyle/>
+          <a:p>
+            <a:pPr algn="r" indent="0" marL="0">
+              <a:buNone/>
+            </a:pPr>
+            <a:r>
+              <a:rPr lang="en-US" sz="840" dirty="0">
+                <a:solidFill>
+                  <a:srgbClr val="64748B"/>
+                </a:solidFill>
+                <a:latin typeface="Microsoft YaHei" pitchFamily="34" charset="0"/>
+                <a:ea typeface="Microsoft YaHei" pitchFamily="34" charset="-122"/>
+                <a:cs typeface="Microsoft YaHei" pitchFamily="34" charset="-120"/>
+              </a:rPr>
+              <a:t>张家赫｜学号：2024193112｜儿科班｜PBL Case 1</a:t>
+            </a:r>
+            <a:endParaRPr lang="en-US" sz="840" dirty="0"/>
+          </a:p>
+        </p:txBody>
+      </p:sp>
     </p:spTree>
   </p:cSld>
   <p:clrMapOvr>
